--- a/docs/PPT/Agent评测.pptx
+++ b/docs/PPT/Agent评测.pptx
@@ -9,8 +9,9 @@
     <p:sldId id="258" r:id="rId3"/>
     <p:sldId id="259" r:id="rId4"/>
     <p:sldId id="260" r:id="rId5"/>
-    <p:sldId id="261" r:id="rId6"/>
-    <p:sldId id="262" r:id="rId7"/>
+    <p:sldId id="263" r:id="rId6"/>
+    <p:sldId id="261" r:id="rId7"/>
+    <p:sldId id="262" r:id="rId8"/>
   </p:sldIdLst>
   <p:sldSz cx="12192000" cy="6858000"/>
   <p:notesSz cx="6858000" cy="9144000"/>
@@ -648,6 +649,13 @@
             <a:noFill/>
           </a:ln>
         </p:spPr>
+        <p:txBody>
+          <a:bodyPr/>
+          <a:lstStyle/>
+          <a:p>
+            <a:endParaRPr/>
+          </a:p>
+        </p:txBody>
       </p:sp>
       <p:sp>
         <p:nvSpPr>
@@ -684,7 +692,7 @@
                 <a:ea typeface="Segoe UI"/>
                 <a:cs typeface="Segoe UI"/>
               </a:rPr>
-              <a:t>02 / 07</a:t>
+              <a:t>02 / 08</a:t>
             </a:r>
           </a:p>
         </p:txBody>
@@ -1905,6 +1913,13 @@
             <a:noFill/>
           </a:ln>
         </p:spPr>
+        <p:txBody>
+          <a:bodyPr/>
+          <a:lstStyle/>
+          <a:p>
+            <a:endParaRPr/>
+          </a:p>
+        </p:txBody>
       </p:sp>
       <p:sp>
         <p:nvSpPr>
@@ -1941,7 +1956,7 @@
                 <a:ea typeface="Segoe UI"/>
                 <a:cs typeface="Segoe UI"/>
               </a:rPr>
-              <a:t>03 / 07</a:t>
+              <a:t>03 / 08</a:t>
             </a:r>
           </a:p>
         </p:txBody>
@@ -6836,6 +6851,13 @@
             <a:noFill/>
           </a:ln>
         </p:spPr>
+        <p:txBody>
+          <a:bodyPr/>
+          <a:lstStyle/>
+          <a:p>
+            <a:endParaRPr/>
+          </a:p>
+        </p:txBody>
       </p:sp>
       <p:sp>
         <p:nvSpPr>
@@ -6872,7 +6894,7 @@
                 <a:ea typeface="Segoe UI"/>
                 <a:cs typeface="Segoe UI"/>
               </a:rPr>
-              <a:t>04 / 07</a:t>
+              <a:t>04 / 08</a:t>
             </a:r>
           </a:p>
         </p:txBody>
@@ -9093,6 +9115,13 @@
             <a:noFill/>
           </a:ln>
         </p:spPr>
+        <p:txBody>
+          <a:bodyPr/>
+          <a:lstStyle/>
+          <a:p>
+            <a:endParaRPr/>
+          </a:p>
+        </p:txBody>
       </p:sp>
       <p:sp>
         <p:nvSpPr>
@@ -9129,7 +9158,7 @@
                 <a:ea typeface="Segoe UI"/>
                 <a:cs typeface="Segoe UI"/>
               </a:rPr>
-              <a:t>05 / 07</a:t>
+              <a:t>05 / 08</a:t>
             </a:r>
           </a:p>
         </p:txBody>
@@ -11477,14 +11506,6 @@
 <file path=ppt/slides/slide5.xml><?xml version="1.0" encoding="utf-8"?>
 <p:sld xmlns:a="http://schemas.openxmlformats.org/drawingml/2006/main" xmlns:r="http://schemas.openxmlformats.org/officeDocument/2006/relationships" xmlns:p="http://schemas.openxmlformats.org/presentationml/2006/main">
   <p:cSld>
-    <p:bg>
-      <p:bgPr>
-        <a:solidFill>
-          <a:schemeClr val="lt1"/>
-        </a:solidFill>
-        <a:effectLst/>
-      </p:bgPr>
-    </p:bg>
     <p:spTree>
       <p:nvGrpSpPr>
         <p:cNvPr id="1" name=""/>
@@ -11501,7 +11522,7 @@
       </p:grpSpPr>
       <p:sp>
         <p:nvSpPr>
-          <p:cNvPr id="2" name="Rectangle 2"/>
+          <p:cNvPr id="2" name="Rectangle 1"/>
           <p:cNvSpPr/>
           <p:nvPr/>
         </p:nvSpPr>
@@ -11514,741 +11535,1801 @@
             <a:avLst/>
           </a:prstGeom>
           <a:solidFill>
+            <a:srgbClr val="1E3A8A"/>
+          </a:solidFill>
+          <a:ln>
+            <a:noFill/>
+          </a:ln>
+          <a:effectLst/>
+        </p:spPr>
+        <p:style>
+          <a:lnRef idx="1">
             <a:schemeClr val="accent1"/>
+          </a:lnRef>
+          <a:fillRef idx="3">
+            <a:schemeClr val="accent1"/>
+          </a:fillRef>
+          <a:effectRef idx="2">
+            <a:schemeClr val="accent1"/>
+          </a:effectRef>
+          <a:fontRef idx="minor">
+            <a:schemeClr val="lt1"/>
+          </a:fontRef>
+        </p:style>
+        <p:txBody>
+          <a:bodyPr rtlCol="0" anchor="ctr"/>
+          <a:lstStyle/>
+          <a:p>
+            <a:pPr algn="ctr"/>
+            <a:endParaRPr/>
+          </a:p>
+        </p:txBody>
+      </p:sp>
+      <p:sp>
+        <p:nvSpPr>
+          <p:cNvPr id="3" name="TextBox 2"/>
+          <p:cNvSpPr txBox="1"/>
+          <p:nvPr/>
+        </p:nvSpPr>
+        <p:spPr>
+          <a:xfrm>
+            <a:off x="566420" y="203200"/>
+            <a:ext cx="1143000" cy="203200"/>
+          </a:xfrm>
+          <a:prstGeom prst="rect">
+            <a:avLst/>
+          </a:prstGeom>
+          <a:noFill/>
+        </p:spPr>
+        <p:txBody>
+          <a:bodyPr wrap="square" lIns="0" tIns="0" rIns="0" bIns="0" anchor="t">
+            <a:noAutofit/>
+          </a:bodyPr>
+          <a:lstStyle/>
+          <a:p>
+            <a:pPr algn="l">
+              <a:lnSpc>
+                <a:spcPct val="100000"/>
+              </a:lnSpc>
+            </a:pPr>
+            <a:r>
+              <a:rPr sz="1050" b="0">
+                <a:solidFill>
+                  <a:srgbClr val="1E3A8A"/>
+                </a:solidFill>
+                <a:latin typeface="Segoe UI"/>
+                <a:ea typeface="Microsoft YaHei"/>
+                <a:cs typeface="Segoe UI"/>
+              </a:rPr>
+              <a:t>06 / 08</a:t>
+            </a:r>
+          </a:p>
+        </p:txBody>
+      </p:sp>
+      <p:sp>
+        <p:nvSpPr>
+          <p:cNvPr id="4" name="TextBox 3"/>
+          <p:cNvSpPr txBox="1"/>
+          <p:nvPr/>
+        </p:nvSpPr>
+        <p:spPr>
+          <a:xfrm>
+            <a:off x="556260" y="419100"/>
+            <a:ext cx="10795000" cy="508000"/>
+          </a:xfrm>
+          <a:prstGeom prst="rect">
+            <a:avLst/>
+          </a:prstGeom>
+          <a:noFill/>
+        </p:spPr>
+        <p:txBody>
+          <a:bodyPr wrap="square" lIns="0" tIns="0" rIns="0" bIns="0" anchor="t">
+            <a:noAutofit/>
+          </a:bodyPr>
+          <a:lstStyle/>
+          <a:p>
+            <a:pPr algn="l">
+              <a:lnSpc>
+                <a:spcPct val="100000"/>
+              </a:lnSpc>
+            </a:pPr>
+            <a:r>
+              <a:rPr sz="3000" b="1">
+                <a:solidFill>
+                  <a:srgbClr val="1E3A8A"/>
+                </a:solidFill>
+                <a:latin typeface="Segoe UI"/>
+                <a:ea typeface="Microsoft YaHei"/>
+                <a:cs typeface="Segoe UI"/>
+              </a:rPr>
+              <a:t>任务执行与评分实战 · 以 T053 为例</a:t>
+            </a:r>
+          </a:p>
+        </p:txBody>
+      </p:sp>
+      <p:sp>
+        <p:nvSpPr>
+          <p:cNvPr id="5" name="Rectangle 4"/>
+          <p:cNvSpPr/>
+          <p:nvPr/>
+        </p:nvSpPr>
+        <p:spPr>
+          <a:xfrm>
+            <a:off x="571500" y="914400"/>
+            <a:ext cx="762000" cy="30480"/>
+          </a:xfrm>
+          <a:prstGeom prst="rect">
+            <a:avLst/>
+          </a:prstGeom>
+          <a:solidFill>
+            <a:srgbClr val="1E3A8A"/>
           </a:solidFill>
           <a:ln>
             <a:noFill/>
           </a:ln>
-        </p:spPr>
-      </p:sp>
-      <p:sp>
-        <p:nvSpPr>
-          <p:cNvPr id="3" name="TextBox 3"/>
-          <p:cNvSpPr txBox="1"/>
-          <p:nvPr/>
-        </p:nvSpPr>
-        <p:spPr>
-          <a:xfrm>
-            <a:off x="566166" y="229552"/>
-            <a:ext cx="484194" cy="205359"/>
-          </a:xfrm>
-          <a:prstGeom prst="rect">
-            <a:avLst/>
-          </a:prstGeom>
-          <a:noFill/>
-          <a:ln>
-            <a:noFill/>
-          </a:ln>
-        </p:spPr>
-        <p:txBody>
-          <a:bodyPr wrap="none" lIns="0" tIns="0" rIns="0" bIns="0" anchor="t" anchorCtr="0">
-            <a:spAutoFit/>
-          </a:bodyPr>
-          <a:lstStyle/>
-          <a:p>
-            <a:pPr algn="l"/>
-            <a:r>
-              <a:rPr lang="en-US" sz="1050" dirty="0">
-                <a:solidFill>
-                  <a:schemeClr val="accent6"/>
-                </a:solidFill>
-                <a:latin typeface="Segoe UI"/>
-                <a:ea typeface="Segoe UI"/>
-                <a:cs typeface="Segoe UI"/>
-              </a:rPr>
-              <a:t>06 / 07</a:t>
-            </a:r>
-          </a:p>
-        </p:txBody>
-      </p:sp>
-      <p:sp>
-        <p:nvSpPr>
-          <p:cNvPr id="4" name="TextBox 4"/>
-          <p:cNvSpPr txBox="1"/>
-          <p:nvPr/>
-        </p:nvSpPr>
-        <p:spPr>
-          <a:xfrm>
-            <a:off x="556260" y="438150"/>
-            <a:ext cx="5304401" cy="461665"/>
-          </a:xfrm>
-          <a:prstGeom prst="rect">
-            <a:avLst/>
-          </a:prstGeom>
-          <a:noFill/>
-          <a:ln>
-            <a:noFill/>
-          </a:ln>
-        </p:spPr>
-        <p:txBody>
-          <a:bodyPr wrap="none" lIns="0" tIns="0" rIns="0" bIns="0" anchor="t" anchorCtr="0">
-            <a:spAutoFit/>
-          </a:bodyPr>
-          <a:lstStyle/>
-          <a:p>
-            <a:pPr algn="l"/>
-            <a:r>
-              <a:rPr lang="en-US" altLang="zh-CN" sz="3000" b="1" dirty="0" err="1" smtClean="0">
-                <a:solidFill>
-                  <a:schemeClr val="accent1"/>
-                </a:solidFill>
-                <a:latin typeface="Segoe UI"/>
-                <a:ea typeface="Microsoft YaHei"/>
-                <a:cs typeface="Segoe UI"/>
-              </a:rPr>
-              <a:t>PawBench</a:t>
-            </a:r>
-            <a:r>
-              <a:rPr lang="zh-CN" sz="3000" b="1" dirty="0" smtClean="0">
-                <a:solidFill>
-                  <a:schemeClr val="accent1"/>
-                </a:solidFill>
-                <a:latin typeface="Segoe UI"/>
-                <a:ea typeface="Microsoft YaHei"/>
-                <a:cs typeface="Segoe UI"/>
-              </a:rPr>
-              <a:t>应用</a:t>
-            </a:r>
-            <a:r>
-              <a:rPr lang="zh-CN" sz="3000" b="1" dirty="0">
-                <a:solidFill>
-                  <a:schemeClr val="accent1"/>
-                </a:solidFill>
-                <a:latin typeface="Segoe UI"/>
-                <a:ea typeface="Microsoft YaHei"/>
-                <a:cs typeface="Segoe UI"/>
-              </a:rPr>
-              <a:t>场景与集成方式</a:t>
-            </a:r>
-          </a:p>
-        </p:txBody>
-      </p:sp>
-      <p:sp>
-        <p:nvSpPr>
-          <p:cNvPr id="6" name="TextBox 6"/>
-          <p:cNvSpPr txBox="1"/>
-          <p:nvPr/>
-        </p:nvSpPr>
-        <p:spPr>
-          <a:xfrm>
-            <a:off x="563118" y="1203008"/>
-            <a:ext cx="1416139" cy="322707"/>
-          </a:xfrm>
-          <a:prstGeom prst="rect">
-            <a:avLst/>
-          </a:prstGeom>
-          <a:noFill/>
-          <a:ln>
-            <a:noFill/>
-          </a:ln>
-        </p:spPr>
-        <p:txBody>
-          <a:bodyPr wrap="none" lIns="0" tIns="0" rIns="0" bIns="0" anchor="t" anchorCtr="0">
-            <a:spAutoFit/>
-          </a:bodyPr>
-          <a:lstStyle/>
-          <a:p>
-            <a:pPr algn="l"/>
-            <a:r>
-              <a:rPr lang="zh-CN" sz="1650" b="1" dirty="0">
-                <a:solidFill>
-                  <a:schemeClr val="accent1"/>
-                </a:solidFill>
-                <a:latin typeface="Segoe UI"/>
-                <a:ea typeface="Microsoft YaHei"/>
-                <a:cs typeface="Segoe UI"/>
-              </a:rPr>
-              <a:t>典型应用场景</a:t>
-            </a:r>
-          </a:p>
-        </p:txBody>
-      </p:sp>
-      <p:sp>
-        <p:nvSpPr>
-          <p:cNvPr id="7" name="Rectangle 7"/>
+          <a:effectLst/>
+        </p:spPr>
+        <p:style>
+          <a:lnRef idx="1">
+            <a:schemeClr val="accent1"/>
+          </a:lnRef>
+          <a:fillRef idx="3">
+            <a:schemeClr val="accent1"/>
+          </a:fillRef>
+          <a:effectRef idx="2">
+            <a:schemeClr val="accent1"/>
+          </a:effectRef>
+          <a:fontRef idx="minor">
+            <a:schemeClr val="lt1"/>
+          </a:fontRef>
+        </p:style>
+        <p:txBody>
+          <a:bodyPr rtlCol="0" anchor="ctr"/>
+          <a:lstStyle/>
+          <a:p>
+            <a:pPr algn="ctr"/>
+            <a:endParaRPr/>
+          </a:p>
+        </p:txBody>
+      </p:sp>
+      <p:sp>
+        <p:nvSpPr>
+          <p:cNvPr id="6" name="TextBox 5"/>
+          <p:cNvSpPr txBox="1"/>
+          <p:nvPr/>
+        </p:nvSpPr>
+        <p:spPr>
+          <a:xfrm>
+            <a:off x="562610" y="1016000"/>
+            <a:ext cx="11049000" cy="254000"/>
+          </a:xfrm>
+          <a:prstGeom prst="rect">
+            <a:avLst/>
+          </a:prstGeom>
+          <a:noFill/>
+        </p:spPr>
+        <p:txBody>
+          <a:bodyPr wrap="square" lIns="0" tIns="0" rIns="0" bIns="0" anchor="t">
+            <a:noAutofit/>
+          </a:bodyPr>
+          <a:lstStyle/>
+          <a:p>
+            <a:pPr algn="l">
+              <a:lnSpc>
+                <a:spcPct val="100000"/>
+              </a:lnSpc>
+            </a:pPr>
+            <a:r>
+              <a:rPr sz="1400" b="0">
+                <a:solidFill>
+                  <a:srgbClr val="64748B"/>
+                </a:solidFill>
+                <a:latin typeface="Segoe UI"/>
+                <a:ea typeface="Microsoft YaHei"/>
+                <a:cs typeface="Segoe UI"/>
+              </a:rPr>
+              <a:t>用一个真实任务卡，看清 PawBench「执行 → 采集 → 评分 → 汇总」的完整评测链路</a:t>
+            </a:r>
+          </a:p>
+        </p:txBody>
+      </p:sp>
+      <p:sp>
+        <p:nvSpPr>
+          <p:cNvPr id="7" name="Rectangle 6"/>
           <p:cNvSpPr/>
           <p:nvPr/>
         </p:nvSpPr>
         <p:spPr>
           <a:xfrm>
-            <a:off x="571500" y="1571625"/>
-            <a:ext cx="5238750" cy="666750"/>
+            <a:off x="571500" y="1320800"/>
+            <a:ext cx="11049000" cy="736600"/>
           </a:xfrm>
           <a:prstGeom prst="rect">
             <a:avLst/>
           </a:prstGeom>
           <a:solidFill>
-            <a:schemeClr val="lt2"/>
+            <a:srgbClr val="E8F0FE"/>
           </a:solidFill>
           <a:ln>
             <a:noFill/>
           </a:ln>
-        </p:spPr>
-      </p:sp>
-      <p:sp>
-        <p:nvSpPr>
-          <p:cNvPr id="8" name="Rectangle 8"/>
+          <a:effectLst/>
+        </p:spPr>
+        <p:style>
+          <a:lnRef idx="1">
+            <a:schemeClr val="accent1"/>
+          </a:lnRef>
+          <a:fillRef idx="3">
+            <a:schemeClr val="accent1"/>
+          </a:fillRef>
+          <a:effectRef idx="2">
+            <a:schemeClr val="accent1"/>
+          </a:effectRef>
+          <a:fontRef idx="minor">
+            <a:schemeClr val="lt1"/>
+          </a:fontRef>
+        </p:style>
+        <p:txBody>
+          <a:bodyPr rtlCol="0" anchor="ctr"/>
+          <a:lstStyle/>
+          <a:p>
+            <a:pPr algn="ctr"/>
+            <a:endParaRPr/>
+          </a:p>
+        </p:txBody>
+      </p:sp>
+      <p:sp>
+        <p:nvSpPr>
+          <p:cNvPr id="8" name="Rectangle 7"/>
           <p:cNvSpPr/>
           <p:nvPr/>
         </p:nvSpPr>
         <p:spPr>
           <a:xfrm>
-            <a:off x="571500" y="1571625"/>
-            <a:ext cx="38100" cy="666750"/>
+            <a:off x="571500" y="1320800"/>
+            <a:ext cx="50800" cy="736600"/>
           </a:xfrm>
           <a:prstGeom prst="rect">
             <a:avLst/>
           </a:prstGeom>
           <a:solidFill>
+            <a:srgbClr val="1E3A8A"/>
+          </a:solidFill>
+          <a:ln>
+            <a:noFill/>
+          </a:ln>
+          <a:effectLst/>
+        </p:spPr>
+        <p:style>
+          <a:lnRef idx="1">
             <a:schemeClr val="accent1"/>
+          </a:lnRef>
+          <a:fillRef idx="3">
+            <a:schemeClr val="accent1"/>
+          </a:fillRef>
+          <a:effectRef idx="2">
+            <a:schemeClr val="accent1"/>
+          </a:effectRef>
+          <a:fontRef idx="minor">
+            <a:schemeClr val="lt1"/>
+          </a:fontRef>
+        </p:style>
+        <p:txBody>
+          <a:bodyPr rtlCol="0" anchor="ctr"/>
+          <a:lstStyle/>
+          <a:p>
+            <a:pPr algn="ctr"/>
+            <a:endParaRPr/>
+          </a:p>
+        </p:txBody>
+      </p:sp>
+      <p:sp>
+        <p:nvSpPr>
+          <p:cNvPr id="9" name="TextBox 8"/>
+          <p:cNvSpPr txBox="1"/>
+          <p:nvPr/>
+        </p:nvSpPr>
+        <p:spPr>
+          <a:xfrm>
+            <a:off x="762000" y="1409700"/>
+            <a:ext cx="10795000" cy="254000"/>
+          </a:xfrm>
+          <a:prstGeom prst="rect">
+            <a:avLst/>
+          </a:prstGeom>
+          <a:noFill/>
+        </p:spPr>
+        <p:txBody>
+          <a:bodyPr wrap="square" lIns="0" tIns="0" rIns="0" bIns="0" anchor="t">
+            <a:noAutofit/>
+          </a:bodyPr>
+          <a:lstStyle/>
+          <a:p>
+            <a:pPr algn="l">
+              <a:lnSpc>
+                <a:spcPct val="100000"/>
+              </a:lnSpc>
+            </a:pPr>
+            <a:r>
+              <a:rPr sz="1250" b="1">
+                <a:solidFill>
+                  <a:srgbClr val="1E3A8A"/>
+                </a:solidFill>
+                <a:latin typeface="Segoe UI"/>
+                <a:ea typeface="Microsoft YaHei"/>
+                <a:cs typeface="Segoe UI"/>
+              </a:rPr>
+              <a:t>任务 T053</a:t>
+            </a:r>
+            <a:r>
+              <a:rPr sz="1150" b="0">
+                <a:solidFill>
+                  <a:srgbClr val="1A1A2E"/>
+                </a:solidFill>
+                <a:latin typeface="Segoe UI"/>
+                <a:ea typeface="Microsoft YaHei"/>
+                <a:cs typeface="Segoe UI"/>
+              </a:rPr>
+              <a:t>   ｜  来源 pinchbench   ｜  类型 内容创作·写作   ｜  复杂度 L1   ｜  环境 closed   ｜  评分 hybrid（自动 0.6 + LLM 0.4）</a:t>
+            </a:r>
+          </a:p>
+        </p:txBody>
+      </p:sp>
+      <p:sp>
+        <p:nvSpPr>
+          <p:cNvPr id="10" name="TextBox 9"/>
+          <p:cNvSpPr txBox="1"/>
+          <p:nvPr/>
+        </p:nvSpPr>
+        <p:spPr>
+          <a:xfrm>
+            <a:off x="762000" y="1701800"/>
+            <a:ext cx="10795000" cy="279400"/>
+          </a:xfrm>
+          <a:prstGeom prst="rect">
+            <a:avLst/>
+          </a:prstGeom>
+          <a:noFill/>
+        </p:spPr>
+        <p:txBody>
+          <a:bodyPr wrap="square" lIns="0" tIns="0" rIns="0" bIns="0" anchor="t">
+            <a:noAutofit/>
+          </a:bodyPr>
+          <a:lstStyle/>
+          <a:p>
+            <a:pPr algn="l">
+              <a:lnSpc>
+                <a:spcPct val="100000"/>
+              </a:lnSpc>
+            </a:pPr>
+            <a:r>
+              <a:rPr sz="1100" b="1">
+                <a:solidFill>
+                  <a:srgbClr val="1A1A2E"/>
+                </a:solidFill>
+                <a:latin typeface="Segoe UI"/>
+                <a:ea typeface="Microsoft YaHei"/>
+                <a:cs typeface="Segoe UI"/>
+              </a:rPr>
+              <a:t>指令：</a:t>
+            </a:r>
+            <a:r>
+              <a:rPr sz="1100" b="0">
+                <a:solidFill>
+                  <a:srgbClr val="1A1A2E"/>
+                </a:solidFill>
+                <a:latin typeface="Segoe UI"/>
+                <a:ea typeface="Microsoft YaHei"/>
+                <a:cs typeface="Segoe UI"/>
+              </a:rPr>
+              <a:t>撰写一篇约 500 词《远程办公对软件开发者的好处》博客，并保存为 </a:t>
+            </a:r>
+            <a:r>
+              <a:rPr sz="1100" b="1">
+                <a:solidFill>
+                  <a:srgbClr val="2563EB"/>
+                </a:solidFill>
+                <a:latin typeface="Consolas"/>
+                <a:ea typeface="Microsoft YaHei"/>
+                <a:cs typeface="Consolas"/>
+              </a:rPr>
+              <a:t>blog_post.md</a:t>
+            </a:r>
+            <a:r>
+              <a:rPr sz="1100" b="0">
+                <a:solidFill>
+                  <a:srgbClr val="64748B"/>
+                </a:solidFill>
+                <a:latin typeface="Segoe UI"/>
+                <a:ea typeface="Microsoft YaHei"/>
+                <a:cs typeface="Segoe UI"/>
+              </a:rPr>
+              <a:t>  （纯文本、无外部依赖）</a:t>
+            </a:r>
+          </a:p>
+        </p:txBody>
+      </p:sp>
+      <p:sp>
+        <p:nvSpPr>
+          <p:cNvPr id="11" name="TextBox 10"/>
+          <p:cNvSpPr txBox="1"/>
+          <p:nvPr/>
+        </p:nvSpPr>
+        <p:spPr>
+          <a:xfrm>
+            <a:off x="3213100" y="3632200"/>
+            <a:ext cx="254000" cy="304800"/>
+          </a:xfrm>
+          <a:prstGeom prst="rect">
+            <a:avLst/>
+          </a:prstGeom>
+          <a:noFill/>
+        </p:spPr>
+        <p:txBody>
+          <a:bodyPr wrap="square" lIns="0" tIns="0" rIns="0" bIns="0" anchor="ctr">
+            <a:noAutofit/>
+          </a:bodyPr>
+          <a:lstStyle/>
+          <a:p>
+            <a:pPr algn="ctr">
+              <a:lnSpc>
+                <a:spcPct val="100000"/>
+              </a:lnSpc>
+            </a:pPr>
+            <a:r>
+              <a:rPr sz="1300" b="1">
+                <a:solidFill>
+                  <a:srgbClr val="2563EB"/>
+                </a:solidFill>
+                <a:latin typeface="Segoe UI"/>
+                <a:ea typeface="Microsoft YaHei"/>
+                <a:cs typeface="Segoe UI"/>
+              </a:rPr>
+              <a:t>▶</a:t>
+            </a:r>
+          </a:p>
+        </p:txBody>
+      </p:sp>
+      <p:sp>
+        <p:nvSpPr>
+          <p:cNvPr id="12" name="TextBox 11"/>
+          <p:cNvSpPr txBox="1"/>
+          <p:nvPr/>
+        </p:nvSpPr>
+        <p:spPr>
+          <a:xfrm>
+            <a:off x="6019800" y="3632200"/>
+            <a:ext cx="254000" cy="304800"/>
+          </a:xfrm>
+          <a:prstGeom prst="rect">
+            <a:avLst/>
+          </a:prstGeom>
+          <a:noFill/>
+        </p:spPr>
+        <p:txBody>
+          <a:bodyPr wrap="square" lIns="0" tIns="0" rIns="0" bIns="0" anchor="ctr">
+            <a:noAutofit/>
+          </a:bodyPr>
+          <a:lstStyle/>
+          <a:p>
+            <a:pPr algn="ctr">
+              <a:lnSpc>
+                <a:spcPct val="100000"/>
+              </a:lnSpc>
+            </a:pPr>
+            <a:r>
+              <a:rPr sz="1300" b="1">
+                <a:solidFill>
+                  <a:srgbClr val="2563EB"/>
+                </a:solidFill>
+                <a:latin typeface="Segoe UI"/>
+                <a:ea typeface="Microsoft YaHei"/>
+                <a:cs typeface="Segoe UI"/>
+              </a:rPr>
+              <a:t>▶</a:t>
+            </a:r>
+          </a:p>
+        </p:txBody>
+      </p:sp>
+      <p:sp>
+        <p:nvSpPr>
+          <p:cNvPr id="13" name="TextBox 12"/>
+          <p:cNvSpPr txBox="1"/>
+          <p:nvPr/>
+        </p:nvSpPr>
+        <p:spPr>
+          <a:xfrm>
+            <a:off x="8826500" y="3632200"/>
+            <a:ext cx="254000" cy="304800"/>
+          </a:xfrm>
+          <a:prstGeom prst="rect">
+            <a:avLst/>
+          </a:prstGeom>
+          <a:noFill/>
+        </p:spPr>
+        <p:txBody>
+          <a:bodyPr wrap="square" lIns="0" tIns="0" rIns="0" bIns="0" anchor="ctr">
+            <a:noAutofit/>
+          </a:bodyPr>
+          <a:lstStyle/>
+          <a:p>
+            <a:pPr algn="ctr">
+              <a:lnSpc>
+                <a:spcPct val="100000"/>
+              </a:lnSpc>
+            </a:pPr>
+            <a:r>
+              <a:rPr sz="1300" b="1">
+                <a:solidFill>
+                  <a:srgbClr val="2563EB"/>
+                </a:solidFill>
+                <a:latin typeface="Segoe UI"/>
+                <a:ea typeface="Microsoft YaHei"/>
+                <a:cs typeface="Segoe UI"/>
+              </a:rPr>
+              <a:t>▶</a:t>
+            </a:r>
+          </a:p>
+        </p:txBody>
+      </p:sp>
+      <p:sp>
+        <p:nvSpPr>
+          <p:cNvPr id="14" name="Rectangle 13"/>
+          <p:cNvSpPr/>
+          <p:nvPr/>
+        </p:nvSpPr>
+        <p:spPr>
+          <a:xfrm>
+            <a:off x="571500" y="2235200"/>
+            <a:ext cx="2628900" cy="3175000"/>
+          </a:xfrm>
+          <a:prstGeom prst="rect">
+            <a:avLst/>
+          </a:prstGeom>
+          <a:solidFill>
+            <a:srgbClr val="FFFFFF"/>
           </a:solidFill>
-          <a:ln>
-            <a:noFill/>
-          </a:ln>
-        </p:spPr>
-      </p:sp>
-      <p:sp>
-        <p:nvSpPr>
-          <p:cNvPr id="9" name="TextBox 9"/>
-          <p:cNvSpPr txBox="1"/>
-          <p:nvPr/>
-        </p:nvSpPr>
-        <p:spPr>
-          <a:xfrm>
-            <a:off x="773811" y="1674971"/>
-            <a:ext cx="1218789" cy="278702"/>
-          </a:xfrm>
-          <a:prstGeom prst="rect">
-            <a:avLst/>
-          </a:prstGeom>
-          <a:noFill/>
-          <a:ln>
-            <a:noFill/>
-          </a:ln>
-        </p:spPr>
-        <p:txBody>
-          <a:bodyPr wrap="none" lIns="0" tIns="0" rIns="0" bIns="0" anchor="t" anchorCtr="0">
-            <a:spAutoFit/>
-          </a:bodyPr>
-          <a:lstStyle/>
-          <a:p>
-            <a:pPr algn="l"/>
-            <a:r>
-              <a:rPr lang="zh-CN" sz="1420" b="1" dirty="0">
-                <a:solidFill>
-                  <a:schemeClr val="dk1"/>
-                </a:solidFill>
-                <a:latin typeface="Segoe UI"/>
-                <a:ea typeface="Microsoft YaHei"/>
-                <a:cs typeface="Segoe UI"/>
-              </a:rPr>
-              <a:t>模型升级评估</a:t>
-            </a:r>
-          </a:p>
-        </p:txBody>
-      </p:sp>
-      <p:sp>
-        <p:nvSpPr>
-          <p:cNvPr id="10" name="TextBox 10"/>
-          <p:cNvSpPr txBox="1"/>
-          <p:nvPr/>
-        </p:nvSpPr>
-        <p:spPr>
-          <a:xfrm>
-            <a:off x="775335" y="1955006"/>
-            <a:ext cx="3834069" cy="220028"/>
-          </a:xfrm>
-          <a:prstGeom prst="rect">
-            <a:avLst/>
-          </a:prstGeom>
-          <a:noFill/>
-          <a:ln>
-            <a:noFill/>
-          </a:ln>
-        </p:spPr>
-        <p:txBody>
-          <a:bodyPr wrap="none" lIns="0" tIns="0" rIns="0" bIns="0" anchor="t" anchorCtr="0">
-            <a:spAutoFit/>
-          </a:bodyPr>
-          <a:lstStyle/>
-          <a:p>
-            <a:pPr algn="l"/>
-            <a:r>
-              <a:rPr lang="zh-CN" sz="1120" dirty="0">
-                <a:solidFill>
-                  <a:schemeClr val="accent5"/>
-                </a:solidFill>
-                <a:latin typeface="Segoe UI"/>
-                <a:ea typeface="Microsoft YaHei"/>
-                <a:cs typeface="Segoe UI"/>
-              </a:rPr>
-              <a:t>固定 Harness，横向跑新旧模型，看整体分和切片分变化</a:t>
-            </a:r>
-          </a:p>
-        </p:txBody>
-      </p:sp>
-      <p:sp>
-        <p:nvSpPr>
-          <p:cNvPr id="11" name="Rectangle 11"/>
+          <a:ln w="12700">
+            <a:solidFill>
+              <a:srgbClr val="E2E8F0"/>
+            </a:solidFill>
+          </a:ln>
+          <a:effectLst/>
+        </p:spPr>
+        <p:style>
+          <a:lnRef idx="1">
+            <a:schemeClr val="accent1"/>
+          </a:lnRef>
+          <a:fillRef idx="3">
+            <a:schemeClr val="accent1"/>
+          </a:fillRef>
+          <a:effectRef idx="2">
+            <a:schemeClr val="accent1"/>
+          </a:effectRef>
+          <a:fontRef idx="minor">
+            <a:schemeClr val="lt1"/>
+          </a:fontRef>
+        </p:style>
+        <p:txBody>
+          <a:bodyPr rtlCol="0" anchor="ctr"/>
+          <a:lstStyle/>
+          <a:p>
+            <a:pPr algn="ctr"/>
+            <a:endParaRPr/>
+          </a:p>
+        </p:txBody>
+      </p:sp>
+      <p:sp>
+        <p:nvSpPr>
+          <p:cNvPr id="15" name="Rectangle 14"/>
           <p:cNvSpPr/>
           <p:nvPr/>
         </p:nvSpPr>
         <p:spPr>
           <a:xfrm>
-            <a:off x="571500" y="2362200"/>
-            <a:ext cx="5238750" cy="666750"/>
+            <a:off x="571500" y="2235200"/>
+            <a:ext cx="2628900" cy="330200"/>
           </a:xfrm>
           <a:prstGeom prst="rect">
             <a:avLst/>
           </a:prstGeom>
           <a:solidFill>
-            <a:schemeClr val="lt2"/>
+            <a:srgbClr val="1E3A8A"/>
           </a:solidFill>
           <a:ln>
             <a:noFill/>
           </a:ln>
-        </p:spPr>
-      </p:sp>
-      <p:sp>
-        <p:nvSpPr>
-          <p:cNvPr id="12" name="Rectangle 12"/>
+          <a:effectLst/>
+        </p:spPr>
+        <p:style>
+          <a:lnRef idx="1">
+            <a:schemeClr val="accent1"/>
+          </a:lnRef>
+          <a:fillRef idx="3">
+            <a:schemeClr val="accent1"/>
+          </a:fillRef>
+          <a:effectRef idx="2">
+            <a:schemeClr val="accent1"/>
+          </a:effectRef>
+          <a:fontRef idx="minor">
+            <a:schemeClr val="lt1"/>
+          </a:fontRef>
+        </p:style>
+        <p:txBody>
+          <a:bodyPr rtlCol="0" anchor="ctr"/>
+          <a:lstStyle/>
+          <a:p>
+            <a:pPr algn="ctr"/>
+            <a:endParaRPr/>
+          </a:p>
+        </p:txBody>
+      </p:sp>
+      <p:sp>
+        <p:nvSpPr>
+          <p:cNvPr id="16" name="TextBox 15"/>
+          <p:cNvSpPr txBox="1"/>
+          <p:nvPr/>
+        </p:nvSpPr>
+        <p:spPr>
+          <a:xfrm>
+            <a:off x="571500" y="2286000"/>
+            <a:ext cx="2628900" cy="254000"/>
+          </a:xfrm>
+          <a:prstGeom prst="rect">
+            <a:avLst/>
+          </a:prstGeom>
+          <a:noFill/>
+        </p:spPr>
+        <p:txBody>
+          <a:bodyPr wrap="square" lIns="0" tIns="0" rIns="0" bIns="0" anchor="ctr">
+            <a:noAutofit/>
+          </a:bodyPr>
+          <a:lstStyle/>
+          <a:p>
+            <a:pPr algn="ctr">
+              <a:lnSpc>
+                <a:spcPct val="100000"/>
+              </a:lnSpc>
+            </a:pPr>
+            <a:r>
+              <a:rPr sz="1250" b="1">
+                <a:solidFill>
+                  <a:srgbClr val="FFFFFF"/>
+                </a:solidFill>
+                <a:latin typeface="Segoe UI"/>
+                <a:ea typeface="Microsoft YaHei"/>
+                <a:cs typeface="Segoe UI"/>
+              </a:rPr>
+              <a:t>① 沙箱执行</a:t>
+            </a:r>
+          </a:p>
+        </p:txBody>
+      </p:sp>
+      <p:sp>
+        <p:nvSpPr>
+          <p:cNvPr id="17" name="Rectangle 16"/>
           <p:cNvSpPr/>
           <p:nvPr/>
         </p:nvSpPr>
         <p:spPr>
           <a:xfrm>
-            <a:off x="571500" y="2362200"/>
-            <a:ext cx="38100" cy="666750"/>
+            <a:off x="3378200" y="2235200"/>
+            <a:ext cx="2628900" cy="3175000"/>
           </a:xfrm>
           <a:prstGeom prst="rect">
             <a:avLst/>
           </a:prstGeom>
           <a:solidFill>
+            <a:srgbClr val="FFFFFF"/>
+          </a:solidFill>
+          <a:ln w="12700">
+            <a:solidFill>
+              <a:srgbClr val="E2E8F0"/>
+            </a:solidFill>
+          </a:ln>
+          <a:effectLst/>
+        </p:spPr>
+        <p:style>
+          <a:lnRef idx="1">
             <a:schemeClr val="accent1"/>
+          </a:lnRef>
+          <a:fillRef idx="3">
+            <a:schemeClr val="accent1"/>
+          </a:fillRef>
+          <a:effectRef idx="2">
+            <a:schemeClr val="accent1"/>
+          </a:effectRef>
+          <a:fontRef idx="minor">
+            <a:schemeClr val="lt1"/>
+          </a:fontRef>
+        </p:style>
+        <p:txBody>
+          <a:bodyPr rtlCol="0" anchor="ctr"/>
+          <a:lstStyle/>
+          <a:p>
+            <a:pPr algn="ctr"/>
+            <a:endParaRPr/>
+          </a:p>
+        </p:txBody>
+      </p:sp>
+      <p:sp>
+        <p:nvSpPr>
+          <p:cNvPr id="18" name="Rectangle 17"/>
+          <p:cNvSpPr/>
+          <p:nvPr/>
+        </p:nvSpPr>
+        <p:spPr>
+          <a:xfrm>
+            <a:off x="3378200" y="2235200"/>
+            <a:ext cx="2628900" cy="330200"/>
+          </a:xfrm>
+          <a:prstGeom prst="rect">
+            <a:avLst/>
+          </a:prstGeom>
+          <a:solidFill>
+            <a:srgbClr val="1E3A8A"/>
           </a:solidFill>
           <a:ln>
             <a:noFill/>
           </a:ln>
-        </p:spPr>
-      </p:sp>
-      <p:sp>
-        <p:nvSpPr>
-          <p:cNvPr id="13" name="TextBox 13"/>
-          <p:cNvSpPr txBox="1"/>
-          <p:nvPr/>
-        </p:nvSpPr>
-        <p:spPr>
-          <a:xfrm>
-            <a:off x="773811" y="2465546"/>
-            <a:ext cx="1445562" cy="278702"/>
-          </a:xfrm>
-          <a:prstGeom prst="rect">
-            <a:avLst/>
-          </a:prstGeom>
-          <a:noFill/>
-          <a:ln>
-            <a:noFill/>
-          </a:ln>
-        </p:spPr>
-        <p:txBody>
-          <a:bodyPr wrap="none" lIns="0" tIns="0" rIns="0" bIns="0" anchor="t" anchorCtr="0">
-            <a:spAutoFit/>
-          </a:bodyPr>
-          <a:lstStyle/>
-          <a:p>
-            <a:pPr algn="l"/>
-            <a:r>
-              <a:rPr lang="zh-CN" sz="1420" b="1" dirty="0">
-                <a:solidFill>
-                  <a:schemeClr val="dk1"/>
-                </a:solidFill>
-                <a:latin typeface="Segoe UI"/>
-                <a:ea typeface="Microsoft YaHei"/>
-                <a:cs typeface="Segoe UI"/>
-              </a:rPr>
-              <a:t>Agent 框架迭代</a:t>
-            </a:r>
-          </a:p>
-        </p:txBody>
-      </p:sp>
-      <p:sp>
-        <p:nvSpPr>
-          <p:cNvPr id="14" name="TextBox 14"/>
-          <p:cNvSpPr txBox="1"/>
-          <p:nvPr/>
-        </p:nvSpPr>
-        <p:spPr>
-          <a:xfrm>
-            <a:off x="775335" y="2745581"/>
-            <a:ext cx="3986063" cy="220028"/>
-          </a:xfrm>
-          <a:prstGeom prst="rect">
-            <a:avLst/>
-          </a:prstGeom>
-          <a:noFill/>
-          <a:ln>
-            <a:noFill/>
-          </a:ln>
-        </p:spPr>
-        <p:txBody>
-          <a:bodyPr wrap="none" lIns="0" tIns="0" rIns="0" bIns="0" anchor="t" anchorCtr="0">
-            <a:spAutoFit/>
-          </a:bodyPr>
-          <a:lstStyle/>
-          <a:p>
-            <a:pPr algn="l"/>
-            <a:r>
-              <a:rPr lang="zh-CN" sz="1120" dirty="0">
-                <a:solidFill>
-                  <a:schemeClr val="accent5"/>
-                </a:solidFill>
-                <a:latin typeface="Segoe UI"/>
-                <a:ea typeface="Microsoft YaHei"/>
-                <a:cs typeface="Segoe UI"/>
-              </a:rPr>
-              <a:t>固定模型，横向跑不同版本 Harness，验证改动未引入退化</a:t>
-            </a:r>
-          </a:p>
-        </p:txBody>
-      </p:sp>
-      <p:sp>
-        <p:nvSpPr>
-          <p:cNvPr id="15" name="Rectangle 15"/>
+          <a:effectLst/>
+        </p:spPr>
+        <p:style>
+          <a:lnRef idx="1">
+            <a:schemeClr val="accent1"/>
+          </a:lnRef>
+          <a:fillRef idx="3">
+            <a:schemeClr val="accent1"/>
+          </a:fillRef>
+          <a:effectRef idx="2">
+            <a:schemeClr val="accent1"/>
+          </a:effectRef>
+          <a:fontRef idx="minor">
+            <a:schemeClr val="lt1"/>
+          </a:fontRef>
+        </p:style>
+        <p:txBody>
+          <a:bodyPr rtlCol="0" anchor="ctr"/>
+          <a:lstStyle/>
+          <a:p>
+            <a:pPr algn="ctr"/>
+            <a:endParaRPr/>
+          </a:p>
+        </p:txBody>
+      </p:sp>
+      <p:sp>
+        <p:nvSpPr>
+          <p:cNvPr id="19" name="TextBox 18"/>
+          <p:cNvSpPr txBox="1"/>
+          <p:nvPr/>
+        </p:nvSpPr>
+        <p:spPr>
+          <a:xfrm>
+            <a:off x="3378200" y="2286000"/>
+            <a:ext cx="2628900" cy="254000"/>
+          </a:xfrm>
+          <a:prstGeom prst="rect">
+            <a:avLst/>
+          </a:prstGeom>
+          <a:noFill/>
+        </p:spPr>
+        <p:txBody>
+          <a:bodyPr wrap="square" lIns="0" tIns="0" rIns="0" bIns="0" anchor="ctr">
+            <a:noAutofit/>
+          </a:bodyPr>
+          <a:lstStyle/>
+          <a:p>
+            <a:pPr algn="ctr">
+              <a:lnSpc>
+                <a:spcPct val="100000"/>
+              </a:lnSpc>
+            </a:pPr>
+            <a:r>
+              <a:rPr sz="1250" b="1">
+                <a:solidFill>
+                  <a:srgbClr val="FFFFFF"/>
+                </a:solidFill>
+                <a:latin typeface="Segoe UI"/>
+                <a:ea typeface="Microsoft YaHei"/>
+                <a:cs typeface="Segoe UI"/>
+              </a:rPr>
+              <a:t>② 结果采集</a:t>
+            </a:r>
+          </a:p>
+        </p:txBody>
+      </p:sp>
+      <p:sp>
+        <p:nvSpPr>
+          <p:cNvPr id="20" name="Rectangle 19"/>
           <p:cNvSpPr/>
           <p:nvPr/>
         </p:nvSpPr>
         <p:spPr>
           <a:xfrm>
-            <a:off x="571500" y="3152775"/>
-            <a:ext cx="5238750" cy="666750"/>
+            <a:off x="6184900" y="2235200"/>
+            <a:ext cx="2628900" cy="3175000"/>
           </a:xfrm>
           <a:prstGeom prst="rect">
             <a:avLst/>
           </a:prstGeom>
           <a:solidFill>
-            <a:schemeClr val="lt2"/>
+            <a:srgbClr val="FFFFFF"/>
           </a:solidFill>
-          <a:ln>
-            <a:noFill/>
-          </a:ln>
-        </p:spPr>
-      </p:sp>
-      <p:sp>
-        <p:nvSpPr>
-          <p:cNvPr id="16" name="Rectangle 16"/>
+          <a:ln w="12700">
+            <a:solidFill>
+              <a:srgbClr val="E2E8F0"/>
+            </a:solidFill>
+          </a:ln>
+          <a:effectLst/>
+        </p:spPr>
+        <p:style>
+          <a:lnRef idx="1">
+            <a:schemeClr val="accent1"/>
+          </a:lnRef>
+          <a:fillRef idx="3">
+            <a:schemeClr val="accent1"/>
+          </a:fillRef>
+          <a:effectRef idx="2">
+            <a:schemeClr val="accent1"/>
+          </a:effectRef>
+          <a:fontRef idx="minor">
+            <a:schemeClr val="lt1"/>
+          </a:fontRef>
+        </p:style>
+        <p:txBody>
+          <a:bodyPr rtlCol="0" anchor="ctr"/>
+          <a:lstStyle/>
+          <a:p>
+            <a:pPr algn="ctr"/>
+            <a:endParaRPr/>
+          </a:p>
+        </p:txBody>
+      </p:sp>
+      <p:sp>
+        <p:nvSpPr>
+          <p:cNvPr id="21" name="Rectangle 20"/>
           <p:cNvSpPr/>
           <p:nvPr/>
         </p:nvSpPr>
         <p:spPr>
           <a:xfrm>
-            <a:off x="571500" y="3152775"/>
-            <a:ext cx="38100" cy="666750"/>
+            <a:off x="6184900" y="2235200"/>
+            <a:ext cx="2628900" cy="330200"/>
           </a:xfrm>
           <a:prstGeom prst="rect">
             <a:avLst/>
           </a:prstGeom>
           <a:solidFill>
+            <a:srgbClr val="1E3A8A"/>
+          </a:solidFill>
+          <a:ln>
+            <a:noFill/>
+          </a:ln>
+          <a:effectLst/>
+        </p:spPr>
+        <p:style>
+          <a:lnRef idx="1">
             <a:schemeClr val="accent1"/>
+          </a:lnRef>
+          <a:fillRef idx="3">
+            <a:schemeClr val="accent1"/>
+          </a:fillRef>
+          <a:effectRef idx="2">
+            <a:schemeClr val="accent1"/>
+          </a:effectRef>
+          <a:fontRef idx="minor">
+            <a:schemeClr val="lt1"/>
+          </a:fontRef>
+        </p:style>
+        <p:txBody>
+          <a:bodyPr rtlCol="0" anchor="ctr"/>
+          <a:lstStyle/>
+          <a:p>
+            <a:pPr algn="ctr"/>
+            <a:endParaRPr/>
+          </a:p>
+        </p:txBody>
+      </p:sp>
+      <p:sp>
+        <p:nvSpPr>
+          <p:cNvPr id="22" name="TextBox 21"/>
+          <p:cNvSpPr txBox="1"/>
+          <p:nvPr/>
+        </p:nvSpPr>
+        <p:spPr>
+          <a:xfrm>
+            <a:off x="6184900" y="2286000"/>
+            <a:ext cx="2628900" cy="254000"/>
+          </a:xfrm>
+          <a:prstGeom prst="rect">
+            <a:avLst/>
+          </a:prstGeom>
+          <a:noFill/>
+        </p:spPr>
+        <p:txBody>
+          <a:bodyPr wrap="square" lIns="0" tIns="0" rIns="0" bIns="0" anchor="ctr">
+            <a:noAutofit/>
+          </a:bodyPr>
+          <a:lstStyle/>
+          <a:p>
+            <a:pPr algn="ctr">
+              <a:lnSpc>
+                <a:spcPct val="100000"/>
+              </a:lnSpc>
+            </a:pPr>
+            <a:r>
+              <a:rPr sz="1250" b="1">
+                <a:solidFill>
+                  <a:srgbClr val="FFFFFF"/>
+                </a:solidFill>
+                <a:latin typeface="Segoe UI"/>
+                <a:ea typeface="Microsoft YaHei"/>
+                <a:cs typeface="Segoe UI"/>
+              </a:rPr>
+              <a:t>③ 双重评分 · hybrid</a:t>
+            </a:r>
+          </a:p>
+        </p:txBody>
+      </p:sp>
+      <p:sp>
+        <p:nvSpPr>
+          <p:cNvPr id="23" name="Rectangle 22"/>
+          <p:cNvSpPr/>
+          <p:nvPr/>
+        </p:nvSpPr>
+        <p:spPr>
+          <a:xfrm>
+            <a:off x="8991600" y="2235200"/>
+            <a:ext cx="2628900" cy="3175000"/>
+          </a:xfrm>
+          <a:prstGeom prst="rect">
+            <a:avLst/>
+          </a:prstGeom>
+          <a:solidFill>
+            <a:srgbClr val="FFFFFF"/>
           </a:solidFill>
-          <a:ln>
-            <a:noFill/>
-          </a:ln>
-        </p:spPr>
-      </p:sp>
-      <p:sp>
-        <p:nvSpPr>
-          <p:cNvPr id="17" name="TextBox 17"/>
-          <p:cNvSpPr txBox="1"/>
-          <p:nvPr/>
-        </p:nvSpPr>
-        <p:spPr>
-          <a:xfrm>
-            <a:off x="773811" y="3256121"/>
-            <a:ext cx="1557207" cy="278702"/>
-          </a:xfrm>
-          <a:prstGeom prst="rect">
-            <a:avLst/>
-          </a:prstGeom>
-          <a:noFill/>
-          <a:ln>
-            <a:noFill/>
-          </a:ln>
-        </p:spPr>
-        <p:txBody>
-          <a:bodyPr wrap="none" lIns="0" tIns="0" rIns="0" bIns="0" anchor="t" anchorCtr="0">
-            <a:spAutoFit/>
-          </a:bodyPr>
-          <a:lstStyle/>
-          <a:p>
-            <a:pPr algn="l"/>
-            <a:r>
-              <a:rPr lang="zh-CN" sz="1420" b="1" dirty="0">
-                <a:solidFill>
-                  <a:schemeClr val="dk1"/>
-                </a:solidFill>
-                <a:latin typeface="Segoe UI"/>
-                <a:ea typeface="Microsoft YaHei"/>
-                <a:cs typeface="Segoe UI"/>
-              </a:rPr>
-              <a:t>自定义 Skill 验证</a:t>
-            </a:r>
-          </a:p>
-        </p:txBody>
-      </p:sp>
-      <p:sp>
-        <p:nvSpPr>
-          <p:cNvPr id="18" name="TextBox 18"/>
-          <p:cNvSpPr txBox="1"/>
-          <p:nvPr/>
-        </p:nvSpPr>
-        <p:spPr>
-          <a:xfrm>
-            <a:off x="775335" y="3536156"/>
-            <a:ext cx="3609988" cy="220028"/>
-          </a:xfrm>
-          <a:prstGeom prst="rect">
-            <a:avLst/>
-          </a:prstGeom>
-          <a:noFill/>
-          <a:ln>
-            <a:noFill/>
-          </a:ln>
-        </p:spPr>
-        <p:txBody>
-          <a:bodyPr wrap="none" lIns="0" tIns="0" rIns="0" bIns="0" anchor="t" anchorCtr="0">
-            <a:spAutoFit/>
-          </a:bodyPr>
-          <a:lstStyle/>
-          <a:p>
-            <a:pPr algn="l"/>
-            <a:r>
-              <a:rPr lang="zh-CN" sz="1120" dirty="0">
-                <a:solidFill>
-                  <a:schemeClr val="accent5"/>
-                </a:solidFill>
-                <a:latin typeface="Segoe UI"/>
-                <a:ea typeface="Microsoft YaHei"/>
-                <a:cs typeface="Segoe UI"/>
-              </a:rPr>
-              <a:t>新增业务 Skill 后，在相关切片上验证发现和执行效果</a:t>
-            </a:r>
-          </a:p>
-        </p:txBody>
-      </p:sp>
-      <p:sp>
-        <p:nvSpPr>
-          <p:cNvPr id="19" name="Rectangle 19"/>
+          <a:ln w="12700">
+            <a:solidFill>
+              <a:srgbClr val="E2E8F0"/>
+            </a:solidFill>
+          </a:ln>
+          <a:effectLst/>
+        </p:spPr>
+        <p:style>
+          <a:lnRef idx="1">
+            <a:schemeClr val="accent1"/>
+          </a:lnRef>
+          <a:fillRef idx="3">
+            <a:schemeClr val="accent1"/>
+          </a:fillRef>
+          <a:effectRef idx="2">
+            <a:schemeClr val="accent1"/>
+          </a:effectRef>
+          <a:fontRef idx="minor">
+            <a:schemeClr val="lt1"/>
+          </a:fontRef>
+        </p:style>
+        <p:txBody>
+          <a:bodyPr rtlCol="0" anchor="ctr"/>
+          <a:lstStyle/>
+          <a:p>
+            <a:pPr algn="ctr"/>
+            <a:endParaRPr/>
+          </a:p>
+        </p:txBody>
+      </p:sp>
+      <p:sp>
+        <p:nvSpPr>
+          <p:cNvPr id="24" name="Rectangle 23"/>
           <p:cNvSpPr/>
           <p:nvPr/>
         </p:nvSpPr>
         <p:spPr>
           <a:xfrm>
-            <a:off x="571500" y="3943350"/>
-            <a:ext cx="5238750" cy="666750"/>
+            <a:off x="8991600" y="2235200"/>
+            <a:ext cx="2628900" cy="330200"/>
           </a:xfrm>
           <a:prstGeom prst="rect">
             <a:avLst/>
           </a:prstGeom>
           <a:solidFill>
-            <a:schemeClr val="lt2"/>
+            <a:srgbClr val="1E3A8A"/>
           </a:solidFill>
           <a:ln>
             <a:noFill/>
           </a:ln>
-        </p:spPr>
-      </p:sp>
-      <p:sp>
-        <p:nvSpPr>
-          <p:cNvPr id="20" name="Rectangle 20"/>
+          <a:effectLst/>
+        </p:spPr>
+        <p:style>
+          <a:lnRef idx="1">
+            <a:schemeClr val="accent1"/>
+          </a:lnRef>
+          <a:fillRef idx="3">
+            <a:schemeClr val="accent1"/>
+          </a:fillRef>
+          <a:effectRef idx="2">
+            <a:schemeClr val="accent1"/>
+          </a:effectRef>
+          <a:fontRef idx="minor">
+            <a:schemeClr val="lt1"/>
+          </a:fontRef>
+        </p:style>
+        <p:txBody>
+          <a:bodyPr rtlCol="0" anchor="ctr"/>
+          <a:lstStyle/>
+          <a:p>
+            <a:pPr algn="ctr"/>
+            <a:endParaRPr/>
+          </a:p>
+        </p:txBody>
+      </p:sp>
+      <p:sp>
+        <p:nvSpPr>
+          <p:cNvPr id="25" name="TextBox 24"/>
+          <p:cNvSpPr txBox="1"/>
+          <p:nvPr/>
+        </p:nvSpPr>
+        <p:spPr>
+          <a:xfrm>
+            <a:off x="8991600" y="2286000"/>
+            <a:ext cx="2628900" cy="254000"/>
+          </a:xfrm>
+          <a:prstGeom prst="rect">
+            <a:avLst/>
+          </a:prstGeom>
+          <a:noFill/>
+        </p:spPr>
+        <p:txBody>
+          <a:bodyPr wrap="square" lIns="0" tIns="0" rIns="0" bIns="0" anchor="ctr">
+            <a:noAutofit/>
+          </a:bodyPr>
+          <a:lstStyle/>
+          <a:p>
+            <a:pPr algn="ctr">
+              <a:lnSpc>
+                <a:spcPct val="100000"/>
+              </a:lnSpc>
+            </a:pPr>
+            <a:r>
+              <a:rPr sz="1250" b="1">
+                <a:solidFill>
+                  <a:srgbClr val="FFFFFF"/>
+                </a:solidFill>
+                <a:latin typeface="Segoe UI"/>
+                <a:ea typeface="Microsoft YaHei"/>
+                <a:cs typeface="Segoe UI"/>
+              </a:rPr>
+              <a:t>④ 汇总得分</a:t>
+            </a:r>
+          </a:p>
+        </p:txBody>
+      </p:sp>
+      <p:sp>
+        <p:nvSpPr>
+          <p:cNvPr id="26" name="TextBox 25"/>
+          <p:cNvSpPr txBox="1"/>
+          <p:nvPr/>
+        </p:nvSpPr>
+        <p:spPr>
+          <a:xfrm>
+            <a:off x="698500" y="2667000"/>
+            <a:ext cx="2374900" cy="2540000"/>
+          </a:xfrm>
+          <a:prstGeom prst="rect">
+            <a:avLst/>
+          </a:prstGeom>
+          <a:noFill/>
+        </p:spPr>
+        <p:txBody>
+          <a:bodyPr wrap="square" lIns="0" tIns="0" rIns="0" bIns="0" anchor="t">
+            <a:noAutofit/>
+          </a:bodyPr>
+          <a:lstStyle/>
+          <a:p>
+            <a:pPr algn="l">
+              <a:lnSpc>
+                <a:spcPct val="115000"/>
+              </a:lnSpc>
+            </a:pPr>
+            <a:r>
+              <a:rPr sz="1050" b="0">
+                <a:solidFill>
+                  <a:srgbClr val="1A1A2E"/>
+                </a:solidFill>
+                <a:latin typeface="Segoe UI"/>
+                <a:ea typeface="Microsoft YaHei"/>
+                <a:cs typeface="Segoe UI"/>
+              </a:rPr>
+              <a:t>Agent 在 Docker 容器中隔离运行，独立执行任务</a:t>
+            </a:r>
+          </a:p>
+          <a:p>
+            <a:pPr algn="l">
+              <a:lnSpc>
+                <a:spcPct val="115000"/>
+              </a:lnSpc>
+              <a:spcBef>
+                <a:spcPts val="800"/>
+              </a:spcBef>
+            </a:pPr>
+            <a:r>
+              <a:rPr sz="1050" b="0">
+                <a:solidFill>
+                  <a:srgbClr val="1A1A2E"/>
+                </a:solidFill>
+                <a:latin typeface="Segoe UI"/>
+                <a:ea typeface="Microsoft YaHei"/>
+                <a:cs typeface="Segoe UI"/>
+              </a:rPr>
+              <a:t>· 纯文本创作，无需联网</a:t>
+            </a:r>
+          </a:p>
+          <a:p>
+            <a:pPr algn="l">
+              <a:lnSpc>
+                <a:spcPct val="115000"/>
+              </a:lnSpc>
+            </a:pPr>
+            <a:r>
+              <a:rPr sz="1050" b="0">
+                <a:solidFill>
+                  <a:srgbClr val="1A1A2E"/>
+                </a:solidFill>
+                <a:latin typeface="Segoe UI"/>
+                <a:ea typeface="Microsoft YaHei"/>
+                <a:cs typeface="Segoe UI"/>
+              </a:rPr>
+              <a:t>· 无外部依赖 / 无预置文件</a:t>
+            </a:r>
+          </a:p>
+          <a:p>
+            <a:pPr algn="l">
+              <a:lnSpc>
+                <a:spcPct val="115000"/>
+              </a:lnSpc>
+            </a:pPr>
+            <a:r>
+              <a:rPr sz="1050" b="0">
+                <a:solidFill>
+                  <a:srgbClr val="1A1A2E"/>
+                </a:solidFill>
+                <a:latin typeface="Segoe UI"/>
+                <a:ea typeface="Microsoft YaHei"/>
+                <a:cs typeface="Segoe UI"/>
+              </a:rPr>
+              <a:t>· environment = closed（可离线复现）</a:t>
+            </a:r>
+          </a:p>
+          <a:p>
+            <a:pPr algn="l">
+              <a:lnSpc>
+                <a:spcPct val="115000"/>
+              </a:lnSpc>
+              <a:spcBef>
+                <a:spcPts val="800"/>
+              </a:spcBef>
+            </a:pPr>
+            <a:r>
+              <a:rPr sz="1050" b="0">
+                <a:solidFill>
+                  <a:srgbClr val="1A1A2E"/>
+                </a:solidFill>
+                <a:latin typeface="Segoe UI"/>
+                <a:ea typeface="Microsoft YaHei"/>
+                <a:cs typeface="Segoe UI"/>
+              </a:rPr>
+              <a:t>· 超时 300s 内产出 </a:t>
+            </a:r>
+            <a:r>
+              <a:rPr sz="1000" b="1">
+                <a:solidFill>
+                  <a:srgbClr val="2563EB"/>
+                </a:solidFill>
+                <a:latin typeface="Consolas"/>
+                <a:ea typeface="Microsoft YaHei"/>
+                <a:cs typeface="Consolas"/>
+              </a:rPr>
+              <a:t>blog_post.md</a:t>
+            </a:r>
+          </a:p>
+        </p:txBody>
+      </p:sp>
+      <p:sp>
+        <p:nvSpPr>
+          <p:cNvPr id="27" name="TextBox 26"/>
+          <p:cNvSpPr txBox="1"/>
+          <p:nvPr/>
+        </p:nvSpPr>
+        <p:spPr>
+          <a:xfrm>
+            <a:off x="3505200" y="2667000"/>
+            <a:ext cx="2374900" cy="2540000"/>
+          </a:xfrm>
+          <a:prstGeom prst="rect">
+            <a:avLst/>
+          </a:prstGeom>
+          <a:noFill/>
+        </p:spPr>
+        <p:txBody>
+          <a:bodyPr wrap="square" lIns="0" tIns="0" rIns="0" bIns="0" anchor="t">
+            <a:noAutofit/>
+          </a:bodyPr>
+          <a:lstStyle/>
+          <a:p>
+            <a:pPr algn="l">
+              <a:lnSpc>
+                <a:spcPct val="112000"/>
+              </a:lnSpc>
+            </a:pPr>
+            <a:r>
+              <a:rPr sz="1050" b="0">
+                <a:solidFill>
+                  <a:srgbClr val="1A1A2E"/>
+                </a:solidFill>
+                <a:latin typeface="Segoe UI"/>
+                <a:ea typeface="Microsoft YaHei"/>
+                <a:cs typeface="Segoe UI"/>
+              </a:rPr>
+              <a:t>harness 采集运行产物与过程：</a:t>
+            </a:r>
+          </a:p>
+          <a:p>
+            <a:pPr algn="l">
+              <a:lnSpc>
+                <a:spcPct val="112000"/>
+              </a:lnSpc>
+              <a:spcBef>
+                <a:spcPts val="800"/>
+              </a:spcBef>
+            </a:pPr>
+            <a:r>
+              <a:rPr sz="1050" b="0">
+                <a:solidFill>
+                  <a:srgbClr val="1A1A2E"/>
+                </a:solidFill>
+                <a:latin typeface="Segoe UI"/>
+                <a:ea typeface="Microsoft YaHei"/>
+                <a:cs typeface="Segoe UI"/>
+              </a:rPr>
+              <a:t>· OpenClaw session → 归一化为 transcript 事件流</a:t>
+            </a:r>
+          </a:p>
+          <a:p>
+            <a:pPr algn="l">
+              <a:lnSpc>
+                <a:spcPct val="112000"/>
+              </a:lnSpc>
+            </a:pPr>
+            <a:r>
+              <a:rPr sz="950" b="0">
+                <a:solidFill>
+                  <a:srgbClr val="64748B"/>
+                </a:solidFill>
+                <a:latin typeface="Consolas"/>
+                <a:ea typeface="Microsoft YaHei"/>
+                <a:cs typeface="Consolas"/>
+              </a:rPr>
+              <a:t>   (message / toolCall / toolResult)</a:t>
+            </a:r>
+          </a:p>
+          <a:p>
+            <a:pPr algn="l">
+              <a:lnSpc>
+                <a:spcPct val="112000"/>
+              </a:lnSpc>
+              <a:spcBef>
+                <a:spcPts val="600"/>
+              </a:spcBef>
+            </a:pPr>
+            <a:r>
+              <a:rPr sz="1050" b="0">
+                <a:solidFill>
+                  <a:srgbClr val="1A1A2E"/>
+                </a:solidFill>
+                <a:latin typeface="Segoe UI"/>
+                <a:ea typeface="Microsoft YaHei"/>
+                <a:cs typeface="Segoe UI"/>
+              </a:rPr>
+              <a:t>· 新生成文件内容注入 transcript</a:t>
+            </a:r>
+          </a:p>
+          <a:p>
+            <a:pPr algn="l">
+              <a:lnSpc>
+                <a:spcPct val="112000"/>
+              </a:lnSpc>
+              <a:spcBef>
+                <a:spcPts val="600"/>
+              </a:spcBef>
+            </a:pPr>
+            <a:r>
+              <a:rPr sz="1050" b="0">
+                <a:solidFill>
+                  <a:srgbClr val="1A1A2E"/>
+                </a:solidFill>
+                <a:latin typeface="Segoe UI"/>
+                <a:ea typeface="Microsoft YaHei"/>
+                <a:cs typeface="Segoe UI"/>
+              </a:rPr>
+              <a:t>· 产物落盘 </a:t>
+            </a:r>
+            <a:r>
+              <a:rPr sz="1000" b="1">
+                <a:solidFill>
+                  <a:srgbClr val="2563EB"/>
+                </a:solidFill>
+                <a:latin typeface="Consolas"/>
+                <a:ea typeface="Microsoft YaHei"/>
+                <a:cs typeface="Consolas"/>
+              </a:rPr>
+              <a:t>workspace_path</a:t>
+            </a:r>
+          </a:p>
+          <a:p>
+            <a:pPr algn="l">
+              <a:lnSpc>
+                <a:spcPct val="112000"/>
+              </a:lnSpc>
+              <a:spcBef>
+                <a:spcPts val="800"/>
+              </a:spcBef>
+            </a:pPr>
+            <a:r>
+              <a:rPr sz="950" b="0">
+                <a:solidFill>
+                  <a:srgbClr val="64748B"/>
+                </a:solidFill>
+                <a:latin typeface="Segoe UI"/>
+                <a:ea typeface="Microsoft YaHei"/>
+                <a:cs typeface="Segoe UI"/>
+              </a:rPr>
+              <a:t>评分只读这两个输入，对框架中立</a:t>
+            </a:r>
+          </a:p>
+        </p:txBody>
+      </p:sp>
+      <p:sp>
+        <p:nvSpPr>
+          <p:cNvPr id="28" name="TextBox 27"/>
+          <p:cNvSpPr txBox="1"/>
+          <p:nvPr/>
+        </p:nvSpPr>
+        <p:spPr>
+          <a:xfrm>
+            <a:off x="6311900" y="2667000"/>
+            <a:ext cx="2374900" cy="2667000"/>
+          </a:xfrm>
+          <a:prstGeom prst="rect">
+            <a:avLst/>
+          </a:prstGeom>
+          <a:noFill/>
+        </p:spPr>
+        <p:txBody>
+          <a:bodyPr wrap="square" lIns="0" tIns="0" rIns="0" bIns="0" anchor="t">
+            <a:noAutofit/>
+          </a:bodyPr>
+          <a:lstStyle/>
+          <a:p>
+            <a:pPr algn="l">
+              <a:lnSpc>
+                <a:spcPct val="110000"/>
+              </a:lnSpc>
+            </a:pPr>
+            <a:r>
+              <a:rPr sz="1050" b="1">
+                <a:solidFill>
+                  <a:srgbClr val="1A1A2E"/>
+                </a:solidFill>
+                <a:latin typeface="Segoe UI"/>
+                <a:ea typeface="Microsoft YaHei"/>
+                <a:cs typeface="Segoe UI"/>
+              </a:rPr>
+              <a:t>自动检查</a:t>
+            </a:r>
+            <a:r>
+              <a:rPr sz="1000" b="1">
+                <a:solidFill>
+                  <a:srgbClr val="1E3A8A"/>
+                </a:solidFill>
+                <a:latin typeface="Segoe UI"/>
+                <a:ea typeface="Microsoft YaHei"/>
+                <a:cs typeface="Segoe UI"/>
+              </a:rPr>
+              <a:t>  权重 0.6</a:t>
+            </a:r>
+          </a:p>
+          <a:p>
+            <a:pPr algn="l">
+              <a:lnSpc>
+                <a:spcPct val="110000"/>
+              </a:lnSpc>
+            </a:pPr>
+            <a:r>
+              <a:rPr sz="950" b="0">
+                <a:solidFill>
+                  <a:srgbClr val="1A1A2E"/>
+                </a:solidFill>
+                <a:latin typeface="Segoe UI"/>
+                <a:ea typeface="Microsoft YaHei"/>
+                <a:cs typeface="Segoe UI"/>
+              </a:rPr>
+              <a:t>· 文件 blog_post.md 是否存在</a:t>
+            </a:r>
+          </a:p>
+          <a:p>
+            <a:pPr algn="l">
+              <a:lnSpc>
+                <a:spcPct val="110000"/>
+              </a:lnSpc>
+            </a:pPr>
+            <a:r>
+              <a:rPr sz="950" b="0">
+                <a:solidFill>
+                  <a:srgbClr val="1A1A2E"/>
+                </a:solidFill>
+                <a:latin typeface="Segoe UI"/>
+                <a:ea typeface="Microsoft YaHei"/>
+                <a:cs typeface="Segoe UI"/>
+              </a:rPr>
+              <a:t>· 词数 450–550 → 1.0（区间打分）</a:t>
+            </a:r>
+          </a:p>
+          <a:p>
+            <a:pPr algn="l">
+              <a:lnSpc>
+                <a:spcPct val="110000"/>
+              </a:lnSpc>
+            </a:pPr>
+            <a:r>
+              <a:rPr sz="950" b="0">
+                <a:solidFill>
+                  <a:srgbClr val="1A1A2E"/>
+                </a:solidFill>
+                <a:latin typeface="Segoe UI"/>
+                <a:ea typeface="Microsoft YaHei"/>
+                <a:cs typeface="Segoe UI"/>
+              </a:rPr>
+              <a:t>· 标题 + 段落结构（≥3 段）</a:t>
+            </a:r>
+          </a:p>
+          <a:p>
+            <a:pPr algn="l">
+              <a:lnSpc>
+                <a:spcPct val="110000"/>
+              </a:lnSpc>
+            </a:pPr>
+            <a:r>
+              <a:rPr sz="950" b="0">
+                <a:solidFill>
+                  <a:srgbClr val="1A1A2E"/>
+                </a:solidFill>
+                <a:latin typeface="Segoe UI"/>
+                <a:ea typeface="Microsoft YaHei"/>
+                <a:cs typeface="Segoe UI"/>
+              </a:rPr>
+              <a:t>· remote / developer 关键词命中</a:t>
+            </a:r>
+          </a:p>
+          <a:p>
+            <a:pPr algn="l">
+              <a:lnSpc>
+                <a:spcPct val="110000"/>
+              </a:lnSpc>
+              <a:spcBef>
+                <a:spcPts val="800"/>
+              </a:spcBef>
+            </a:pPr>
+            <a:r>
+              <a:rPr sz="1050" b="1">
+                <a:solidFill>
+                  <a:srgbClr val="1A1A2E"/>
+                </a:solidFill>
+                <a:latin typeface="Segoe UI"/>
+                <a:ea typeface="Microsoft YaHei"/>
+                <a:cs typeface="Segoe UI"/>
+              </a:rPr>
+              <a:t>LLM 评判</a:t>
+            </a:r>
+            <a:r>
+              <a:rPr sz="1000" b="1">
+                <a:solidFill>
+                  <a:srgbClr val="1E3A8A"/>
+                </a:solidFill>
+                <a:latin typeface="Segoe UI"/>
+                <a:ea typeface="Microsoft YaHei"/>
+                <a:cs typeface="Segoe UI"/>
+              </a:rPr>
+              <a:t>  权重 0.4</a:t>
+            </a:r>
+          </a:p>
+          <a:p>
+            <a:pPr algn="l">
+              <a:lnSpc>
+                <a:spcPct val="110000"/>
+              </a:lnSpc>
+            </a:pPr>
+            <a:r>
+              <a:rPr sz="950" b="0">
+                <a:solidFill>
+                  <a:srgbClr val="1A1A2E"/>
+                </a:solidFill>
+                <a:latin typeface="Segoe UI"/>
+                <a:ea typeface="Microsoft YaHei"/>
+                <a:cs typeface="Segoe UI"/>
+              </a:rPr>
+              <a:t>· 质量30 · 结构25 · 写作20</a:t>
+            </a:r>
+          </a:p>
+          <a:p>
+            <a:pPr algn="l">
+              <a:lnSpc>
+                <a:spcPct val="110000"/>
+              </a:lnSpc>
+            </a:pPr>
+            <a:r>
+              <a:rPr sz="950" b="0">
+                <a:solidFill>
+                  <a:srgbClr val="1A1A2E"/>
+                </a:solidFill>
+                <a:latin typeface="Segoe UI"/>
+                <a:ea typeface="Microsoft YaHei"/>
+                <a:cs typeface="Segoe UI"/>
+              </a:rPr>
+              <a:t>· 词数15 · 完成度10（Rubric）</a:t>
+            </a:r>
+          </a:p>
+        </p:txBody>
+      </p:sp>
+      <p:sp>
+        <p:nvSpPr>
+          <p:cNvPr id="29" name="TextBox 28"/>
+          <p:cNvSpPr txBox="1"/>
+          <p:nvPr/>
+        </p:nvSpPr>
+        <p:spPr>
+          <a:xfrm>
+            <a:off x="9118600" y="2667000"/>
+            <a:ext cx="2374900" cy="2667000"/>
+          </a:xfrm>
+          <a:prstGeom prst="rect">
+            <a:avLst/>
+          </a:prstGeom>
+          <a:noFill/>
+        </p:spPr>
+        <p:txBody>
+          <a:bodyPr wrap="square" lIns="0" tIns="0" rIns="0" bIns="0" anchor="t">
+            <a:noAutofit/>
+          </a:bodyPr>
+          <a:lstStyle/>
+          <a:p>
+            <a:pPr algn="l">
+              <a:lnSpc>
+                <a:spcPct val="115000"/>
+              </a:lnSpc>
+            </a:pPr>
+            <a:r>
+              <a:rPr sz="1050" b="1">
+                <a:solidFill>
+                  <a:srgbClr val="1A1A2E"/>
+                </a:solidFill>
+                <a:latin typeface="Segoe UI"/>
+                <a:ea typeface="Microsoft YaHei"/>
+                <a:cs typeface="Segoe UI"/>
+              </a:rPr>
+              <a:t>最终得分</a:t>
+            </a:r>
+          </a:p>
+          <a:p>
+            <a:pPr algn="l">
+              <a:lnSpc>
+                <a:spcPct val="115000"/>
+              </a:lnSpc>
+              <a:spcBef>
+                <a:spcPts val="400"/>
+              </a:spcBef>
+            </a:pPr>
+            <a:r>
+              <a:rPr sz="1050" b="1">
+                <a:solidFill>
+                  <a:srgbClr val="2563EB"/>
+                </a:solidFill>
+                <a:latin typeface="Segoe UI"/>
+                <a:ea typeface="Microsoft YaHei"/>
+                <a:cs typeface="Segoe UI"/>
+              </a:rPr>
+              <a:t>score = 0.6 × 自动分</a:t>
+            </a:r>
+          </a:p>
+          <a:p>
+            <a:pPr algn="l">
+              <a:lnSpc>
+                <a:spcPct val="115000"/>
+              </a:lnSpc>
+            </a:pPr>
+            <a:r>
+              <a:rPr sz="1050" b="1">
+                <a:solidFill>
+                  <a:srgbClr val="2563EB"/>
+                </a:solidFill>
+                <a:latin typeface="Segoe UI"/>
+                <a:ea typeface="Microsoft YaHei"/>
+                <a:cs typeface="Segoe UI"/>
+              </a:rPr>
+              <a:t>            + 0.4 × LLM 分</a:t>
+            </a:r>
+          </a:p>
+          <a:p>
+            <a:pPr algn="l">
+              <a:lnSpc>
+                <a:spcPct val="115000"/>
+              </a:lnSpc>
+              <a:spcBef>
+                <a:spcPts val="1000"/>
+              </a:spcBef>
+            </a:pPr>
+            <a:r>
+              <a:rPr sz="1050" b="1">
+                <a:solidFill>
+                  <a:srgbClr val="EF4444"/>
+                </a:solidFill>
+                <a:latin typeface="Segoe UI"/>
+                <a:ea typeface="Microsoft YaHei"/>
+                <a:cs typeface="Segoe UI"/>
+              </a:rPr>
+              <a:t>混合惩罚机制</a:t>
+            </a:r>
+          </a:p>
+          <a:p>
+            <a:pPr algn="l">
+              <a:lnSpc>
+                <a:spcPct val="115000"/>
+              </a:lnSpc>
+            </a:pPr>
+            <a:r>
+              <a:rPr sz="980" b="0">
+                <a:solidFill>
+                  <a:srgbClr val="1A1A2E"/>
+                </a:solidFill>
+                <a:latin typeface="Segoe UI"/>
+                <a:ea typeface="Microsoft YaHei"/>
+                <a:cs typeface="Segoe UI"/>
+              </a:rPr>
+              <a:t>· 自动分 &lt; 0.75 时</a:t>
+            </a:r>
+          </a:p>
+          <a:p>
+            <a:pPr algn="l">
+              <a:lnSpc>
+                <a:spcPct val="115000"/>
+              </a:lnSpc>
+            </a:pPr>
+            <a:r>
+              <a:rPr sz="980" b="1">
+                <a:solidFill>
+                  <a:srgbClr val="EF4444"/>
+                </a:solidFill>
+                <a:latin typeface="Segoe UI"/>
+                <a:ea typeface="Microsoft YaHei"/>
+                <a:cs typeface="Segoe UI"/>
+              </a:rPr>
+              <a:t>  → LLM 分被置 0</a:t>
+            </a:r>
+          </a:p>
+          <a:p>
+            <a:pPr algn="l">
+              <a:lnSpc>
+                <a:spcPct val="115000"/>
+              </a:lnSpc>
+            </a:pPr>
+            <a:r>
+              <a:rPr sz="950" b="0">
+                <a:solidFill>
+                  <a:srgbClr val="64748B"/>
+                </a:solidFill>
+                <a:latin typeface="Segoe UI"/>
+                <a:ea typeface="Microsoft YaHei"/>
+                <a:cs typeface="Segoe UI"/>
+              </a:rPr>
+              <a:t>· 防止跳过任务 / 空文件刷分</a:t>
+            </a:r>
+          </a:p>
+          <a:p>
+            <a:pPr algn="l">
+              <a:lnSpc>
+                <a:spcPct val="115000"/>
+              </a:lnSpc>
+              <a:spcBef>
+                <a:spcPts val="400"/>
+              </a:spcBef>
+            </a:pPr>
+            <a:r>
+              <a:rPr sz="900" b="0">
+                <a:solidFill>
+                  <a:srgbClr val="64748B"/>
+                </a:solidFill>
+                <a:latin typeface="Segoe UI"/>
+                <a:ea typeface="Microsoft YaHei"/>
+                <a:cs typeface="Segoe UI"/>
+              </a:rPr>
+              <a:t>(API 真实失败时豁免)</a:t>
+            </a:r>
+          </a:p>
+        </p:txBody>
+      </p:sp>
+      <p:sp>
+        <p:nvSpPr>
+          <p:cNvPr id="30" name="Rectangle 29"/>
           <p:cNvSpPr/>
           <p:nvPr/>
         </p:nvSpPr>
         <p:spPr>
           <a:xfrm>
-            <a:off x="571500" y="3943350"/>
-            <a:ext cx="38100" cy="666750"/>
+            <a:off x="571500" y="5588000"/>
+            <a:ext cx="11049000" cy="431800"/>
           </a:xfrm>
           <a:prstGeom prst="rect">
             <a:avLst/>
           </a:prstGeom>
           <a:solidFill>
+            <a:srgbClr val="1E3A8A"/>
+          </a:solidFill>
+          <a:ln>
+            <a:noFill/>
+          </a:ln>
+          <a:effectLst/>
+        </p:spPr>
+        <p:style>
+          <a:lnRef idx="1">
             <a:schemeClr val="accent1"/>
-          </a:solidFill>
-          <a:ln>
-            <a:noFill/>
-          </a:ln>
-        </p:spPr>
-      </p:sp>
-      <p:sp>
-        <p:nvSpPr>
-          <p:cNvPr id="21" name="TextBox 21"/>
-          <p:cNvSpPr txBox="1"/>
-          <p:nvPr/>
-        </p:nvSpPr>
-        <p:spPr>
-          <a:xfrm>
-            <a:off x="773811" y="4046696"/>
-            <a:ext cx="1419507" cy="278702"/>
-          </a:xfrm>
-          <a:prstGeom prst="rect">
-            <a:avLst/>
-          </a:prstGeom>
-          <a:noFill/>
-          <a:ln>
-            <a:noFill/>
-          </a:ln>
-        </p:spPr>
-        <p:txBody>
-          <a:bodyPr wrap="none" lIns="0" tIns="0" rIns="0" bIns="0" anchor="t" anchorCtr="0">
-            <a:spAutoFit/>
-          </a:bodyPr>
-          <a:lstStyle/>
-          <a:p>
-            <a:pPr algn="l"/>
-            <a:r>
-              <a:rPr lang="zh-CN" sz="1420" b="1" dirty="0">
-                <a:solidFill>
-                  <a:schemeClr val="dk1"/>
-                </a:solidFill>
-                <a:latin typeface="Segoe UI"/>
-                <a:ea typeface="Microsoft YaHei"/>
-                <a:cs typeface="Segoe UI"/>
-              </a:rPr>
-              <a:t>回归测试流水线</a:t>
-            </a:r>
-          </a:p>
-        </p:txBody>
-      </p:sp>
-      <p:sp>
-        <p:nvSpPr>
-          <p:cNvPr id="22" name="TextBox 22"/>
-          <p:cNvSpPr txBox="1"/>
-          <p:nvPr/>
-        </p:nvSpPr>
-        <p:spPr>
-          <a:xfrm>
-            <a:off x="775335" y="4326731"/>
-            <a:ext cx="3663747" cy="220028"/>
-          </a:xfrm>
-          <a:prstGeom prst="rect">
-            <a:avLst/>
-          </a:prstGeom>
-          <a:noFill/>
-          <a:ln>
-            <a:noFill/>
-          </a:ln>
-        </p:spPr>
-        <p:txBody>
-          <a:bodyPr wrap="none" lIns="0" tIns="0" rIns="0" bIns="0" anchor="t" anchorCtr="0">
-            <a:spAutoFit/>
-          </a:bodyPr>
-          <a:lstStyle/>
-          <a:p>
-            <a:pPr algn="l"/>
-            <a:r>
-              <a:rPr lang="zh-CN" sz="1120" dirty="0">
-                <a:solidFill>
-                  <a:schemeClr val="accent5"/>
-                </a:solidFill>
-                <a:latin typeface="Segoe UI"/>
-                <a:ea typeface="Microsoft YaHei"/>
-                <a:cs typeface="Segoe UI"/>
-              </a:rPr>
-              <a:t>集成到 CI 流程，每次 Agent / 模型发布自动触发评测</a:t>
-            </a:r>
-          </a:p>
-        </p:txBody>
-      </p:sp>
-      <p:sp>
-        <p:nvSpPr>
-          <p:cNvPr id="23" name="TextBox 23"/>
-          <p:cNvSpPr txBox="1"/>
-          <p:nvPr/>
-        </p:nvSpPr>
-        <p:spPr>
-          <a:xfrm>
-            <a:off x="563118" y="4822508"/>
-            <a:ext cx="2115826" cy="322707"/>
-          </a:xfrm>
-          <a:prstGeom prst="rect">
-            <a:avLst/>
-          </a:prstGeom>
-          <a:noFill/>
-          <a:ln>
-            <a:noFill/>
-          </a:ln>
-        </p:spPr>
-        <p:txBody>
-          <a:bodyPr wrap="none" lIns="0" tIns="0" rIns="0" bIns="0" anchor="t" anchorCtr="0">
-            <a:spAutoFit/>
-          </a:bodyPr>
-          <a:lstStyle/>
-          <a:p>
-            <a:pPr algn="l"/>
-            <a:r>
-              <a:rPr lang="zh-CN" sz="1650" b="1" dirty="0">
-                <a:solidFill>
-                  <a:schemeClr val="accent1"/>
-                </a:solidFill>
-                <a:latin typeface="Segoe UI"/>
-                <a:ea typeface="Microsoft YaHei"/>
-                <a:cs typeface="Segoe UI"/>
-              </a:rPr>
-              <a:t>企业需求与能力适配</a:t>
-            </a:r>
-          </a:p>
-        </p:txBody>
-      </p:sp>
-      <p:sp>
-        <p:nvSpPr>
-          <p:cNvPr id="24" name="Rectangle 24"/>
-          <p:cNvSpPr/>
-          <p:nvPr/>
-        </p:nvSpPr>
-        <p:spPr>
-          <a:xfrm>
-            <a:off x="571500" y="5219700"/>
-            <a:ext cx="2571750" cy="304800"/>
-          </a:xfrm>
-          <a:prstGeom prst="rect">
-            <a:avLst/>
-          </a:prstGeom>
-          <a:solidFill>
+          </a:lnRef>
+          <a:fillRef idx="3">
             <a:schemeClr val="accent1"/>
-          </a:solidFill>
-          <a:ln>
-            <a:noFill/>
-          </a:ln>
-        </p:spPr>
-      </p:sp>
-      <p:sp>
-        <p:nvSpPr>
-          <p:cNvPr id="25" name="TextBox 25"/>
-          <p:cNvSpPr txBox="1"/>
-          <p:nvPr/>
-        </p:nvSpPr>
-        <p:spPr>
-          <a:xfrm>
-            <a:off x="775716" y="5315902"/>
-            <a:ext cx="307505" cy="205359"/>
-          </a:xfrm>
-          <a:prstGeom prst="rect">
-            <a:avLst/>
-          </a:prstGeom>
-          <a:noFill/>
-          <a:ln>
-            <a:noFill/>
-          </a:ln>
-        </p:spPr>
-        <p:txBody>
-          <a:bodyPr wrap="none" lIns="0" tIns="0" rIns="0" bIns="0" anchor="t" anchorCtr="0">
-            <a:spAutoFit/>
-          </a:bodyPr>
-          <a:lstStyle/>
-          <a:p>
-            <a:pPr algn="l"/>
-            <a:r>
-              <a:rPr lang="zh-CN" sz="1050" b="1" dirty="0">
+          </a:fillRef>
+          <a:effectRef idx="2">
+            <a:schemeClr val="accent1"/>
+          </a:effectRef>
+          <a:fontRef idx="minor">
+            <a:schemeClr val="lt1"/>
+          </a:fontRef>
+        </p:style>
+        <p:txBody>
+          <a:bodyPr rtlCol="0" anchor="ctr"/>
+          <a:lstStyle/>
+          <a:p>
+            <a:pPr algn="ctr"/>
+            <a:endParaRPr/>
+          </a:p>
+        </p:txBody>
+      </p:sp>
+      <p:sp>
+        <p:nvSpPr>
+          <p:cNvPr id="31" name="TextBox 30"/>
+          <p:cNvSpPr txBox="1"/>
+          <p:nvPr/>
+        </p:nvSpPr>
+        <p:spPr>
+          <a:xfrm>
+            <a:off x="698500" y="5588000"/>
+            <a:ext cx="10795000" cy="431800"/>
+          </a:xfrm>
+          <a:prstGeom prst="rect">
+            <a:avLst/>
+          </a:prstGeom>
+          <a:noFill/>
+        </p:spPr>
+        <p:txBody>
+          <a:bodyPr wrap="square" lIns="0" tIns="0" rIns="0" bIns="0" anchor="ctr">
+            <a:noAutofit/>
+          </a:bodyPr>
+          <a:lstStyle/>
+          <a:p>
+            <a:pPr algn="ctr">
+              <a:lnSpc>
+                <a:spcPct val="100000"/>
+              </a:lnSpc>
+            </a:pPr>
+            <a:r>
+              <a:rPr sz="1200" b="1" dirty="0" err="1">
                 <a:solidFill>
                   <a:srgbClr val="FFFFFF"/>
                 </a:solidFill>
@@ -12256,61 +13337,10 @@
                 <a:ea typeface="Microsoft YaHei"/>
                 <a:cs typeface="Segoe UI"/>
               </a:rPr>
-              <a:t>需求</a:t>
-            </a:r>
-          </a:p>
-        </p:txBody>
-      </p:sp>
-      <p:sp>
-        <p:nvSpPr>
-          <p:cNvPr id="26" name="Rectangle 26"/>
-          <p:cNvSpPr/>
-          <p:nvPr/>
-        </p:nvSpPr>
-        <p:spPr>
-          <a:xfrm>
-            <a:off x="3143250" y="5219700"/>
-            <a:ext cx="2667000" cy="304800"/>
-          </a:xfrm>
-          <a:prstGeom prst="rect">
-            <a:avLst/>
-          </a:prstGeom>
-          <a:solidFill>
-            <a:schemeClr val="accent1"/>
-          </a:solidFill>
-          <a:ln>
-            <a:noFill/>
-          </a:ln>
-        </p:spPr>
-      </p:sp>
-      <p:sp>
-        <p:nvSpPr>
-          <p:cNvPr id="27" name="TextBox 27"/>
-          <p:cNvSpPr txBox="1"/>
-          <p:nvPr/>
-        </p:nvSpPr>
-        <p:spPr>
-          <a:xfrm>
-            <a:off x="3347466" y="5315902"/>
-            <a:ext cx="1049248" cy="205359"/>
-          </a:xfrm>
-          <a:prstGeom prst="rect">
-            <a:avLst/>
-          </a:prstGeom>
-          <a:noFill/>
-          <a:ln>
-            <a:noFill/>
-          </a:ln>
-        </p:spPr>
-        <p:txBody>
-          <a:bodyPr wrap="none" lIns="0" tIns="0" rIns="0" bIns="0" anchor="t" anchorCtr="0">
-            <a:spAutoFit/>
-          </a:bodyPr>
-          <a:lstStyle/>
-          <a:p>
-            <a:pPr algn="l"/>
-            <a:r>
-              <a:rPr lang="zh-CN" sz="1050" b="1" dirty="0">
+              <a:t>一张任务卡</a:t>
+            </a:r>
+            <a:r>
+              <a:rPr sz="1200" b="1" dirty="0">
                 <a:solidFill>
                   <a:srgbClr val="FFFFFF"/>
                 </a:solidFill>
@@ -12318,1388 +13348,155 @@
                 <a:ea typeface="Microsoft YaHei"/>
                 <a:cs typeface="Segoe UI"/>
               </a:rPr>
-              <a:t>PawBench 能力</a:t>
-            </a:r>
-          </a:p>
-        </p:txBody>
-      </p:sp>
-      <p:sp>
-        <p:nvSpPr>
-          <p:cNvPr id="28" name="Rectangle 28"/>
-          <p:cNvSpPr/>
-          <p:nvPr/>
-        </p:nvSpPr>
-        <p:spPr>
-          <a:xfrm>
-            <a:off x="571500" y="5524500"/>
-            <a:ext cx="2571750" cy="209550"/>
-          </a:xfrm>
-          <a:prstGeom prst="rect">
-            <a:avLst/>
-          </a:prstGeom>
-          <a:solidFill>
-            <a:srgbClr val="F8FAFC"/>
-          </a:solidFill>
-          <a:ln>
-            <a:noFill/>
-          </a:ln>
-        </p:spPr>
-      </p:sp>
-      <p:sp>
-        <p:nvSpPr>
-          <p:cNvPr id="29" name="TextBox 29"/>
-          <p:cNvSpPr txBox="1"/>
-          <p:nvPr/>
-        </p:nvSpPr>
-        <p:spPr>
-          <a:xfrm>
-            <a:off x="680847" y="5571649"/>
-            <a:ext cx="933399" cy="190690"/>
-          </a:xfrm>
-          <a:prstGeom prst="rect">
-            <a:avLst/>
-          </a:prstGeom>
-          <a:noFill/>
-          <a:ln>
-            <a:noFill/>
-          </a:ln>
-        </p:spPr>
-        <p:txBody>
-          <a:bodyPr wrap="none" lIns="0" tIns="0" rIns="0" bIns="0" anchor="t" anchorCtr="0">
-            <a:spAutoFit/>
-          </a:bodyPr>
-          <a:lstStyle/>
-          <a:p>
-            <a:pPr algn="l"/>
-            <a:r>
-              <a:rPr lang="zh-CN" sz="980" dirty="0">
-                <a:solidFill>
-                  <a:schemeClr val="accent5"/>
-                </a:solidFill>
-                <a:latin typeface="Segoe UI"/>
-                <a:ea typeface="Microsoft YaHei"/>
-                <a:cs typeface="Segoe UI"/>
-              </a:rPr>
-              <a:t>内网私有化部署</a:t>
-            </a:r>
-          </a:p>
-        </p:txBody>
-      </p:sp>
-      <p:sp>
-        <p:nvSpPr>
-          <p:cNvPr id="30" name="Rectangle 30"/>
-          <p:cNvSpPr/>
-          <p:nvPr/>
-        </p:nvSpPr>
-        <p:spPr>
-          <a:xfrm>
-            <a:off x="3143250" y="5524500"/>
-            <a:ext cx="2667000" cy="209550"/>
-          </a:xfrm>
-          <a:prstGeom prst="rect">
-            <a:avLst/>
-          </a:prstGeom>
-          <a:solidFill>
-            <a:srgbClr val="F8FAFC"/>
-          </a:solidFill>
-          <a:ln>
-            <a:noFill/>
-          </a:ln>
-        </p:spPr>
-      </p:sp>
-      <p:sp>
-        <p:nvSpPr>
-          <p:cNvPr id="31" name="TextBox 31"/>
-          <p:cNvSpPr txBox="1"/>
-          <p:nvPr/>
-        </p:nvSpPr>
-        <p:spPr>
-          <a:xfrm>
-            <a:off x="3252597" y="5571649"/>
-            <a:ext cx="1974196" cy="190690"/>
-          </a:xfrm>
-          <a:prstGeom prst="rect">
-            <a:avLst/>
-          </a:prstGeom>
-          <a:noFill/>
-          <a:ln>
-            <a:noFill/>
-          </a:ln>
-        </p:spPr>
-        <p:txBody>
-          <a:bodyPr wrap="none" lIns="0" tIns="0" rIns="0" bIns="0" anchor="t" anchorCtr="0">
-            <a:spAutoFit/>
-          </a:bodyPr>
-          <a:lstStyle/>
-          <a:p>
-            <a:pPr algn="l"/>
-            <a:r>
-              <a:rPr lang="zh-CN" sz="980" dirty="0">
-                <a:solidFill>
-                  <a:srgbClr val="10B981"/>
-                </a:solidFill>
-                <a:latin typeface="Segoe UI"/>
-                <a:ea typeface="Microsoft YaHei"/>
-                <a:cs typeface="Segoe UI"/>
-              </a:rPr>
-              <a:t>✓ 开源 + Docker，数据不出内网</a:t>
-            </a:r>
-          </a:p>
-        </p:txBody>
-      </p:sp>
-      <p:sp>
-        <p:nvSpPr>
-          <p:cNvPr id="32" name="Rectangle 32"/>
-          <p:cNvSpPr/>
-          <p:nvPr/>
-        </p:nvSpPr>
-        <p:spPr>
-          <a:xfrm>
-            <a:off x="571500" y="5734050"/>
-            <a:ext cx="2571750" cy="209550"/>
-          </a:xfrm>
-          <a:prstGeom prst="rect">
-            <a:avLst/>
-          </a:prstGeom>
-          <a:solidFill>
-            <a:schemeClr val="lt1"/>
-          </a:solidFill>
-          <a:ln>
-            <a:noFill/>
-          </a:ln>
-        </p:spPr>
-      </p:sp>
-      <p:sp>
-        <p:nvSpPr>
-          <p:cNvPr id="33" name="TextBox 33"/>
-          <p:cNvSpPr txBox="1"/>
-          <p:nvPr/>
-        </p:nvSpPr>
-        <p:spPr>
-          <a:xfrm>
-            <a:off x="680847" y="5781199"/>
-            <a:ext cx="1257393" cy="190690"/>
-          </a:xfrm>
-          <a:prstGeom prst="rect">
-            <a:avLst/>
-          </a:prstGeom>
-          <a:noFill/>
-          <a:ln>
-            <a:noFill/>
-          </a:ln>
-        </p:spPr>
-        <p:txBody>
-          <a:bodyPr wrap="none" lIns="0" tIns="0" rIns="0" bIns="0" anchor="t" anchorCtr="0">
-            <a:spAutoFit/>
-          </a:bodyPr>
-          <a:lstStyle/>
-          <a:p>
-            <a:pPr algn="l"/>
-            <a:r>
-              <a:rPr lang="zh-CN" sz="980" dirty="0">
-                <a:solidFill>
-                  <a:schemeClr val="accent5"/>
-                </a:solidFill>
-                <a:latin typeface="Segoe UI"/>
-                <a:ea typeface="Microsoft YaHei"/>
-                <a:cs typeface="Segoe UI"/>
-              </a:rPr>
-              <a:t>评测完整 Agent 系统</a:t>
-            </a:r>
-          </a:p>
-        </p:txBody>
-      </p:sp>
-      <p:sp>
-        <p:nvSpPr>
-          <p:cNvPr id="34" name="Rectangle 34"/>
-          <p:cNvSpPr/>
-          <p:nvPr/>
-        </p:nvSpPr>
-        <p:spPr>
-          <a:xfrm>
-            <a:off x="3143250" y="5734050"/>
-            <a:ext cx="2667000" cy="209550"/>
-          </a:xfrm>
-          <a:prstGeom prst="rect">
-            <a:avLst/>
-          </a:prstGeom>
-          <a:solidFill>
-            <a:schemeClr val="lt1"/>
-          </a:solidFill>
-          <a:ln>
-            <a:noFill/>
-          </a:ln>
-        </p:spPr>
-      </p:sp>
-      <p:sp>
-        <p:nvSpPr>
-          <p:cNvPr id="35" name="TextBox 35"/>
-          <p:cNvSpPr txBox="1"/>
-          <p:nvPr/>
-        </p:nvSpPr>
-        <p:spPr>
-          <a:xfrm>
-            <a:off x="3252597" y="5781199"/>
-            <a:ext cx="2096486" cy="190690"/>
-          </a:xfrm>
-          <a:prstGeom prst="rect">
-            <a:avLst/>
-          </a:prstGeom>
-          <a:noFill/>
-          <a:ln>
-            <a:noFill/>
-          </a:ln>
-        </p:spPr>
-        <p:txBody>
-          <a:bodyPr wrap="none" lIns="0" tIns="0" rIns="0" bIns="0" anchor="t" anchorCtr="0">
-            <a:spAutoFit/>
-          </a:bodyPr>
-          <a:lstStyle/>
-          <a:p>
-            <a:pPr algn="l"/>
-            <a:r>
-              <a:rPr lang="zh-CN" sz="980" dirty="0">
-                <a:solidFill>
-                  <a:srgbClr val="10B981"/>
-                </a:solidFill>
-                <a:latin typeface="Segoe UI"/>
-                <a:ea typeface="Microsoft YaHei"/>
-                <a:cs typeface="Segoe UI"/>
-              </a:rPr>
-              <a:t>✓ Model × Harness × Task 全覆盖</a:t>
-            </a:r>
-          </a:p>
-        </p:txBody>
-      </p:sp>
-      <p:sp>
-        <p:nvSpPr>
-          <p:cNvPr id="36" name="Rectangle 36"/>
-          <p:cNvSpPr/>
-          <p:nvPr/>
-        </p:nvSpPr>
-        <p:spPr>
-          <a:xfrm>
-            <a:off x="571500" y="5943600"/>
-            <a:ext cx="2571750" cy="209550"/>
-          </a:xfrm>
-          <a:prstGeom prst="rect">
-            <a:avLst/>
-          </a:prstGeom>
-          <a:solidFill>
-            <a:srgbClr val="F8FAFC"/>
-          </a:solidFill>
-          <a:ln>
-            <a:noFill/>
-          </a:ln>
-        </p:spPr>
-      </p:sp>
-      <p:sp>
-        <p:nvSpPr>
-          <p:cNvPr id="37" name="TextBox 37"/>
-          <p:cNvSpPr txBox="1"/>
-          <p:nvPr/>
-        </p:nvSpPr>
-        <p:spPr>
-          <a:xfrm>
-            <a:off x="680847" y="5990749"/>
-            <a:ext cx="933399" cy="190690"/>
-          </a:xfrm>
-          <a:prstGeom prst="rect">
-            <a:avLst/>
-          </a:prstGeom>
-          <a:noFill/>
-          <a:ln>
-            <a:noFill/>
-          </a:ln>
-        </p:spPr>
-        <p:txBody>
-          <a:bodyPr wrap="none" lIns="0" tIns="0" rIns="0" bIns="0" anchor="t" anchorCtr="0">
-            <a:spAutoFit/>
-          </a:bodyPr>
-          <a:lstStyle/>
-          <a:p>
-            <a:pPr algn="l"/>
-            <a:r>
-              <a:rPr lang="zh-CN" sz="980" dirty="0">
-                <a:solidFill>
-                  <a:schemeClr val="accent5"/>
-                </a:solidFill>
-                <a:latin typeface="Segoe UI"/>
-                <a:ea typeface="Microsoft YaHei"/>
-                <a:cs typeface="Segoe UI"/>
-              </a:rPr>
-              <a:t>自定义任务扩展</a:t>
-            </a:r>
-          </a:p>
-        </p:txBody>
-      </p:sp>
-      <p:sp>
-        <p:nvSpPr>
-          <p:cNvPr id="38" name="Rectangle 38"/>
-          <p:cNvSpPr/>
-          <p:nvPr/>
-        </p:nvSpPr>
-        <p:spPr>
-          <a:xfrm>
-            <a:off x="3143250" y="5943600"/>
-            <a:ext cx="2667000" cy="209550"/>
-          </a:xfrm>
-          <a:prstGeom prst="rect">
-            <a:avLst/>
-          </a:prstGeom>
-          <a:solidFill>
-            <a:srgbClr val="F8FAFC"/>
-          </a:solidFill>
-          <a:ln>
-            <a:noFill/>
-          </a:ln>
-        </p:spPr>
-      </p:sp>
-      <p:sp>
-        <p:nvSpPr>
-          <p:cNvPr id="39" name="TextBox 39"/>
-          <p:cNvSpPr txBox="1"/>
-          <p:nvPr/>
-        </p:nvSpPr>
-        <p:spPr>
-          <a:xfrm>
-            <a:off x="3252597" y="5990749"/>
-            <a:ext cx="1980315" cy="190690"/>
-          </a:xfrm>
-          <a:prstGeom prst="rect">
-            <a:avLst/>
-          </a:prstGeom>
-          <a:noFill/>
-          <a:ln>
-            <a:noFill/>
-          </a:ln>
-        </p:spPr>
-        <p:txBody>
-          <a:bodyPr wrap="none" lIns="0" tIns="0" rIns="0" bIns="0" anchor="t" anchorCtr="0">
-            <a:spAutoFit/>
-          </a:bodyPr>
-          <a:lstStyle/>
-          <a:p>
-            <a:pPr algn="l"/>
-            <a:r>
-              <a:rPr lang="zh-CN" sz="980" dirty="0">
-                <a:solidFill>
-                  <a:srgbClr val="10B981"/>
-                </a:solidFill>
-                <a:latin typeface="Segoe UI"/>
-                <a:ea typeface="Microsoft YaHei"/>
-                <a:cs typeface="Segoe UI"/>
-              </a:rPr>
-              <a:t>✓ OpenJudge 生态，灵活可扩展</a:t>
-            </a:r>
-          </a:p>
-        </p:txBody>
-      </p:sp>
-      <p:sp>
-        <p:nvSpPr>
-          <p:cNvPr id="40" name="Rectangle 40"/>
-          <p:cNvSpPr/>
-          <p:nvPr/>
-        </p:nvSpPr>
-        <p:spPr>
-          <a:xfrm>
-            <a:off x="571500" y="6153150"/>
-            <a:ext cx="2571750" cy="209550"/>
-          </a:xfrm>
-          <a:prstGeom prst="rect">
-            <a:avLst/>
-          </a:prstGeom>
-          <a:solidFill>
-            <a:schemeClr val="lt1"/>
-          </a:solidFill>
-          <a:ln>
-            <a:noFill/>
-          </a:ln>
-        </p:spPr>
-      </p:sp>
-      <p:sp>
-        <p:nvSpPr>
-          <p:cNvPr id="41" name="TextBox 41"/>
-          <p:cNvSpPr txBox="1"/>
-          <p:nvPr/>
-        </p:nvSpPr>
-        <p:spPr>
-          <a:xfrm>
-            <a:off x="680847" y="6200299"/>
-            <a:ext cx="850459" cy="190690"/>
-          </a:xfrm>
-          <a:prstGeom prst="rect">
-            <a:avLst/>
-          </a:prstGeom>
-          <a:noFill/>
-          <a:ln>
-            <a:noFill/>
-          </a:ln>
-        </p:spPr>
-        <p:txBody>
-          <a:bodyPr wrap="none" lIns="0" tIns="0" rIns="0" bIns="0" anchor="t" anchorCtr="0">
-            <a:spAutoFit/>
-          </a:bodyPr>
-          <a:lstStyle/>
-          <a:p>
-            <a:pPr algn="l"/>
-            <a:r>
-              <a:rPr lang="zh-CN" sz="980" dirty="0">
-                <a:solidFill>
-                  <a:schemeClr val="accent5"/>
-                </a:solidFill>
-                <a:latin typeface="Segoe UI"/>
-                <a:ea typeface="Microsoft YaHei"/>
-                <a:cs typeface="Segoe UI"/>
-              </a:rPr>
-              <a:t>Skill 能力评估</a:t>
-            </a:r>
-          </a:p>
-        </p:txBody>
-      </p:sp>
-      <p:sp>
-        <p:nvSpPr>
-          <p:cNvPr id="42" name="Rectangle 42"/>
-          <p:cNvSpPr/>
-          <p:nvPr/>
-        </p:nvSpPr>
-        <p:spPr>
-          <a:xfrm>
-            <a:off x="3143250" y="6153150"/>
-            <a:ext cx="2667000" cy="209550"/>
-          </a:xfrm>
-          <a:prstGeom prst="rect">
-            <a:avLst/>
-          </a:prstGeom>
-          <a:solidFill>
-            <a:schemeClr val="lt1"/>
-          </a:solidFill>
-          <a:ln>
-            <a:noFill/>
-          </a:ln>
-        </p:spPr>
-      </p:sp>
-      <p:sp>
-        <p:nvSpPr>
-          <p:cNvPr id="43" name="TextBox 43"/>
-          <p:cNvSpPr txBox="1"/>
-          <p:nvPr/>
-        </p:nvSpPr>
-        <p:spPr>
-          <a:xfrm>
-            <a:off x="3252597" y="6200299"/>
-            <a:ext cx="2692486" cy="190690"/>
-          </a:xfrm>
-          <a:prstGeom prst="rect">
-            <a:avLst/>
-          </a:prstGeom>
-          <a:noFill/>
-          <a:ln>
-            <a:noFill/>
-          </a:ln>
-        </p:spPr>
-        <p:txBody>
-          <a:bodyPr wrap="none" lIns="0" tIns="0" rIns="0" bIns="0" anchor="t" anchorCtr="0">
-            <a:spAutoFit/>
-          </a:bodyPr>
-          <a:lstStyle/>
-          <a:p>
-            <a:pPr algn="l"/>
-            <a:r>
-              <a:rPr lang="zh-CN" sz="980" dirty="0">
-                <a:solidFill>
-                  <a:srgbClr val="10B981"/>
-                </a:solidFill>
-                <a:latin typeface="Segoe UI"/>
-                <a:ea typeface="Microsoft YaHei"/>
-                <a:cs typeface="Segoe UI"/>
-              </a:rPr>
-              <a:t>✓ 7 大原子能力含 Skill_Use，15 道专项任务</a:t>
-            </a:r>
-          </a:p>
-        </p:txBody>
-      </p:sp>
-      <p:sp>
-        <p:nvSpPr>
-          <p:cNvPr id="44" name="Rectangle 44"/>
-          <p:cNvSpPr/>
-          <p:nvPr/>
-        </p:nvSpPr>
-        <p:spPr>
-          <a:xfrm>
-            <a:off x="571500" y="6362700"/>
-            <a:ext cx="2571750" cy="209550"/>
-          </a:xfrm>
-          <a:prstGeom prst="rect">
-            <a:avLst/>
-          </a:prstGeom>
-          <a:solidFill>
-            <a:srgbClr val="F8FAFC"/>
-          </a:solidFill>
-          <a:ln>
-            <a:noFill/>
-          </a:ln>
-        </p:spPr>
-      </p:sp>
-      <p:sp>
-        <p:nvSpPr>
-          <p:cNvPr id="45" name="TextBox 45"/>
-          <p:cNvSpPr txBox="1"/>
-          <p:nvPr/>
-        </p:nvSpPr>
-        <p:spPr>
-          <a:xfrm>
-            <a:off x="680847" y="6409849"/>
-            <a:ext cx="537616" cy="190690"/>
-          </a:xfrm>
-          <a:prstGeom prst="rect">
-            <a:avLst/>
-          </a:prstGeom>
-          <a:noFill/>
-          <a:ln>
-            <a:noFill/>
-          </a:ln>
-        </p:spPr>
-        <p:txBody>
-          <a:bodyPr wrap="none" lIns="0" tIns="0" rIns="0" bIns="0" anchor="t" anchorCtr="0">
-            <a:spAutoFit/>
-          </a:bodyPr>
-          <a:lstStyle/>
-          <a:p>
-            <a:pPr algn="l"/>
-            <a:r>
-              <a:rPr lang="zh-CN" sz="980" dirty="0">
-                <a:solidFill>
-                  <a:schemeClr val="accent5"/>
-                </a:solidFill>
-                <a:latin typeface="Segoe UI"/>
-                <a:ea typeface="Microsoft YaHei"/>
-                <a:cs typeface="Segoe UI"/>
-              </a:rPr>
-              <a:t>量化回归</a:t>
-            </a:r>
-          </a:p>
-        </p:txBody>
-      </p:sp>
-      <p:sp>
-        <p:nvSpPr>
-          <p:cNvPr id="46" name="Rectangle 46"/>
-          <p:cNvSpPr/>
-          <p:nvPr/>
-        </p:nvSpPr>
-        <p:spPr>
-          <a:xfrm>
-            <a:off x="3143250" y="6362700"/>
-            <a:ext cx="2667000" cy="209550"/>
-          </a:xfrm>
-          <a:prstGeom prst="rect">
-            <a:avLst/>
-          </a:prstGeom>
-          <a:solidFill>
-            <a:srgbClr val="F8FAFC"/>
-          </a:solidFill>
-          <a:ln>
-            <a:noFill/>
-          </a:ln>
-        </p:spPr>
-      </p:sp>
-      <p:sp>
-        <p:nvSpPr>
-          <p:cNvPr id="47" name="TextBox 47"/>
-          <p:cNvSpPr txBox="1"/>
-          <p:nvPr/>
-        </p:nvSpPr>
-        <p:spPr>
-          <a:xfrm>
-            <a:off x="3252597" y="6409849"/>
-            <a:ext cx="2323866" cy="190690"/>
-          </a:xfrm>
-          <a:prstGeom prst="rect">
-            <a:avLst/>
-          </a:prstGeom>
-          <a:noFill/>
-          <a:ln>
-            <a:noFill/>
-          </a:ln>
-        </p:spPr>
-        <p:txBody>
-          <a:bodyPr wrap="none" lIns="0" tIns="0" rIns="0" bIns="0" anchor="t" anchorCtr="0">
-            <a:spAutoFit/>
-          </a:bodyPr>
-          <a:lstStyle/>
-          <a:p>
-            <a:pPr algn="l"/>
-            <a:r>
-              <a:rPr lang="zh-CN" sz="980" dirty="0">
-                <a:solidFill>
-                  <a:srgbClr val="10B981"/>
-                </a:solidFill>
-                <a:latin typeface="Segoe UI"/>
-                <a:ea typeface="Microsoft YaHei"/>
-                <a:cs typeface="Segoe UI"/>
-              </a:rPr>
-              <a:t>✓ 标准化任务 + 自动评分，CI 可集成</a:t>
-            </a:r>
-          </a:p>
-        </p:txBody>
-      </p:sp>
-      <p:sp>
-        <p:nvSpPr>
-          <p:cNvPr id="48" name="TextBox 48"/>
-          <p:cNvSpPr txBox="1"/>
-          <p:nvPr/>
-        </p:nvSpPr>
-        <p:spPr>
-          <a:xfrm>
-            <a:off x="6278118" y="1203008"/>
-            <a:ext cx="949681" cy="322707"/>
-          </a:xfrm>
-          <a:prstGeom prst="rect">
-            <a:avLst/>
-          </a:prstGeom>
-          <a:noFill/>
-          <a:ln>
-            <a:noFill/>
-          </a:ln>
-        </p:spPr>
-        <p:txBody>
-          <a:bodyPr wrap="none" lIns="0" tIns="0" rIns="0" bIns="0" anchor="t" anchorCtr="0">
-            <a:spAutoFit/>
-          </a:bodyPr>
-          <a:lstStyle/>
-          <a:p>
-            <a:pPr algn="l"/>
-            <a:r>
-              <a:rPr lang="zh-CN" sz="1650" b="1" dirty="0">
-                <a:solidFill>
-                  <a:schemeClr val="accent1"/>
-                </a:solidFill>
-                <a:latin typeface="Segoe UI"/>
-                <a:ea typeface="Microsoft YaHei"/>
-                <a:cs typeface="Segoe UI"/>
-              </a:rPr>
-              <a:t>集成方式</a:t>
-            </a:r>
-          </a:p>
-        </p:txBody>
-      </p:sp>
-      <p:sp>
-        <p:nvSpPr>
-          <p:cNvPr id="49" name="Rectangle 49"/>
-          <p:cNvSpPr/>
-          <p:nvPr/>
-        </p:nvSpPr>
-        <p:spPr>
-          <a:xfrm>
-            <a:off x="6286500" y="1619250"/>
-            <a:ext cx="5334000" cy="1095375"/>
-          </a:xfrm>
-          <a:prstGeom prst="rect">
-            <a:avLst/>
-          </a:prstGeom>
-          <a:solidFill>
-            <a:schemeClr val="lt2"/>
-          </a:solidFill>
-          <a:ln>
-            <a:noFill/>
-          </a:ln>
-        </p:spPr>
-      </p:sp>
-      <p:sp>
-        <p:nvSpPr>
-          <p:cNvPr id="50" name="Rectangle 50"/>
-          <p:cNvSpPr/>
-          <p:nvPr/>
-        </p:nvSpPr>
-        <p:spPr>
-          <a:xfrm>
-            <a:off x="6286500" y="1619250"/>
-            <a:ext cx="57150" cy="1095375"/>
-          </a:xfrm>
-          <a:prstGeom prst="rect">
-            <a:avLst/>
-          </a:prstGeom>
-          <a:solidFill>
-            <a:schemeClr val="accent1"/>
-          </a:solidFill>
-          <a:ln>
-            <a:noFill/>
-          </a:ln>
-        </p:spPr>
-      </p:sp>
-      <p:sp>
-        <p:nvSpPr>
-          <p:cNvPr id="51" name="TextBox 51"/>
-          <p:cNvSpPr txBox="1"/>
-          <p:nvPr/>
-        </p:nvSpPr>
-        <p:spPr>
-          <a:xfrm>
-            <a:off x="6564630" y="1743075"/>
-            <a:ext cx="863346" cy="293370"/>
-          </a:xfrm>
-          <a:prstGeom prst="rect">
-            <a:avLst/>
-          </a:prstGeom>
-          <a:noFill/>
-          <a:ln>
-            <a:noFill/>
-          </a:ln>
-        </p:spPr>
-        <p:txBody>
-          <a:bodyPr wrap="none" lIns="0" tIns="0" rIns="0" bIns="0" anchor="t" anchorCtr="0">
-            <a:spAutoFit/>
-          </a:bodyPr>
-          <a:lstStyle/>
-          <a:p>
-            <a:pPr algn="l"/>
-            <a:r>
-              <a:rPr lang="zh-CN" sz="1500" b="1" dirty="0">
-                <a:solidFill>
-                  <a:schemeClr val="accent1"/>
-                </a:solidFill>
-                <a:latin typeface="Segoe UI"/>
-                <a:ea typeface="Microsoft YaHei"/>
-                <a:cs typeface="Segoe UI"/>
-              </a:rPr>
-              <a:t>环境部署</a:t>
-            </a:r>
-          </a:p>
-        </p:txBody>
-      </p:sp>
-      <p:sp>
-        <p:nvSpPr>
-          <p:cNvPr id="52" name="TextBox 52"/>
-          <p:cNvSpPr txBox="1"/>
-          <p:nvPr/>
-        </p:nvSpPr>
-        <p:spPr>
-          <a:xfrm>
-            <a:off x="6566154" y="2061210"/>
-            <a:ext cx="4428063" cy="234696"/>
-          </a:xfrm>
-          <a:prstGeom prst="rect">
-            <a:avLst/>
-          </a:prstGeom>
-          <a:noFill/>
-          <a:ln>
-            <a:noFill/>
-          </a:ln>
-        </p:spPr>
-        <p:txBody>
-          <a:bodyPr wrap="none" lIns="0" tIns="0" rIns="0" bIns="0" anchor="t" anchorCtr="0">
-            <a:spAutoFit/>
-          </a:bodyPr>
-          <a:lstStyle/>
-          <a:p>
-            <a:pPr algn="l"/>
-            <a:r>
-              <a:rPr lang="zh-CN" sz="1200" dirty="0">
-                <a:solidFill>
-                  <a:schemeClr val="dk1"/>
-                </a:solidFill>
-                <a:latin typeface="Segoe UI"/>
-                <a:ea typeface="Microsoft YaHei"/>
-                <a:cs typeface="Segoe UI"/>
-              </a:rPr>
-              <a:t>Docker 一键部署，拉取 PawBench 仓库，配置模型 API 密钥</a:t>
-            </a:r>
-          </a:p>
-        </p:txBody>
-      </p:sp>
-      <p:sp>
-        <p:nvSpPr>
-          <p:cNvPr id="53" name="TextBox 53"/>
-          <p:cNvSpPr txBox="1"/>
-          <p:nvPr/>
-        </p:nvSpPr>
-        <p:spPr>
-          <a:xfrm>
-            <a:off x="6566154" y="2299335"/>
-            <a:ext cx="4252722" cy="234696"/>
-          </a:xfrm>
-          <a:prstGeom prst="rect">
-            <a:avLst/>
-          </a:prstGeom>
-          <a:noFill/>
-          <a:ln>
-            <a:noFill/>
-          </a:ln>
-        </p:spPr>
-        <p:txBody>
-          <a:bodyPr wrap="none" lIns="0" tIns="0" rIns="0" bIns="0" anchor="t" anchorCtr="0">
-            <a:spAutoFit/>
-          </a:bodyPr>
-          <a:lstStyle/>
-          <a:p>
-            <a:pPr algn="l"/>
-            <a:r>
-              <a:rPr lang="zh-CN" sz="1200" dirty="0">
-                <a:solidFill>
-                  <a:schemeClr val="accent5"/>
-                </a:solidFill>
-                <a:latin typeface="Segoe UI"/>
-                <a:ea typeface="Microsoft YaHei"/>
-                <a:cs typeface="Segoe UI"/>
-              </a:rPr>
-              <a:t>完成后即可跑通全量 150 道标准化任务，获得基线评测结果</a:t>
-            </a:r>
-          </a:p>
-        </p:txBody>
-      </p:sp>
-      <p:sp>
-        <p:nvSpPr>
-          <p:cNvPr id="54" name="Rectangle 54"/>
-          <p:cNvSpPr/>
-          <p:nvPr/>
-        </p:nvSpPr>
-        <p:spPr>
-          <a:xfrm>
-            <a:off x="6286500" y="2857500"/>
-            <a:ext cx="5334000" cy="1095375"/>
-          </a:xfrm>
-          <a:prstGeom prst="rect">
-            <a:avLst/>
-          </a:prstGeom>
-          <a:solidFill>
-            <a:schemeClr val="lt2"/>
-          </a:solidFill>
-          <a:ln>
-            <a:noFill/>
-          </a:ln>
-        </p:spPr>
-      </p:sp>
-      <p:sp>
-        <p:nvSpPr>
-          <p:cNvPr id="55" name="Rectangle 55"/>
-          <p:cNvSpPr/>
-          <p:nvPr/>
-        </p:nvSpPr>
-        <p:spPr>
-          <a:xfrm>
-            <a:off x="6286500" y="2857500"/>
-            <a:ext cx="57150" cy="1095375"/>
-          </a:xfrm>
-          <a:prstGeom prst="rect">
-            <a:avLst/>
-          </a:prstGeom>
-          <a:solidFill>
-            <a:schemeClr val="accent2"/>
-          </a:solidFill>
-          <a:ln>
-            <a:noFill/>
-          </a:ln>
-        </p:spPr>
-      </p:sp>
-      <p:sp>
-        <p:nvSpPr>
-          <p:cNvPr id="56" name="TextBox 56"/>
-          <p:cNvSpPr txBox="1"/>
-          <p:nvPr/>
-        </p:nvSpPr>
-        <p:spPr>
-          <a:xfrm>
-            <a:off x="6564630" y="2981325"/>
-            <a:ext cx="863346" cy="293370"/>
-          </a:xfrm>
-          <a:prstGeom prst="rect">
-            <a:avLst/>
-          </a:prstGeom>
-          <a:noFill/>
-          <a:ln>
-            <a:noFill/>
-          </a:ln>
-        </p:spPr>
-        <p:txBody>
-          <a:bodyPr wrap="none" lIns="0" tIns="0" rIns="0" bIns="0" anchor="t" anchorCtr="0">
-            <a:spAutoFit/>
-          </a:bodyPr>
-          <a:lstStyle/>
-          <a:p>
-            <a:pPr algn="l"/>
-            <a:r>
-              <a:rPr lang="zh-CN" sz="1500" b="1" dirty="0">
-                <a:solidFill>
-                  <a:schemeClr val="accent1"/>
-                </a:solidFill>
-                <a:latin typeface="Segoe UI"/>
-                <a:ea typeface="Microsoft YaHei"/>
-                <a:cs typeface="Segoe UI"/>
-              </a:rPr>
-              <a:t>内网适配</a:t>
-            </a:r>
-          </a:p>
-        </p:txBody>
-      </p:sp>
-      <p:sp>
-        <p:nvSpPr>
-          <p:cNvPr id="57" name="TextBox 57"/>
-          <p:cNvSpPr txBox="1"/>
-          <p:nvPr/>
-        </p:nvSpPr>
-        <p:spPr>
-          <a:xfrm>
-            <a:off x="6566154" y="3299460"/>
-            <a:ext cx="4212336" cy="234696"/>
-          </a:xfrm>
-          <a:prstGeom prst="rect">
-            <a:avLst/>
-          </a:prstGeom>
-          <a:noFill/>
-          <a:ln>
-            <a:noFill/>
-          </a:ln>
-        </p:spPr>
-        <p:txBody>
-          <a:bodyPr wrap="none" lIns="0" tIns="0" rIns="0" bIns="0" anchor="t" anchorCtr="0">
-            <a:spAutoFit/>
-          </a:bodyPr>
-          <a:lstStyle/>
-          <a:p>
-            <a:pPr algn="l"/>
-            <a:r>
-              <a:rPr lang="zh-CN" sz="1200" dirty="0">
-                <a:solidFill>
-                  <a:schemeClr val="dk1"/>
-                </a:solidFill>
-                <a:latin typeface="Segoe UI"/>
-                <a:ea typeface="Microsoft YaHei"/>
-                <a:cs typeface="Segoe UI"/>
-              </a:rPr>
-              <a:t>含公网依赖的任务改造为离线可运行，自定义业务相关任务</a:t>
-            </a:r>
-          </a:p>
-        </p:txBody>
-      </p:sp>
-      <p:sp>
-        <p:nvSpPr>
-          <p:cNvPr id="58" name="TextBox 58"/>
-          <p:cNvSpPr txBox="1"/>
-          <p:nvPr/>
-        </p:nvSpPr>
-        <p:spPr>
-          <a:xfrm>
-            <a:off x="6566154" y="3537585"/>
-            <a:ext cx="4686833" cy="234696"/>
-          </a:xfrm>
-          <a:prstGeom prst="rect">
-            <a:avLst/>
-          </a:prstGeom>
-          <a:noFill/>
-          <a:ln>
-            <a:noFill/>
-          </a:ln>
-        </p:spPr>
-        <p:txBody>
-          <a:bodyPr wrap="none" lIns="0" tIns="0" rIns="0" bIns="0" anchor="t" anchorCtr="0">
-            <a:spAutoFit/>
-          </a:bodyPr>
-          <a:lstStyle/>
-          <a:p>
-            <a:pPr algn="l"/>
-            <a:r>
-              <a:rPr lang="zh-CN" sz="1200" dirty="0">
-                <a:solidFill>
-                  <a:schemeClr val="accent5"/>
-                </a:solidFill>
-                <a:latin typeface="Segoe UI"/>
-                <a:ea typeface="Microsoft YaHei"/>
-                <a:cs typeface="Segoe UI"/>
-              </a:rPr>
-              <a:t>支持基于 OpenJudge 自定义 Task / Judge / Runner，灵活扩展</a:t>
-            </a:r>
-          </a:p>
-        </p:txBody>
-      </p:sp>
-      <p:sp>
-        <p:nvSpPr>
-          <p:cNvPr id="59" name="Rectangle 59"/>
-          <p:cNvSpPr/>
-          <p:nvPr/>
-        </p:nvSpPr>
-        <p:spPr>
-          <a:xfrm>
-            <a:off x="6286500" y="4095750"/>
-            <a:ext cx="5334000" cy="1095375"/>
-          </a:xfrm>
-          <a:prstGeom prst="rect">
-            <a:avLst/>
-          </a:prstGeom>
-          <a:solidFill>
-            <a:schemeClr val="lt2"/>
-          </a:solidFill>
-          <a:ln>
-            <a:noFill/>
-          </a:ln>
-        </p:spPr>
-      </p:sp>
-      <p:sp>
-        <p:nvSpPr>
-          <p:cNvPr id="60" name="Rectangle 60"/>
-          <p:cNvSpPr/>
-          <p:nvPr/>
-        </p:nvSpPr>
-        <p:spPr>
-          <a:xfrm>
-            <a:off x="6286500" y="4095750"/>
-            <a:ext cx="57150" cy="1095375"/>
-          </a:xfrm>
-          <a:prstGeom prst="rect">
-            <a:avLst/>
-          </a:prstGeom>
-          <a:solidFill>
-            <a:srgbClr val="10B981"/>
-          </a:solidFill>
-          <a:ln>
-            <a:noFill/>
-          </a:ln>
-        </p:spPr>
-      </p:sp>
-      <p:sp>
-        <p:nvSpPr>
-          <p:cNvPr id="61" name="TextBox 61"/>
-          <p:cNvSpPr txBox="1"/>
-          <p:nvPr/>
-        </p:nvSpPr>
-        <p:spPr>
-          <a:xfrm>
-            <a:off x="6564630" y="4219575"/>
-            <a:ext cx="863346" cy="293370"/>
-          </a:xfrm>
-          <a:prstGeom prst="rect">
-            <a:avLst/>
-          </a:prstGeom>
-          <a:noFill/>
-          <a:ln>
-            <a:noFill/>
-          </a:ln>
-        </p:spPr>
-        <p:txBody>
-          <a:bodyPr wrap="none" lIns="0" tIns="0" rIns="0" bIns="0" anchor="t" anchorCtr="0">
-            <a:spAutoFit/>
-          </a:bodyPr>
-          <a:lstStyle/>
-          <a:p>
-            <a:pPr algn="l"/>
-            <a:r>
-              <a:rPr lang="zh-CN" sz="1500" b="1" dirty="0">
-                <a:solidFill>
-                  <a:schemeClr val="accent1"/>
-                </a:solidFill>
-                <a:latin typeface="Segoe UI"/>
-                <a:ea typeface="Microsoft YaHei"/>
-                <a:cs typeface="Segoe UI"/>
-              </a:rPr>
-              <a:t>持续迭代</a:t>
-            </a:r>
-          </a:p>
-        </p:txBody>
-      </p:sp>
-      <p:sp>
-        <p:nvSpPr>
-          <p:cNvPr id="62" name="TextBox 62"/>
-          <p:cNvSpPr txBox="1"/>
-          <p:nvPr/>
-        </p:nvSpPr>
-        <p:spPr>
-          <a:xfrm>
-            <a:off x="6566154" y="4537710"/>
-            <a:ext cx="3336828" cy="234696"/>
-          </a:xfrm>
-          <a:prstGeom prst="rect">
-            <a:avLst/>
-          </a:prstGeom>
-          <a:noFill/>
-          <a:ln>
-            <a:noFill/>
-          </a:ln>
-        </p:spPr>
-        <p:txBody>
-          <a:bodyPr wrap="none" lIns="0" tIns="0" rIns="0" bIns="0" anchor="t" anchorCtr="0">
-            <a:spAutoFit/>
-          </a:bodyPr>
-          <a:lstStyle/>
-          <a:p>
-            <a:pPr algn="l"/>
-            <a:r>
-              <a:rPr lang="zh-CN" sz="1200" dirty="0">
-                <a:solidFill>
-                  <a:schemeClr val="dk1"/>
-                </a:solidFill>
-                <a:latin typeface="Segoe UI"/>
-                <a:ea typeface="Microsoft YaHei"/>
-                <a:cs typeface="Segoe UI"/>
-              </a:rPr>
-              <a:t>嵌入 Agent 开发迭代流程，每次发布自动评测</a:t>
-            </a:r>
-          </a:p>
-        </p:txBody>
-      </p:sp>
-      <p:sp>
-        <p:nvSpPr>
-          <p:cNvPr id="63" name="TextBox 63"/>
-          <p:cNvSpPr txBox="1"/>
-          <p:nvPr/>
-        </p:nvSpPr>
-        <p:spPr>
-          <a:xfrm>
-            <a:off x="6566154" y="4775835"/>
-            <a:ext cx="4212336" cy="234696"/>
-          </a:xfrm>
-          <a:prstGeom prst="rect">
-            <a:avLst/>
-          </a:prstGeom>
-          <a:noFill/>
-          <a:ln>
-            <a:noFill/>
-          </a:ln>
-        </p:spPr>
-        <p:txBody>
-          <a:bodyPr wrap="none" lIns="0" tIns="0" rIns="0" bIns="0" anchor="t" anchorCtr="0">
-            <a:spAutoFit/>
-          </a:bodyPr>
-          <a:lstStyle/>
-          <a:p>
-            <a:pPr algn="l"/>
-            <a:r>
-              <a:rPr lang="zh-CN" sz="1200" dirty="0">
-                <a:solidFill>
-                  <a:schemeClr val="accent5"/>
-                </a:solidFill>
-                <a:latin typeface="Segoe UI"/>
-                <a:ea typeface="Microsoft YaHei"/>
-                <a:cs typeface="Segoe UI"/>
-              </a:rPr>
-              <a:t>利用五维标签切片分析，精准定位能力变化，推动持续改进</a:t>
-            </a:r>
-          </a:p>
-        </p:txBody>
-      </p:sp>
-      <p:sp>
-        <p:nvSpPr>
-          <p:cNvPr id="64" name="Rectangle 64"/>
-          <p:cNvSpPr/>
-          <p:nvPr/>
-        </p:nvSpPr>
-        <p:spPr>
-          <a:xfrm>
-            <a:off x="6286500" y="5429250"/>
-            <a:ext cx="5334000" cy="762000"/>
-          </a:xfrm>
-          <a:prstGeom prst="rect">
-            <a:avLst/>
-          </a:prstGeom>
-          <a:solidFill>
-            <a:srgbClr val="F8FAFC"/>
-          </a:solidFill>
-          <a:ln>
-            <a:noFill/>
-          </a:ln>
-        </p:spPr>
-      </p:sp>
-      <p:sp>
-        <p:nvSpPr>
-          <p:cNvPr id="65" name="Rectangle 65"/>
-          <p:cNvSpPr/>
-          <p:nvPr/>
-        </p:nvSpPr>
-        <p:spPr>
-          <a:xfrm>
-            <a:off x="6286500" y="5429250"/>
-            <a:ext cx="5334000" cy="19050"/>
-          </a:xfrm>
-          <a:prstGeom prst="rect">
-            <a:avLst/>
-          </a:prstGeom>
-          <a:solidFill>
-            <a:schemeClr val="accent4"/>
-          </a:solidFill>
-          <a:ln>
-            <a:noFill/>
-          </a:ln>
-        </p:spPr>
-      </p:sp>
-      <p:sp>
-        <p:nvSpPr>
-          <p:cNvPr id="66" name="TextBox 66"/>
-          <p:cNvSpPr txBox="1"/>
-          <p:nvPr/>
-        </p:nvSpPr>
-        <p:spPr>
-          <a:xfrm>
-            <a:off x="6566535" y="5574506"/>
-            <a:ext cx="644682" cy="220028"/>
-          </a:xfrm>
-          <a:prstGeom prst="rect">
-            <a:avLst/>
-          </a:prstGeom>
-          <a:noFill/>
-          <a:ln>
-            <a:noFill/>
-          </a:ln>
-        </p:spPr>
-        <p:txBody>
-          <a:bodyPr wrap="none" lIns="0" tIns="0" rIns="0" bIns="0" anchor="t" anchorCtr="0">
-            <a:spAutoFit/>
-          </a:bodyPr>
-          <a:lstStyle/>
-          <a:p>
-            <a:pPr algn="l"/>
-            <a:r>
-              <a:rPr lang="zh-CN" sz="1120" b="1" dirty="0">
-                <a:solidFill>
-                  <a:schemeClr val="accent1"/>
-                </a:solidFill>
-                <a:latin typeface="Segoe UI"/>
-                <a:ea typeface="Microsoft YaHei"/>
-                <a:cs typeface="Segoe UI"/>
-              </a:rPr>
-              <a:t>技术特点</a:t>
-            </a:r>
-          </a:p>
-        </p:txBody>
-      </p:sp>
-      <p:sp>
-        <p:nvSpPr>
-          <p:cNvPr id="67" name="TextBox 67"/>
-          <p:cNvSpPr txBox="1"/>
-          <p:nvPr/>
-        </p:nvSpPr>
-        <p:spPr>
-          <a:xfrm>
-            <a:off x="6566916" y="5811202"/>
-            <a:ext cx="4617110" cy="205359"/>
-          </a:xfrm>
-          <a:prstGeom prst="rect">
-            <a:avLst/>
-          </a:prstGeom>
-          <a:noFill/>
-          <a:ln>
-            <a:noFill/>
-          </a:ln>
-        </p:spPr>
-        <p:txBody>
-          <a:bodyPr wrap="none" lIns="0" tIns="0" rIns="0" bIns="0" anchor="t" anchorCtr="0">
-            <a:spAutoFit/>
-          </a:bodyPr>
-          <a:lstStyle/>
-          <a:p>
-            <a:pPr algn="l"/>
-            <a:r>
-              <a:rPr lang="zh-CN" sz="1050" dirty="0">
-                <a:solidFill>
-                  <a:schemeClr val="accent5"/>
-                </a:solidFill>
-                <a:latin typeface="Segoe UI"/>
-                <a:ea typeface="Microsoft YaHei"/>
-                <a:cs typeface="Segoe UI"/>
-              </a:rPr>
-              <a:t>支持 OpenAI 兼容 API 和私有化模型接入，纯 Python 实现，无专有依赖</a:t>
-            </a:r>
-          </a:p>
-        </p:txBody>
-      </p:sp>
-      <p:sp>
-        <p:nvSpPr>
-          <p:cNvPr id="68" name="TextBox 68"/>
-          <p:cNvSpPr txBox="1"/>
-          <p:nvPr/>
-        </p:nvSpPr>
-        <p:spPr>
-          <a:xfrm>
-            <a:off x="6566916" y="6001702"/>
-            <a:ext cx="3848908" cy="205359"/>
-          </a:xfrm>
-          <a:prstGeom prst="rect">
-            <a:avLst/>
-          </a:prstGeom>
-          <a:noFill/>
-          <a:ln>
-            <a:noFill/>
-          </a:ln>
-        </p:spPr>
-        <p:txBody>
-          <a:bodyPr wrap="none" lIns="0" tIns="0" rIns="0" bIns="0" anchor="t" anchorCtr="0">
-            <a:spAutoFit/>
-          </a:bodyPr>
-          <a:lstStyle/>
-          <a:p>
-            <a:pPr algn="l"/>
-            <a:r>
-              <a:rPr lang="zh-CN" sz="1050" dirty="0">
-                <a:solidFill>
-                  <a:schemeClr val="accent5"/>
-                </a:solidFill>
-                <a:latin typeface="Segoe UI"/>
-                <a:ea typeface="Microsoft YaHei"/>
-                <a:cs typeface="Segoe UI"/>
-              </a:rPr>
-              <a:t>Task / Judge / Runner 解耦设计，各组件可独立定制和替换</a:t>
-            </a:r>
-          </a:p>
-        </p:txBody>
-      </p:sp>
-      <p:sp>
-        <p:nvSpPr>
-          <p:cNvPr id="69" name="Rectangle 69"/>
-          <p:cNvSpPr/>
-          <p:nvPr/>
-        </p:nvSpPr>
-        <p:spPr>
-          <a:xfrm>
-            <a:off x="571500" y="6667500"/>
-            <a:ext cx="11049000" cy="9525"/>
-          </a:xfrm>
-          <a:prstGeom prst="rect">
-            <a:avLst/>
-          </a:prstGeom>
-          <a:solidFill>
-            <a:schemeClr val="accent4"/>
-          </a:solidFill>
-          <a:ln>
-            <a:noFill/>
-          </a:ln>
-        </p:spPr>
-      </p:sp>
-      <p:sp>
-        <p:nvSpPr>
-          <p:cNvPr id="70" name="Rectangle 5"/>
-          <p:cNvSpPr/>
-          <p:nvPr/>
-        </p:nvSpPr>
-        <p:spPr>
-          <a:xfrm>
-            <a:off x="571500" y="914400"/>
-            <a:ext cx="762000" cy="28575"/>
-          </a:xfrm>
-          <a:prstGeom prst="rect">
-            <a:avLst/>
-          </a:prstGeom>
-          <a:solidFill>
-            <a:schemeClr val="accent2"/>
-          </a:solidFill>
-          <a:ln>
-            <a:noFill/>
-          </a:ln>
-        </p:spPr>
+              <a:t> = Prompt + Expected Behavior + </a:t>
+            </a:r>
+            <a:r>
+              <a:rPr sz="1200" b="1" dirty="0" err="1">
+                <a:solidFill>
+                  <a:srgbClr val="FFFFFF"/>
+                </a:solidFill>
+                <a:latin typeface="Segoe UI"/>
+                <a:ea typeface="Microsoft YaHei"/>
+                <a:cs typeface="Segoe UI"/>
+              </a:rPr>
+              <a:t>自动检查</a:t>
+            </a:r>
+            <a:r>
+              <a:rPr sz="1200" b="1" dirty="0">
+                <a:solidFill>
+                  <a:srgbClr val="FFFFFF"/>
+                </a:solidFill>
+                <a:latin typeface="Segoe UI"/>
+                <a:ea typeface="Microsoft YaHei"/>
+                <a:cs typeface="Segoe UI"/>
+              </a:rPr>
+              <a:t>(</a:t>
+            </a:r>
+            <a:r>
+              <a:rPr sz="1200" b="1" dirty="0" err="1">
+                <a:solidFill>
+                  <a:srgbClr val="FFFFFF"/>
+                </a:solidFill>
+                <a:latin typeface="Segoe UI"/>
+                <a:ea typeface="Microsoft YaHei"/>
+                <a:cs typeface="Segoe UI"/>
+              </a:rPr>
+              <a:t>代码</a:t>
+            </a:r>
+            <a:r>
+              <a:rPr sz="1200" b="1" dirty="0">
+                <a:solidFill>
+                  <a:srgbClr val="FFFFFF"/>
+                </a:solidFill>
+                <a:latin typeface="Segoe UI"/>
+                <a:ea typeface="Microsoft YaHei"/>
+                <a:cs typeface="Segoe UI"/>
+              </a:rPr>
+              <a:t>) + </a:t>
+            </a:r>
+            <a:r>
+              <a:rPr sz="1200" b="1" dirty="0" smtClean="0">
+                <a:solidFill>
+                  <a:srgbClr val="FFFFFF"/>
+                </a:solidFill>
+                <a:latin typeface="Segoe UI"/>
+                <a:ea typeface="Microsoft YaHei"/>
+                <a:cs typeface="Segoe UI"/>
+              </a:rPr>
+              <a:t>LLM</a:t>
+            </a:r>
+            <a:r>
+              <a:rPr lang="zh-CN" altLang="en-US" sz="1200" b="1" dirty="0">
+                <a:solidFill>
+                  <a:srgbClr val="FFFFFF"/>
+                </a:solidFill>
+                <a:latin typeface="Segoe UI"/>
+                <a:cs typeface="Segoe UI"/>
+              </a:rPr>
+              <a:t>评分细则</a:t>
+            </a:r>
+            <a:r>
+              <a:rPr sz="1200" b="1" dirty="0">
+                <a:solidFill>
+                  <a:srgbClr val="FFFFFF"/>
+                </a:solidFill>
+                <a:latin typeface="Segoe UI"/>
+                <a:ea typeface="Microsoft YaHei"/>
+                <a:cs typeface="Segoe UI"/>
+              </a:rPr>
+              <a:t>　｜　</a:t>
+            </a:r>
+            <a:r>
+              <a:rPr sz="1200" b="1" dirty="0" err="1">
+                <a:solidFill>
+                  <a:srgbClr val="FFFFFF"/>
+                </a:solidFill>
+                <a:latin typeface="Segoe UI"/>
+                <a:ea typeface="Microsoft YaHei"/>
+                <a:cs typeface="Segoe UI"/>
+              </a:rPr>
+              <a:t>评分仅依赖</a:t>
+            </a:r>
+            <a:r>
+              <a:rPr sz="1200" b="1" dirty="0">
+                <a:solidFill>
+                  <a:srgbClr val="FFFFFF"/>
+                </a:solidFill>
+                <a:latin typeface="Segoe UI"/>
+                <a:ea typeface="Microsoft YaHei"/>
+                <a:cs typeface="Segoe UI"/>
+              </a:rPr>
+              <a:t> transcript 与 </a:t>
+            </a:r>
+            <a:r>
+              <a:rPr sz="1200" b="1" dirty="0" err="1">
+                <a:solidFill>
+                  <a:srgbClr val="FFFFFF"/>
+                </a:solidFill>
+                <a:latin typeface="Segoe UI"/>
+                <a:ea typeface="Microsoft YaHei"/>
+                <a:cs typeface="Segoe UI"/>
+              </a:rPr>
+              <a:t>workspace_path，对</a:t>
+            </a:r>
+            <a:r>
+              <a:rPr sz="1200" b="1" dirty="0">
+                <a:solidFill>
+                  <a:srgbClr val="FFFFFF"/>
+                </a:solidFill>
+                <a:latin typeface="Segoe UI"/>
+                <a:ea typeface="Microsoft YaHei"/>
+                <a:cs typeface="Segoe UI"/>
+              </a:rPr>
+              <a:t> Agent </a:t>
+            </a:r>
+            <a:r>
+              <a:rPr sz="1200" b="1" dirty="0" err="1">
+                <a:solidFill>
+                  <a:srgbClr val="FFFFFF"/>
+                </a:solidFill>
+                <a:latin typeface="Segoe UI"/>
+                <a:ea typeface="Microsoft YaHei"/>
+                <a:cs typeface="Segoe UI"/>
+              </a:rPr>
+              <a:t>框架保持中立</a:t>
+            </a:r>
+            <a:endParaRPr sz="1200" b="1" dirty="0">
+              <a:solidFill>
+                <a:srgbClr val="FFFFFF"/>
+              </a:solidFill>
+              <a:latin typeface="Segoe UI"/>
+              <a:ea typeface="Microsoft YaHei"/>
+              <a:cs typeface="Segoe UI"/>
+            </a:endParaRPr>
+          </a:p>
+        </p:txBody>
       </p:sp>
     </p:spTree>
   </p:cSld>
   <p:clrMapOvr>
     <a:masterClrMapping/>
   </p:clrMapOvr>
-  <mc:AlternateContent xmlns:mc="http://schemas.openxmlformats.org/markup-compatibility/2006" xmlns:p14="http://schemas.microsoft.com/office/powerpoint/2010/main">
-    <mc:Choice Requires="p14">
-      <p:transition p14:dur="400">
-        <p:fade/>
-      </p:transition>
-    </mc:Choice>
-    <mc:Fallback xmlns="">
-      <p:transition>
-        <p:fade/>
-      </p:transition>
-    </mc:Fallback>
-  </mc:AlternateContent>
 </p:sld>
 </file>
 
@@ -13749,6 +13546,13 @@
             <a:noFill/>
           </a:ln>
         </p:spPr>
+        <p:txBody>
+          <a:bodyPr/>
+          <a:lstStyle/>
+          <a:p>
+            <a:endParaRPr/>
+          </a:p>
+        </p:txBody>
       </p:sp>
       <p:sp>
         <p:nvSpPr>
@@ -13758,24 +13562,86 @@
         </p:nvSpPr>
         <p:spPr>
           <a:xfrm>
+            <a:off x="566166" y="229552"/>
+            <a:ext cx="484194" cy="205359"/>
+          </a:xfrm>
+          <a:prstGeom prst="rect">
+            <a:avLst/>
+          </a:prstGeom>
+          <a:noFill/>
+          <a:ln>
+            <a:noFill/>
+          </a:ln>
+        </p:spPr>
+        <p:txBody>
+          <a:bodyPr wrap="none" lIns="0" tIns="0" rIns="0" bIns="0" anchor="t" anchorCtr="0">
+            <a:spAutoFit/>
+          </a:bodyPr>
+          <a:lstStyle/>
+          <a:p>
+            <a:pPr algn="l"/>
+            <a:r>
+              <a:rPr lang="en-US" sz="1050" dirty="0">
+                <a:solidFill>
+                  <a:schemeClr val="accent6"/>
+                </a:solidFill>
+                <a:latin typeface="Segoe UI"/>
+                <a:ea typeface="Segoe UI"/>
+                <a:cs typeface="Segoe UI"/>
+              </a:rPr>
+              <a:t>07 / 08</a:t>
+            </a:r>
+          </a:p>
+        </p:txBody>
+      </p:sp>
+      <p:sp>
+        <p:nvSpPr>
+          <p:cNvPr id="4" name="TextBox 4"/>
+          <p:cNvSpPr txBox="1"/>
+          <p:nvPr/>
+        </p:nvSpPr>
+        <p:spPr>
+          <a:xfrm>
             <a:off x="556260" y="438150"/>
-            <a:ext cx="878586" cy="586740"/>
-          </a:xfrm>
-          <a:prstGeom prst="rect">
-            <a:avLst/>
-          </a:prstGeom>
-          <a:noFill/>
-          <a:ln>
-            <a:noFill/>
-          </a:ln>
-        </p:spPr>
-        <p:txBody>
-          <a:bodyPr wrap="none" lIns="0" tIns="0" rIns="0" bIns="0" anchor="t" anchorCtr="0">
-            <a:spAutoFit/>
-          </a:bodyPr>
-          <a:lstStyle/>
-          <a:p>
-            <a:pPr algn="l"/>
+            <a:ext cx="5304401" cy="461665"/>
+          </a:xfrm>
+          <a:prstGeom prst="rect">
+            <a:avLst/>
+          </a:prstGeom>
+          <a:noFill/>
+          <a:ln>
+            <a:noFill/>
+          </a:ln>
+        </p:spPr>
+        <p:txBody>
+          <a:bodyPr wrap="none" lIns="0" tIns="0" rIns="0" bIns="0" anchor="t" anchorCtr="0">
+            <a:spAutoFit/>
+          </a:bodyPr>
+          <a:lstStyle/>
+          <a:p>
+            <a:pPr algn="l"/>
+            <a:r>
+              <a:rPr lang="en-US" altLang="zh-CN" sz="3000" b="1" dirty="0" err="1" smtClean="0">
+                <a:solidFill>
+                  <a:schemeClr val="accent1"/>
+                </a:solidFill>
+                <a:latin typeface="Segoe UI"/>
+                <a:ea typeface="Microsoft YaHei"/>
+                <a:cs typeface="Segoe UI"/>
+              </a:rPr>
+              <a:t>PawBench</a:t>
+            </a:r>
+            <a:r>
+              <a:rPr lang="zh-CN" sz="3000" b="1" dirty="0" smtClean="0">
+                <a:solidFill>
+                  <a:schemeClr val="accent1"/>
+                </a:solidFill>
+                <a:latin typeface="Segoe UI"/>
+                <a:ea typeface="Microsoft YaHei"/>
+                <a:cs typeface="Segoe UI"/>
+              </a:rPr>
+              <a:t>应用</a:t>
+            </a:r>
             <a:r>
               <a:rPr lang="zh-CN" sz="3000" b="1" dirty="0">
                 <a:solidFill>
@@ -13785,21 +13651,1567 @@
                 <a:ea typeface="Microsoft YaHei"/>
                 <a:cs typeface="Segoe UI"/>
               </a:rPr>
-              <a:t>总结</a:t>
-            </a:r>
-          </a:p>
-        </p:txBody>
-      </p:sp>
-      <p:sp>
-        <p:nvSpPr>
-          <p:cNvPr id="4" name="Rectangle 4"/>
+              <a:t>场景与集成方式</a:t>
+            </a:r>
+          </a:p>
+        </p:txBody>
+      </p:sp>
+      <p:sp>
+        <p:nvSpPr>
+          <p:cNvPr id="6" name="TextBox 6"/>
+          <p:cNvSpPr txBox="1"/>
+          <p:nvPr/>
+        </p:nvSpPr>
+        <p:spPr>
+          <a:xfrm>
+            <a:off x="563118" y="1203008"/>
+            <a:ext cx="1416139" cy="322707"/>
+          </a:xfrm>
+          <a:prstGeom prst="rect">
+            <a:avLst/>
+          </a:prstGeom>
+          <a:noFill/>
+          <a:ln>
+            <a:noFill/>
+          </a:ln>
+        </p:spPr>
+        <p:txBody>
+          <a:bodyPr wrap="none" lIns="0" tIns="0" rIns="0" bIns="0" anchor="t" anchorCtr="0">
+            <a:spAutoFit/>
+          </a:bodyPr>
+          <a:lstStyle/>
+          <a:p>
+            <a:pPr algn="l"/>
+            <a:r>
+              <a:rPr lang="zh-CN" sz="1650" b="1" dirty="0">
+                <a:solidFill>
+                  <a:schemeClr val="accent1"/>
+                </a:solidFill>
+                <a:latin typeface="Segoe UI"/>
+                <a:ea typeface="Microsoft YaHei"/>
+                <a:cs typeface="Segoe UI"/>
+              </a:rPr>
+              <a:t>典型应用场景</a:t>
+            </a:r>
+          </a:p>
+        </p:txBody>
+      </p:sp>
+      <p:sp>
+        <p:nvSpPr>
+          <p:cNvPr id="7" name="Rectangle 7"/>
           <p:cNvSpPr/>
           <p:nvPr/>
         </p:nvSpPr>
         <p:spPr>
           <a:xfrm>
-            <a:off x="571500" y="914400"/>
-            <a:ext cx="762000" cy="28575"/>
+            <a:off x="571500" y="1571625"/>
+            <a:ext cx="5238750" cy="666750"/>
+          </a:xfrm>
+          <a:prstGeom prst="rect">
+            <a:avLst/>
+          </a:prstGeom>
+          <a:solidFill>
+            <a:schemeClr val="lt2"/>
+          </a:solidFill>
+          <a:ln>
+            <a:noFill/>
+          </a:ln>
+        </p:spPr>
+      </p:sp>
+      <p:sp>
+        <p:nvSpPr>
+          <p:cNvPr id="8" name="Rectangle 8"/>
+          <p:cNvSpPr/>
+          <p:nvPr/>
+        </p:nvSpPr>
+        <p:spPr>
+          <a:xfrm>
+            <a:off x="571500" y="1571625"/>
+            <a:ext cx="38100" cy="666750"/>
+          </a:xfrm>
+          <a:prstGeom prst="rect">
+            <a:avLst/>
+          </a:prstGeom>
+          <a:solidFill>
+            <a:schemeClr val="accent1"/>
+          </a:solidFill>
+          <a:ln>
+            <a:noFill/>
+          </a:ln>
+        </p:spPr>
+      </p:sp>
+      <p:sp>
+        <p:nvSpPr>
+          <p:cNvPr id="9" name="TextBox 9"/>
+          <p:cNvSpPr txBox="1"/>
+          <p:nvPr/>
+        </p:nvSpPr>
+        <p:spPr>
+          <a:xfrm>
+            <a:off x="773811" y="1674971"/>
+            <a:ext cx="1218789" cy="278702"/>
+          </a:xfrm>
+          <a:prstGeom prst="rect">
+            <a:avLst/>
+          </a:prstGeom>
+          <a:noFill/>
+          <a:ln>
+            <a:noFill/>
+          </a:ln>
+        </p:spPr>
+        <p:txBody>
+          <a:bodyPr wrap="none" lIns="0" tIns="0" rIns="0" bIns="0" anchor="t" anchorCtr="0">
+            <a:spAutoFit/>
+          </a:bodyPr>
+          <a:lstStyle/>
+          <a:p>
+            <a:pPr algn="l"/>
+            <a:r>
+              <a:rPr lang="zh-CN" sz="1420" b="1" dirty="0">
+                <a:solidFill>
+                  <a:schemeClr val="dk1"/>
+                </a:solidFill>
+                <a:latin typeface="Segoe UI"/>
+                <a:ea typeface="Microsoft YaHei"/>
+                <a:cs typeface="Segoe UI"/>
+              </a:rPr>
+              <a:t>模型升级评估</a:t>
+            </a:r>
+          </a:p>
+        </p:txBody>
+      </p:sp>
+      <p:sp>
+        <p:nvSpPr>
+          <p:cNvPr id="10" name="TextBox 10"/>
+          <p:cNvSpPr txBox="1"/>
+          <p:nvPr/>
+        </p:nvSpPr>
+        <p:spPr>
+          <a:xfrm>
+            <a:off x="775335" y="1955006"/>
+            <a:ext cx="3834069" cy="220028"/>
+          </a:xfrm>
+          <a:prstGeom prst="rect">
+            <a:avLst/>
+          </a:prstGeom>
+          <a:noFill/>
+          <a:ln>
+            <a:noFill/>
+          </a:ln>
+        </p:spPr>
+        <p:txBody>
+          <a:bodyPr wrap="none" lIns="0" tIns="0" rIns="0" bIns="0" anchor="t" anchorCtr="0">
+            <a:spAutoFit/>
+          </a:bodyPr>
+          <a:lstStyle/>
+          <a:p>
+            <a:pPr algn="l"/>
+            <a:r>
+              <a:rPr lang="zh-CN" sz="1120" dirty="0">
+                <a:solidFill>
+                  <a:schemeClr val="accent5"/>
+                </a:solidFill>
+                <a:latin typeface="Segoe UI"/>
+                <a:ea typeface="Microsoft YaHei"/>
+                <a:cs typeface="Segoe UI"/>
+              </a:rPr>
+              <a:t>固定 Harness，横向跑新旧模型，看整体分和切片分变化</a:t>
+            </a:r>
+          </a:p>
+        </p:txBody>
+      </p:sp>
+      <p:sp>
+        <p:nvSpPr>
+          <p:cNvPr id="11" name="Rectangle 11"/>
+          <p:cNvSpPr/>
+          <p:nvPr/>
+        </p:nvSpPr>
+        <p:spPr>
+          <a:xfrm>
+            <a:off x="571500" y="2362200"/>
+            <a:ext cx="5238750" cy="666750"/>
+          </a:xfrm>
+          <a:prstGeom prst="rect">
+            <a:avLst/>
+          </a:prstGeom>
+          <a:solidFill>
+            <a:schemeClr val="lt2"/>
+          </a:solidFill>
+          <a:ln>
+            <a:noFill/>
+          </a:ln>
+        </p:spPr>
+      </p:sp>
+      <p:sp>
+        <p:nvSpPr>
+          <p:cNvPr id="12" name="Rectangle 12"/>
+          <p:cNvSpPr/>
+          <p:nvPr/>
+        </p:nvSpPr>
+        <p:spPr>
+          <a:xfrm>
+            <a:off x="571500" y="2362200"/>
+            <a:ext cx="38100" cy="666750"/>
+          </a:xfrm>
+          <a:prstGeom prst="rect">
+            <a:avLst/>
+          </a:prstGeom>
+          <a:solidFill>
+            <a:schemeClr val="accent1"/>
+          </a:solidFill>
+          <a:ln>
+            <a:noFill/>
+          </a:ln>
+        </p:spPr>
+      </p:sp>
+      <p:sp>
+        <p:nvSpPr>
+          <p:cNvPr id="13" name="TextBox 13"/>
+          <p:cNvSpPr txBox="1"/>
+          <p:nvPr/>
+        </p:nvSpPr>
+        <p:spPr>
+          <a:xfrm>
+            <a:off x="773811" y="2465546"/>
+            <a:ext cx="1445562" cy="278702"/>
+          </a:xfrm>
+          <a:prstGeom prst="rect">
+            <a:avLst/>
+          </a:prstGeom>
+          <a:noFill/>
+          <a:ln>
+            <a:noFill/>
+          </a:ln>
+        </p:spPr>
+        <p:txBody>
+          <a:bodyPr wrap="none" lIns="0" tIns="0" rIns="0" bIns="0" anchor="t" anchorCtr="0">
+            <a:spAutoFit/>
+          </a:bodyPr>
+          <a:lstStyle/>
+          <a:p>
+            <a:pPr algn="l"/>
+            <a:r>
+              <a:rPr lang="zh-CN" sz="1420" b="1" dirty="0">
+                <a:solidFill>
+                  <a:schemeClr val="dk1"/>
+                </a:solidFill>
+                <a:latin typeface="Segoe UI"/>
+                <a:ea typeface="Microsoft YaHei"/>
+                <a:cs typeface="Segoe UI"/>
+              </a:rPr>
+              <a:t>Agent 框架迭代</a:t>
+            </a:r>
+          </a:p>
+        </p:txBody>
+      </p:sp>
+      <p:sp>
+        <p:nvSpPr>
+          <p:cNvPr id="14" name="TextBox 14"/>
+          <p:cNvSpPr txBox="1"/>
+          <p:nvPr/>
+        </p:nvSpPr>
+        <p:spPr>
+          <a:xfrm>
+            <a:off x="775335" y="2745581"/>
+            <a:ext cx="3986063" cy="220028"/>
+          </a:xfrm>
+          <a:prstGeom prst="rect">
+            <a:avLst/>
+          </a:prstGeom>
+          <a:noFill/>
+          <a:ln>
+            <a:noFill/>
+          </a:ln>
+        </p:spPr>
+        <p:txBody>
+          <a:bodyPr wrap="none" lIns="0" tIns="0" rIns="0" bIns="0" anchor="t" anchorCtr="0">
+            <a:spAutoFit/>
+          </a:bodyPr>
+          <a:lstStyle/>
+          <a:p>
+            <a:pPr algn="l"/>
+            <a:r>
+              <a:rPr lang="zh-CN" sz="1120" dirty="0">
+                <a:solidFill>
+                  <a:schemeClr val="accent5"/>
+                </a:solidFill>
+                <a:latin typeface="Segoe UI"/>
+                <a:ea typeface="Microsoft YaHei"/>
+                <a:cs typeface="Segoe UI"/>
+              </a:rPr>
+              <a:t>固定模型，横向跑不同版本 Harness，验证改动未引入退化</a:t>
+            </a:r>
+          </a:p>
+        </p:txBody>
+      </p:sp>
+      <p:sp>
+        <p:nvSpPr>
+          <p:cNvPr id="15" name="Rectangle 15"/>
+          <p:cNvSpPr/>
+          <p:nvPr/>
+        </p:nvSpPr>
+        <p:spPr>
+          <a:xfrm>
+            <a:off x="571500" y="3152775"/>
+            <a:ext cx="5238750" cy="666750"/>
+          </a:xfrm>
+          <a:prstGeom prst="rect">
+            <a:avLst/>
+          </a:prstGeom>
+          <a:solidFill>
+            <a:schemeClr val="lt2"/>
+          </a:solidFill>
+          <a:ln>
+            <a:noFill/>
+          </a:ln>
+        </p:spPr>
+      </p:sp>
+      <p:sp>
+        <p:nvSpPr>
+          <p:cNvPr id="16" name="Rectangle 16"/>
+          <p:cNvSpPr/>
+          <p:nvPr/>
+        </p:nvSpPr>
+        <p:spPr>
+          <a:xfrm>
+            <a:off x="571500" y="3152775"/>
+            <a:ext cx="38100" cy="666750"/>
+          </a:xfrm>
+          <a:prstGeom prst="rect">
+            <a:avLst/>
+          </a:prstGeom>
+          <a:solidFill>
+            <a:schemeClr val="accent1"/>
+          </a:solidFill>
+          <a:ln>
+            <a:noFill/>
+          </a:ln>
+        </p:spPr>
+      </p:sp>
+      <p:sp>
+        <p:nvSpPr>
+          <p:cNvPr id="17" name="TextBox 17"/>
+          <p:cNvSpPr txBox="1"/>
+          <p:nvPr/>
+        </p:nvSpPr>
+        <p:spPr>
+          <a:xfrm>
+            <a:off x="773811" y="3256121"/>
+            <a:ext cx="1557207" cy="278702"/>
+          </a:xfrm>
+          <a:prstGeom prst="rect">
+            <a:avLst/>
+          </a:prstGeom>
+          <a:noFill/>
+          <a:ln>
+            <a:noFill/>
+          </a:ln>
+        </p:spPr>
+        <p:txBody>
+          <a:bodyPr wrap="none" lIns="0" tIns="0" rIns="0" bIns="0" anchor="t" anchorCtr="0">
+            <a:spAutoFit/>
+          </a:bodyPr>
+          <a:lstStyle/>
+          <a:p>
+            <a:pPr algn="l"/>
+            <a:r>
+              <a:rPr lang="zh-CN" sz="1420" b="1" dirty="0">
+                <a:solidFill>
+                  <a:schemeClr val="dk1"/>
+                </a:solidFill>
+                <a:latin typeface="Segoe UI"/>
+                <a:ea typeface="Microsoft YaHei"/>
+                <a:cs typeface="Segoe UI"/>
+              </a:rPr>
+              <a:t>自定义 Skill 验证</a:t>
+            </a:r>
+          </a:p>
+        </p:txBody>
+      </p:sp>
+      <p:sp>
+        <p:nvSpPr>
+          <p:cNvPr id="18" name="TextBox 18"/>
+          <p:cNvSpPr txBox="1"/>
+          <p:nvPr/>
+        </p:nvSpPr>
+        <p:spPr>
+          <a:xfrm>
+            <a:off x="775335" y="3536156"/>
+            <a:ext cx="3609988" cy="220028"/>
+          </a:xfrm>
+          <a:prstGeom prst="rect">
+            <a:avLst/>
+          </a:prstGeom>
+          <a:noFill/>
+          <a:ln>
+            <a:noFill/>
+          </a:ln>
+        </p:spPr>
+        <p:txBody>
+          <a:bodyPr wrap="none" lIns="0" tIns="0" rIns="0" bIns="0" anchor="t" anchorCtr="0">
+            <a:spAutoFit/>
+          </a:bodyPr>
+          <a:lstStyle/>
+          <a:p>
+            <a:pPr algn="l"/>
+            <a:r>
+              <a:rPr lang="zh-CN" sz="1120" dirty="0">
+                <a:solidFill>
+                  <a:schemeClr val="accent5"/>
+                </a:solidFill>
+                <a:latin typeface="Segoe UI"/>
+                <a:ea typeface="Microsoft YaHei"/>
+                <a:cs typeface="Segoe UI"/>
+              </a:rPr>
+              <a:t>新增业务 Skill 后，在相关切片上验证发现和执行效果</a:t>
+            </a:r>
+          </a:p>
+        </p:txBody>
+      </p:sp>
+      <p:sp>
+        <p:nvSpPr>
+          <p:cNvPr id="19" name="Rectangle 19"/>
+          <p:cNvSpPr/>
+          <p:nvPr/>
+        </p:nvSpPr>
+        <p:spPr>
+          <a:xfrm>
+            <a:off x="571500" y="3943350"/>
+            <a:ext cx="5238750" cy="666750"/>
+          </a:xfrm>
+          <a:prstGeom prst="rect">
+            <a:avLst/>
+          </a:prstGeom>
+          <a:solidFill>
+            <a:schemeClr val="lt2"/>
+          </a:solidFill>
+          <a:ln>
+            <a:noFill/>
+          </a:ln>
+        </p:spPr>
+      </p:sp>
+      <p:sp>
+        <p:nvSpPr>
+          <p:cNvPr id="20" name="Rectangle 20"/>
+          <p:cNvSpPr/>
+          <p:nvPr/>
+        </p:nvSpPr>
+        <p:spPr>
+          <a:xfrm>
+            <a:off x="571500" y="3943350"/>
+            <a:ext cx="38100" cy="666750"/>
+          </a:xfrm>
+          <a:prstGeom prst="rect">
+            <a:avLst/>
+          </a:prstGeom>
+          <a:solidFill>
+            <a:schemeClr val="accent1"/>
+          </a:solidFill>
+          <a:ln>
+            <a:noFill/>
+          </a:ln>
+        </p:spPr>
+      </p:sp>
+      <p:sp>
+        <p:nvSpPr>
+          <p:cNvPr id="21" name="TextBox 21"/>
+          <p:cNvSpPr txBox="1"/>
+          <p:nvPr/>
+        </p:nvSpPr>
+        <p:spPr>
+          <a:xfrm>
+            <a:off x="773811" y="4046696"/>
+            <a:ext cx="1419507" cy="278702"/>
+          </a:xfrm>
+          <a:prstGeom prst="rect">
+            <a:avLst/>
+          </a:prstGeom>
+          <a:noFill/>
+          <a:ln>
+            <a:noFill/>
+          </a:ln>
+        </p:spPr>
+        <p:txBody>
+          <a:bodyPr wrap="none" lIns="0" tIns="0" rIns="0" bIns="0" anchor="t" anchorCtr="0">
+            <a:spAutoFit/>
+          </a:bodyPr>
+          <a:lstStyle/>
+          <a:p>
+            <a:pPr algn="l"/>
+            <a:r>
+              <a:rPr lang="zh-CN" sz="1420" b="1" dirty="0">
+                <a:solidFill>
+                  <a:schemeClr val="dk1"/>
+                </a:solidFill>
+                <a:latin typeface="Segoe UI"/>
+                <a:ea typeface="Microsoft YaHei"/>
+                <a:cs typeface="Segoe UI"/>
+              </a:rPr>
+              <a:t>回归测试流水线</a:t>
+            </a:r>
+          </a:p>
+        </p:txBody>
+      </p:sp>
+      <p:sp>
+        <p:nvSpPr>
+          <p:cNvPr id="22" name="TextBox 22"/>
+          <p:cNvSpPr txBox="1"/>
+          <p:nvPr/>
+        </p:nvSpPr>
+        <p:spPr>
+          <a:xfrm>
+            <a:off x="775335" y="4326731"/>
+            <a:ext cx="3663747" cy="220028"/>
+          </a:xfrm>
+          <a:prstGeom prst="rect">
+            <a:avLst/>
+          </a:prstGeom>
+          <a:noFill/>
+          <a:ln>
+            <a:noFill/>
+          </a:ln>
+        </p:spPr>
+        <p:txBody>
+          <a:bodyPr wrap="none" lIns="0" tIns="0" rIns="0" bIns="0" anchor="t" anchorCtr="0">
+            <a:spAutoFit/>
+          </a:bodyPr>
+          <a:lstStyle/>
+          <a:p>
+            <a:pPr algn="l"/>
+            <a:r>
+              <a:rPr lang="zh-CN" sz="1120" dirty="0">
+                <a:solidFill>
+                  <a:schemeClr val="accent5"/>
+                </a:solidFill>
+                <a:latin typeface="Segoe UI"/>
+                <a:ea typeface="Microsoft YaHei"/>
+                <a:cs typeface="Segoe UI"/>
+              </a:rPr>
+              <a:t>集成到 CI 流程，每次 Agent / 模型发布自动触发评测</a:t>
+            </a:r>
+          </a:p>
+        </p:txBody>
+      </p:sp>
+      <p:sp>
+        <p:nvSpPr>
+          <p:cNvPr id="23" name="TextBox 23"/>
+          <p:cNvSpPr txBox="1"/>
+          <p:nvPr/>
+        </p:nvSpPr>
+        <p:spPr>
+          <a:xfrm>
+            <a:off x="563118" y="4822508"/>
+            <a:ext cx="2115826" cy="322707"/>
+          </a:xfrm>
+          <a:prstGeom prst="rect">
+            <a:avLst/>
+          </a:prstGeom>
+          <a:noFill/>
+          <a:ln>
+            <a:noFill/>
+          </a:ln>
+        </p:spPr>
+        <p:txBody>
+          <a:bodyPr wrap="none" lIns="0" tIns="0" rIns="0" bIns="0" anchor="t" anchorCtr="0">
+            <a:spAutoFit/>
+          </a:bodyPr>
+          <a:lstStyle/>
+          <a:p>
+            <a:pPr algn="l"/>
+            <a:r>
+              <a:rPr lang="zh-CN" sz="1650" b="1" dirty="0">
+                <a:solidFill>
+                  <a:schemeClr val="accent1"/>
+                </a:solidFill>
+                <a:latin typeface="Segoe UI"/>
+                <a:ea typeface="Microsoft YaHei"/>
+                <a:cs typeface="Segoe UI"/>
+              </a:rPr>
+              <a:t>企业需求与能力适配</a:t>
+            </a:r>
+          </a:p>
+        </p:txBody>
+      </p:sp>
+      <p:sp>
+        <p:nvSpPr>
+          <p:cNvPr id="24" name="Rectangle 24"/>
+          <p:cNvSpPr/>
+          <p:nvPr/>
+        </p:nvSpPr>
+        <p:spPr>
+          <a:xfrm>
+            <a:off x="571500" y="5219700"/>
+            <a:ext cx="2571750" cy="304800"/>
+          </a:xfrm>
+          <a:prstGeom prst="rect">
+            <a:avLst/>
+          </a:prstGeom>
+          <a:solidFill>
+            <a:schemeClr val="accent1"/>
+          </a:solidFill>
+          <a:ln>
+            <a:noFill/>
+          </a:ln>
+        </p:spPr>
+      </p:sp>
+      <p:sp>
+        <p:nvSpPr>
+          <p:cNvPr id="25" name="TextBox 25"/>
+          <p:cNvSpPr txBox="1"/>
+          <p:nvPr/>
+        </p:nvSpPr>
+        <p:spPr>
+          <a:xfrm>
+            <a:off x="775716" y="5315902"/>
+            <a:ext cx="307505" cy="205359"/>
+          </a:xfrm>
+          <a:prstGeom prst="rect">
+            <a:avLst/>
+          </a:prstGeom>
+          <a:noFill/>
+          <a:ln>
+            <a:noFill/>
+          </a:ln>
+        </p:spPr>
+        <p:txBody>
+          <a:bodyPr wrap="none" lIns="0" tIns="0" rIns="0" bIns="0" anchor="t" anchorCtr="0">
+            <a:spAutoFit/>
+          </a:bodyPr>
+          <a:lstStyle/>
+          <a:p>
+            <a:pPr algn="l"/>
+            <a:r>
+              <a:rPr lang="zh-CN" sz="1050" b="1" dirty="0">
+                <a:solidFill>
+                  <a:srgbClr val="FFFFFF"/>
+                </a:solidFill>
+                <a:latin typeface="Segoe UI"/>
+                <a:ea typeface="Microsoft YaHei"/>
+                <a:cs typeface="Segoe UI"/>
+              </a:rPr>
+              <a:t>需求</a:t>
+            </a:r>
+          </a:p>
+        </p:txBody>
+      </p:sp>
+      <p:sp>
+        <p:nvSpPr>
+          <p:cNvPr id="26" name="Rectangle 26"/>
+          <p:cNvSpPr/>
+          <p:nvPr/>
+        </p:nvSpPr>
+        <p:spPr>
+          <a:xfrm>
+            <a:off x="3143250" y="5219700"/>
+            <a:ext cx="2667000" cy="304800"/>
+          </a:xfrm>
+          <a:prstGeom prst="rect">
+            <a:avLst/>
+          </a:prstGeom>
+          <a:solidFill>
+            <a:schemeClr val="accent1"/>
+          </a:solidFill>
+          <a:ln>
+            <a:noFill/>
+          </a:ln>
+        </p:spPr>
+      </p:sp>
+      <p:sp>
+        <p:nvSpPr>
+          <p:cNvPr id="27" name="TextBox 27"/>
+          <p:cNvSpPr txBox="1"/>
+          <p:nvPr/>
+        </p:nvSpPr>
+        <p:spPr>
+          <a:xfrm>
+            <a:off x="3347466" y="5315902"/>
+            <a:ext cx="1049248" cy="205359"/>
+          </a:xfrm>
+          <a:prstGeom prst="rect">
+            <a:avLst/>
+          </a:prstGeom>
+          <a:noFill/>
+          <a:ln>
+            <a:noFill/>
+          </a:ln>
+        </p:spPr>
+        <p:txBody>
+          <a:bodyPr wrap="none" lIns="0" tIns="0" rIns="0" bIns="0" anchor="t" anchorCtr="0">
+            <a:spAutoFit/>
+          </a:bodyPr>
+          <a:lstStyle/>
+          <a:p>
+            <a:pPr algn="l"/>
+            <a:r>
+              <a:rPr lang="zh-CN" sz="1050" b="1" dirty="0">
+                <a:solidFill>
+                  <a:srgbClr val="FFFFFF"/>
+                </a:solidFill>
+                <a:latin typeface="Segoe UI"/>
+                <a:ea typeface="Microsoft YaHei"/>
+                <a:cs typeface="Segoe UI"/>
+              </a:rPr>
+              <a:t>PawBench 能力</a:t>
+            </a:r>
+          </a:p>
+        </p:txBody>
+      </p:sp>
+      <p:sp>
+        <p:nvSpPr>
+          <p:cNvPr id="28" name="Rectangle 28"/>
+          <p:cNvSpPr/>
+          <p:nvPr/>
+        </p:nvSpPr>
+        <p:spPr>
+          <a:xfrm>
+            <a:off x="571500" y="5524500"/>
+            <a:ext cx="2571750" cy="209550"/>
+          </a:xfrm>
+          <a:prstGeom prst="rect">
+            <a:avLst/>
+          </a:prstGeom>
+          <a:solidFill>
+            <a:srgbClr val="F8FAFC"/>
+          </a:solidFill>
+          <a:ln>
+            <a:noFill/>
+          </a:ln>
+        </p:spPr>
+      </p:sp>
+      <p:sp>
+        <p:nvSpPr>
+          <p:cNvPr id="29" name="TextBox 29"/>
+          <p:cNvSpPr txBox="1"/>
+          <p:nvPr/>
+        </p:nvSpPr>
+        <p:spPr>
+          <a:xfrm>
+            <a:off x="680847" y="5571649"/>
+            <a:ext cx="933399" cy="190690"/>
+          </a:xfrm>
+          <a:prstGeom prst="rect">
+            <a:avLst/>
+          </a:prstGeom>
+          <a:noFill/>
+          <a:ln>
+            <a:noFill/>
+          </a:ln>
+        </p:spPr>
+        <p:txBody>
+          <a:bodyPr wrap="none" lIns="0" tIns="0" rIns="0" bIns="0" anchor="t" anchorCtr="0">
+            <a:spAutoFit/>
+          </a:bodyPr>
+          <a:lstStyle/>
+          <a:p>
+            <a:pPr algn="l"/>
+            <a:r>
+              <a:rPr lang="zh-CN" sz="980" dirty="0">
+                <a:solidFill>
+                  <a:schemeClr val="accent5"/>
+                </a:solidFill>
+                <a:latin typeface="Segoe UI"/>
+                <a:ea typeface="Microsoft YaHei"/>
+                <a:cs typeface="Segoe UI"/>
+              </a:rPr>
+              <a:t>内网私有化部署</a:t>
+            </a:r>
+          </a:p>
+        </p:txBody>
+      </p:sp>
+      <p:sp>
+        <p:nvSpPr>
+          <p:cNvPr id="30" name="Rectangle 30"/>
+          <p:cNvSpPr/>
+          <p:nvPr/>
+        </p:nvSpPr>
+        <p:spPr>
+          <a:xfrm>
+            <a:off x="3143250" y="5524500"/>
+            <a:ext cx="2667000" cy="209550"/>
+          </a:xfrm>
+          <a:prstGeom prst="rect">
+            <a:avLst/>
+          </a:prstGeom>
+          <a:solidFill>
+            <a:srgbClr val="F8FAFC"/>
+          </a:solidFill>
+          <a:ln>
+            <a:noFill/>
+          </a:ln>
+        </p:spPr>
+      </p:sp>
+      <p:sp>
+        <p:nvSpPr>
+          <p:cNvPr id="31" name="TextBox 31"/>
+          <p:cNvSpPr txBox="1"/>
+          <p:nvPr/>
+        </p:nvSpPr>
+        <p:spPr>
+          <a:xfrm>
+            <a:off x="3252597" y="5571649"/>
+            <a:ext cx="1974196" cy="190690"/>
+          </a:xfrm>
+          <a:prstGeom prst="rect">
+            <a:avLst/>
+          </a:prstGeom>
+          <a:noFill/>
+          <a:ln>
+            <a:noFill/>
+          </a:ln>
+        </p:spPr>
+        <p:txBody>
+          <a:bodyPr wrap="none" lIns="0" tIns="0" rIns="0" bIns="0" anchor="t" anchorCtr="0">
+            <a:spAutoFit/>
+          </a:bodyPr>
+          <a:lstStyle/>
+          <a:p>
+            <a:pPr algn="l"/>
+            <a:r>
+              <a:rPr lang="zh-CN" sz="980" dirty="0">
+                <a:solidFill>
+                  <a:srgbClr val="10B981"/>
+                </a:solidFill>
+                <a:latin typeface="Segoe UI"/>
+                <a:ea typeface="Microsoft YaHei"/>
+                <a:cs typeface="Segoe UI"/>
+              </a:rPr>
+              <a:t>✓ 开源 + Docker，数据不出内网</a:t>
+            </a:r>
+          </a:p>
+        </p:txBody>
+      </p:sp>
+      <p:sp>
+        <p:nvSpPr>
+          <p:cNvPr id="32" name="Rectangle 32"/>
+          <p:cNvSpPr/>
+          <p:nvPr/>
+        </p:nvSpPr>
+        <p:spPr>
+          <a:xfrm>
+            <a:off x="571500" y="5734050"/>
+            <a:ext cx="2571750" cy="209550"/>
+          </a:xfrm>
+          <a:prstGeom prst="rect">
+            <a:avLst/>
+          </a:prstGeom>
+          <a:solidFill>
+            <a:schemeClr val="lt1"/>
+          </a:solidFill>
+          <a:ln>
+            <a:noFill/>
+          </a:ln>
+        </p:spPr>
+      </p:sp>
+      <p:sp>
+        <p:nvSpPr>
+          <p:cNvPr id="33" name="TextBox 33"/>
+          <p:cNvSpPr txBox="1"/>
+          <p:nvPr/>
+        </p:nvSpPr>
+        <p:spPr>
+          <a:xfrm>
+            <a:off x="680847" y="5781199"/>
+            <a:ext cx="1257393" cy="190690"/>
+          </a:xfrm>
+          <a:prstGeom prst="rect">
+            <a:avLst/>
+          </a:prstGeom>
+          <a:noFill/>
+          <a:ln>
+            <a:noFill/>
+          </a:ln>
+        </p:spPr>
+        <p:txBody>
+          <a:bodyPr wrap="none" lIns="0" tIns="0" rIns="0" bIns="0" anchor="t" anchorCtr="0">
+            <a:spAutoFit/>
+          </a:bodyPr>
+          <a:lstStyle/>
+          <a:p>
+            <a:pPr algn="l"/>
+            <a:r>
+              <a:rPr lang="zh-CN" sz="980" dirty="0">
+                <a:solidFill>
+                  <a:schemeClr val="accent5"/>
+                </a:solidFill>
+                <a:latin typeface="Segoe UI"/>
+                <a:ea typeface="Microsoft YaHei"/>
+                <a:cs typeface="Segoe UI"/>
+              </a:rPr>
+              <a:t>评测完整 Agent 系统</a:t>
+            </a:r>
+          </a:p>
+        </p:txBody>
+      </p:sp>
+      <p:sp>
+        <p:nvSpPr>
+          <p:cNvPr id="34" name="Rectangle 34"/>
+          <p:cNvSpPr/>
+          <p:nvPr/>
+        </p:nvSpPr>
+        <p:spPr>
+          <a:xfrm>
+            <a:off x="3143250" y="5734050"/>
+            <a:ext cx="2667000" cy="209550"/>
+          </a:xfrm>
+          <a:prstGeom prst="rect">
+            <a:avLst/>
+          </a:prstGeom>
+          <a:solidFill>
+            <a:schemeClr val="lt1"/>
+          </a:solidFill>
+          <a:ln>
+            <a:noFill/>
+          </a:ln>
+        </p:spPr>
+      </p:sp>
+      <p:sp>
+        <p:nvSpPr>
+          <p:cNvPr id="35" name="TextBox 35"/>
+          <p:cNvSpPr txBox="1"/>
+          <p:nvPr/>
+        </p:nvSpPr>
+        <p:spPr>
+          <a:xfrm>
+            <a:off x="3252597" y="5781199"/>
+            <a:ext cx="2096486" cy="190690"/>
+          </a:xfrm>
+          <a:prstGeom prst="rect">
+            <a:avLst/>
+          </a:prstGeom>
+          <a:noFill/>
+          <a:ln>
+            <a:noFill/>
+          </a:ln>
+        </p:spPr>
+        <p:txBody>
+          <a:bodyPr wrap="none" lIns="0" tIns="0" rIns="0" bIns="0" anchor="t" anchorCtr="0">
+            <a:spAutoFit/>
+          </a:bodyPr>
+          <a:lstStyle/>
+          <a:p>
+            <a:pPr algn="l"/>
+            <a:r>
+              <a:rPr lang="zh-CN" sz="980" dirty="0">
+                <a:solidFill>
+                  <a:srgbClr val="10B981"/>
+                </a:solidFill>
+                <a:latin typeface="Segoe UI"/>
+                <a:ea typeface="Microsoft YaHei"/>
+                <a:cs typeface="Segoe UI"/>
+              </a:rPr>
+              <a:t>✓ Model × Harness × Task 全覆盖</a:t>
+            </a:r>
+          </a:p>
+        </p:txBody>
+      </p:sp>
+      <p:sp>
+        <p:nvSpPr>
+          <p:cNvPr id="36" name="Rectangle 36"/>
+          <p:cNvSpPr/>
+          <p:nvPr/>
+        </p:nvSpPr>
+        <p:spPr>
+          <a:xfrm>
+            <a:off x="571500" y="5943600"/>
+            <a:ext cx="2571750" cy="209550"/>
+          </a:xfrm>
+          <a:prstGeom prst="rect">
+            <a:avLst/>
+          </a:prstGeom>
+          <a:solidFill>
+            <a:srgbClr val="F8FAFC"/>
+          </a:solidFill>
+          <a:ln>
+            <a:noFill/>
+          </a:ln>
+        </p:spPr>
+      </p:sp>
+      <p:sp>
+        <p:nvSpPr>
+          <p:cNvPr id="37" name="TextBox 37"/>
+          <p:cNvSpPr txBox="1"/>
+          <p:nvPr/>
+        </p:nvSpPr>
+        <p:spPr>
+          <a:xfrm>
+            <a:off x="680847" y="5990749"/>
+            <a:ext cx="933399" cy="190690"/>
+          </a:xfrm>
+          <a:prstGeom prst="rect">
+            <a:avLst/>
+          </a:prstGeom>
+          <a:noFill/>
+          <a:ln>
+            <a:noFill/>
+          </a:ln>
+        </p:spPr>
+        <p:txBody>
+          <a:bodyPr wrap="none" lIns="0" tIns="0" rIns="0" bIns="0" anchor="t" anchorCtr="0">
+            <a:spAutoFit/>
+          </a:bodyPr>
+          <a:lstStyle/>
+          <a:p>
+            <a:pPr algn="l"/>
+            <a:r>
+              <a:rPr lang="zh-CN" sz="980" dirty="0">
+                <a:solidFill>
+                  <a:schemeClr val="accent5"/>
+                </a:solidFill>
+                <a:latin typeface="Segoe UI"/>
+                <a:ea typeface="Microsoft YaHei"/>
+                <a:cs typeface="Segoe UI"/>
+              </a:rPr>
+              <a:t>自定义任务扩展</a:t>
+            </a:r>
+          </a:p>
+        </p:txBody>
+      </p:sp>
+      <p:sp>
+        <p:nvSpPr>
+          <p:cNvPr id="38" name="Rectangle 38"/>
+          <p:cNvSpPr/>
+          <p:nvPr/>
+        </p:nvSpPr>
+        <p:spPr>
+          <a:xfrm>
+            <a:off x="3143250" y="5943600"/>
+            <a:ext cx="2667000" cy="209550"/>
+          </a:xfrm>
+          <a:prstGeom prst="rect">
+            <a:avLst/>
+          </a:prstGeom>
+          <a:solidFill>
+            <a:srgbClr val="F8FAFC"/>
+          </a:solidFill>
+          <a:ln>
+            <a:noFill/>
+          </a:ln>
+        </p:spPr>
+      </p:sp>
+      <p:sp>
+        <p:nvSpPr>
+          <p:cNvPr id="39" name="TextBox 39"/>
+          <p:cNvSpPr txBox="1"/>
+          <p:nvPr/>
+        </p:nvSpPr>
+        <p:spPr>
+          <a:xfrm>
+            <a:off x="3252597" y="5990749"/>
+            <a:ext cx="1980315" cy="190690"/>
+          </a:xfrm>
+          <a:prstGeom prst="rect">
+            <a:avLst/>
+          </a:prstGeom>
+          <a:noFill/>
+          <a:ln>
+            <a:noFill/>
+          </a:ln>
+        </p:spPr>
+        <p:txBody>
+          <a:bodyPr wrap="none" lIns="0" tIns="0" rIns="0" bIns="0" anchor="t" anchorCtr="0">
+            <a:spAutoFit/>
+          </a:bodyPr>
+          <a:lstStyle/>
+          <a:p>
+            <a:pPr algn="l"/>
+            <a:r>
+              <a:rPr lang="zh-CN" sz="980" dirty="0">
+                <a:solidFill>
+                  <a:srgbClr val="10B981"/>
+                </a:solidFill>
+                <a:latin typeface="Segoe UI"/>
+                <a:ea typeface="Microsoft YaHei"/>
+                <a:cs typeface="Segoe UI"/>
+              </a:rPr>
+              <a:t>✓ OpenJudge 生态，灵活可扩展</a:t>
+            </a:r>
+          </a:p>
+        </p:txBody>
+      </p:sp>
+      <p:sp>
+        <p:nvSpPr>
+          <p:cNvPr id="40" name="Rectangle 40"/>
+          <p:cNvSpPr/>
+          <p:nvPr/>
+        </p:nvSpPr>
+        <p:spPr>
+          <a:xfrm>
+            <a:off x="571500" y="6153150"/>
+            <a:ext cx="2571750" cy="209550"/>
+          </a:xfrm>
+          <a:prstGeom prst="rect">
+            <a:avLst/>
+          </a:prstGeom>
+          <a:solidFill>
+            <a:schemeClr val="lt1"/>
+          </a:solidFill>
+          <a:ln>
+            <a:noFill/>
+          </a:ln>
+        </p:spPr>
+      </p:sp>
+      <p:sp>
+        <p:nvSpPr>
+          <p:cNvPr id="41" name="TextBox 41"/>
+          <p:cNvSpPr txBox="1"/>
+          <p:nvPr/>
+        </p:nvSpPr>
+        <p:spPr>
+          <a:xfrm>
+            <a:off x="680847" y="6200299"/>
+            <a:ext cx="850459" cy="190690"/>
+          </a:xfrm>
+          <a:prstGeom prst="rect">
+            <a:avLst/>
+          </a:prstGeom>
+          <a:noFill/>
+          <a:ln>
+            <a:noFill/>
+          </a:ln>
+        </p:spPr>
+        <p:txBody>
+          <a:bodyPr wrap="none" lIns="0" tIns="0" rIns="0" bIns="0" anchor="t" anchorCtr="0">
+            <a:spAutoFit/>
+          </a:bodyPr>
+          <a:lstStyle/>
+          <a:p>
+            <a:pPr algn="l"/>
+            <a:r>
+              <a:rPr lang="zh-CN" sz="980" dirty="0">
+                <a:solidFill>
+                  <a:schemeClr val="accent5"/>
+                </a:solidFill>
+                <a:latin typeface="Segoe UI"/>
+                <a:ea typeface="Microsoft YaHei"/>
+                <a:cs typeface="Segoe UI"/>
+              </a:rPr>
+              <a:t>Skill 能力评估</a:t>
+            </a:r>
+          </a:p>
+        </p:txBody>
+      </p:sp>
+      <p:sp>
+        <p:nvSpPr>
+          <p:cNvPr id="42" name="Rectangle 42"/>
+          <p:cNvSpPr/>
+          <p:nvPr/>
+        </p:nvSpPr>
+        <p:spPr>
+          <a:xfrm>
+            <a:off x="3143250" y="6153150"/>
+            <a:ext cx="2667000" cy="209550"/>
+          </a:xfrm>
+          <a:prstGeom prst="rect">
+            <a:avLst/>
+          </a:prstGeom>
+          <a:solidFill>
+            <a:schemeClr val="lt1"/>
+          </a:solidFill>
+          <a:ln>
+            <a:noFill/>
+          </a:ln>
+        </p:spPr>
+      </p:sp>
+      <p:sp>
+        <p:nvSpPr>
+          <p:cNvPr id="43" name="TextBox 43"/>
+          <p:cNvSpPr txBox="1"/>
+          <p:nvPr/>
+        </p:nvSpPr>
+        <p:spPr>
+          <a:xfrm>
+            <a:off x="3252597" y="6200299"/>
+            <a:ext cx="2692486" cy="190690"/>
+          </a:xfrm>
+          <a:prstGeom prst="rect">
+            <a:avLst/>
+          </a:prstGeom>
+          <a:noFill/>
+          <a:ln>
+            <a:noFill/>
+          </a:ln>
+        </p:spPr>
+        <p:txBody>
+          <a:bodyPr wrap="none" lIns="0" tIns="0" rIns="0" bIns="0" anchor="t" anchorCtr="0">
+            <a:spAutoFit/>
+          </a:bodyPr>
+          <a:lstStyle/>
+          <a:p>
+            <a:pPr algn="l"/>
+            <a:r>
+              <a:rPr lang="zh-CN" sz="980" dirty="0">
+                <a:solidFill>
+                  <a:srgbClr val="10B981"/>
+                </a:solidFill>
+                <a:latin typeface="Segoe UI"/>
+                <a:ea typeface="Microsoft YaHei"/>
+                <a:cs typeface="Segoe UI"/>
+              </a:rPr>
+              <a:t>✓ 7 大原子能力含 Skill_Use，15 道专项任务</a:t>
+            </a:r>
+          </a:p>
+        </p:txBody>
+      </p:sp>
+      <p:sp>
+        <p:nvSpPr>
+          <p:cNvPr id="44" name="Rectangle 44"/>
+          <p:cNvSpPr/>
+          <p:nvPr/>
+        </p:nvSpPr>
+        <p:spPr>
+          <a:xfrm>
+            <a:off x="571500" y="6362700"/>
+            <a:ext cx="2571750" cy="209550"/>
+          </a:xfrm>
+          <a:prstGeom prst="rect">
+            <a:avLst/>
+          </a:prstGeom>
+          <a:solidFill>
+            <a:srgbClr val="F8FAFC"/>
+          </a:solidFill>
+          <a:ln>
+            <a:noFill/>
+          </a:ln>
+        </p:spPr>
+      </p:sp>
+      <p:sp>
+        <p:nvSpPr>
+          <p:cNvPr id="45" name="TextBox 45"/>
+          <p:cNvSpPr txBox="1"/>
+          <p:nvPr/>
+        </p:nvSpPr>
+        <p:spPr>
+          <a:xfrm>
+            <a:off x="680847" y="6409849"/>
+            <a:ext cx="537616" cy="190690"/>
+          </a:xfrm>
+          <a:prstGeom prst="rect">
+            <a:avLst/>
+          </a:prstGeom>
+          <a:noFill/>
+          <a:ln>
+            <a:noFill/>
+          </a:ln>
+        </p:spPr>
+        <p:txBody>
+          <a:bodyPr wrap="none" lIns="0" tIns="0" rIns="0" bIns="0" anchor="t" anchorCtr="0">
+            <a:spAutoFit/>
+          </a:bodyPr>
+          <a:lstStyle/>
+          <a:p>
+            <a:pPr algn="l"/>
+            <a:r>
+              <a:rPr lang="zh-CN" sz="980" dirty="0">
+                <a:solidFill>
+                  <a:schemeClr val="accent5"/>
+                </a:solidFill>
+                <a:latin typeface="Segoe UI"/>
+                <a:ea typeface="Microsoft YaHei"/>
+                <a:cs typeface="Segoe UI"/>
+              </a:rPr>
+              <a:t>量化回归</a:t>
+            </a:r>
+          </a:p>
+        </p:txBody>
+      </p:sp>
+      <p:sp>
+        <p:nvSpPr>
+          <p:cNvPr id="46" name="Rectangle 46"/>
+          <p:cNvSpPr/>
+          <p:nvPr/>
+        </p:nvSpPr>
+        <p:spPr>
+          <a:xfrm>
+            <a:off x="3143250" y="6362700"/>
+            <a:ext cx="2667000" cy="209550"/>
+          </a:xfrm>
+          <a:prstGeom prst="rect">
+            <a:avLst/>
+          </a:prstGeom>
+          <a:solidFill>
+            <a:srgbClr val="F8FAFC"/>
+          </a:solidFill>
+          <a:ln>
+            <a:noFill/>
+          </a:ln>
+        </p:spPr>
+      </p:sp>
+      <p:sp>
+        <p:nvSpPr>
+          <p:cNvPr id="47" name="TextBox 47"/>
+          <p:cNvSpPr txBox="1"/>
+          <p:nvPr/>
+        </p:nvSpPr>
+        <p:spPr>
+          <a:xfrm>
+            <a:off x="3252597" y="6409849"/>
+            <a:ext cx="2323866" cy="190690"/>
+          </a:xfrm>
+          <a:prstGeom prst="rect">
+            <a:avLst/>
+          </a:prstGeom>
+          <a:noFill/>
+          <a:ln>
+            <a:noFill/>
+          </a:ln>
+        </p:spPr>
+        <p:txBody>
+          <a:bodyPr wrap="none" lIns="0" tIns="0" rIns="0" bIns="0" anchor="t" anchorCtr="0">
+            <a:spAutoFit/>
+          </a:bodyPr>
+          <a:lstStyle/>
+          <a:p>
+            <a:pPr algn="l"/>
+            <a:r>
+              <a:rPr lang="zh-CN" sz="980" dirty="0">
+                <a:solidFill>
+                  <a:srgbClr val="10B981"/>
+                </a:solidFill>
+                <a:latin typeface="Segoe UI"/>
+                <a:ea typeface="Microsoft YaHei"/>
+                <a:cs typeface="Segoe UI"/>
+              </a:rPr>
+              <a:t>✓ 标准化任务 + 自动评分，CI 可集成</a:t>
+            </a:r>
+          </a:p>
+        </p:txBody>
+      </p:sp>
+      <p:sp>
+        <p:nvSpPr>
+          <p:cNvPr id="48" name="TextBox 48"/>
+          <p:cNvSpPr txBox="1"/>
+          <p:nvPr/>
+        </p:nvSpPr>
+        <p:spPr>
+          <a:xfrm>
+            <a:off x="6278118" y="1203008"/>
+            <a:ext cx="949681" cy="322707"/>
+          </a:xfrm>
+          <a:prstGeom prst="rect">
+            <a:avLst/>
+          </a:prstGeom>
+          <a:noFill/>
+          <a:ln>
+            <a:noFill/>
+          </a:ln>
+        </p:spPr>
+        <p:txBody>
+          <a:bodyPr wrap="none" lIns="0" tIns="0" rIns="0" bIns="0" anchor="t" anchorCtr="0">
+            <a:spAutoFit/>
+          </a:bodyPr>
+          <a:lstStyle/>
+          <a:p>
+            <a:pPr algn="l"/>
+            <a:r>
+              <a:rPr lang="zh-CN" sz="1650" b="1" dirty="0">
+                <a:solidFill>
+                  <a:schemeClr val="accent1"/>
+                </a:solidFill>
+                <a:latin typeface="Segoe UI"/>
+                <a:ea typeface="Microsoft YaHei"/>
+                <a:cs typeface="Segoe UI"/>
+              </a:rPr>
+              <a:t>集成方式</a:t>
+            </a:r>
+          </a:p>
+        </p:txBody>
+      </p:sp>
+      <p:sp>
+        <p:nvSpPr>
+          <p:cNvPr id="49" name="Rectangle 49"/>
+          <p:cNvSpPr/>
+          <p:nvPr/>
+        </p:nvSpPr>
+        <p:spPr>
+          <a:xfrm>
+            <a:off x="6286500" y="1619250"/>
+            <a:ext cx="5334000" cy="1095375"/>
+          </a:xfrm>
+          <a:prstGeom prst="rect">
+            <a:avLst/>
+          </a:prstGeom>
+          <a:solidFill>
+            <a:schemeClr val="lt2"/>
+          </a:solidFill>
+          <a:ln>
+            <a:noFill/>
+          </a:ln>
+        </p:spPr>
+      </p:sp>
+      <p:sp>
+        <p:nvSpPr>
+          <p:cNvPr id="50" name="Rectangle 50"/>
+          <p:cNvSpPr/>
+          <p:nvPr/>
+        </p:nvSpPr>
+        <p:spPr>
+          <a:xfrm>
+            <a:off x="6286500" y="1619250"/>
+            <a:ext cx="57150" cy="1095375"/>
+          </a:xfrm>
+          <a:prstGeom prst="rect">
+            <a:avLst/>
+          </a:prstGeom>
+          <a:solidFill>
+            <a:schemeClr val="accent1"/>
+          </a:solidFill>
+          <a:ln>
+            <a:noFill/>
+          </a:ln>
+        </p:spPr>
+      </p:sp>
+      <p:sp>
+        <p:nvSpPr>
+          <p:cNvPr id="51" name="TextBox 51"/>
+          <p:cNvSpPr txBox="1"/>
+          <p:nvPr/>
+        </p:nvSpPr>
+        <p:spPr>
+          <a:xfrm>
+            <a:off x="6564630" y="1743075"/>
+            <a:ext cx="863346" cy="293370"/>
+          </a:xfrm>
+          <a:prstGeom prst="rect">
+            <a:avLst/>
+          </a:prstGeom>
+          <a:noFill/>
+          <a:ln>
+            <a:noFill/>
+          </a:ln>
+        </p:spPr>
+        <p:txBody>
+          <a:bodyPr wrap="none" lIns="0" tIns="0" rIns="0" bIns="0" anchor="t" anchorCtr="0">
+            <a:spAutoFit/>
+          </a:bodyPr>
+          <a:lstStyle/>
+          <a:p>
+            <a:pPr algn="l"/>
+            <a:r>
+              <a:rPr lang="zh-CN" sz="1500" b="1" dirty="0">
+                <a:solidFill>
+                  <a:schemeClr val="accent1"/>
+                </a:solidFill>
+                <a:latin typeface="Segoe UI"/>
+                <a:ea typeface="Microsoft YaHei"/>
+                <a:cs typeface="Segoe UI"/>
+              </a:rPr>
+              <a:t>环境部署</a:t>
+            </a:r>
+          </a:p>
+        </p:txBody>
+      </p:sp>
+      <p:sp>
+        <p:nvSpPr>
+          <p:cNvPr id="52" name="TextBox 52"/>
+          <p:cNvSpPr txBox="1"/>
+          <p:nvPr/>
+        </p:nvSpPr>
+        <p:spPr>
+          <a:xfrm>
+            <a:off x="6566154" y="2061210"/>
+            <a:ext cx="4428063" cy="234696"/>
+          </a:xfrm>
+          <a:prstGeom prst="rect">
+            <a:avLst/>
+          </a:prstGeom>
+          <a:noFill/>
+          <a:ln>
+            <a:noFill/>
+          </a:ln>
+        </p:spPr>
+        <p:txBody>
+          <a:bodyPr wrap="none" lIns="0" tIns="0" rIns="0" bIns="0" anchor="t" anchorCtr="0">
+            <a:spAutoFit/>
+          </a:bodyPr>
+          <a:lstStyle/>
+          <a:p>
+            <a:pPr algn="l"/>
+            <a:r>
+              <a:rPr lang="zh-CN" sz="1200" dirty="0">
+                <a:solidFill>
+                  <a:schemeClr val="dk1"/>
+                </a:solidFill>
+                <a:latin typeface="Segoe UI"/>
+                <a:ea typeface="Microsoft YaHei"/>
+                <a:cs typeface="Segoe UI"/>
+              </a:rPr>
+              <a:t>Docker 一键部署，拉取 PawBench 仓库，配置模型 API 密钥</a:t>
+            </a:r>
+          </a:p>
+        </p:txBody>
+      </p:sp>
+      <p:sp>
+        <p:nvSpPr>
+          <p:cNvPr id="53" name="TextBox 53"/>
+          <p:cNvSpPr txBox="1"/>
+          <p:nvPr/>
+        </p:nvSpPr>
+        <p:spPr>
+          <a:xfrm>
+            <a:off x="6566154" y="2299335"/>
+            <a:ext cx="4252722" cy="234696"/>
+          </a:xfrm>
+          <a:prstGeom prst="rect">
+            <a:avLst/>
+          </a:prstGeom>
+          <a:noFill/>
+          <a:ln>
+            <a:noFill/>
+          </a:ln>
+        </p:spPr>
+        <p:txBody>
+          <a:bodyPr wrap="none" lIns="0" tIns="0" rIns="0" bIns="0" anchor="t" anchorCtr="0">
+            <a:spAutoFit/>
+          </a:bodyPr>
+          <a:lstStyle/>
+          <a:p>
+            <a:pPr algn="l"/>
+            <a:r>
+              <a:rPr lang="zh-CN" sz="1200" dirty="0">
+                <a:solidFill>
+                  <a:schemeClr val="accent5"/>
+                </a:solidFill>
+                <a:latin typeface="Segoe UI"/>
+                <a:ea typeface="Microsoft YaHei"/>
+                <a:cs typeface="Segoe UI"/>
+              </a:rPr>
+              <a:t>完成后即可跑通全量 150 道标准化任务，获得基线评测结果</a:t>
+            </a:r>
+          </a:p>
+        </p:txBody>
+      </p:sp>
+      <p:sp>
+        <p:nvSpPr>
+          <p:cNvPr id="54" name="Rectangle 54"/>
+          <p:cNvSpPr/>
+          <p:nvPr/>
+        </p:nvSpPr>
+        <p:spPr>
+          <a:xfrm>
+            <a:off x="6286500" y="2857500"/>
+            <a:ext cx="5334000" cy="1095375"/>
+          </a:xfrm>
+          <a:prstGeom prst="rect">
+            <a:avLst/>
+          </a:prstGeom>
+          <a:solidFill>
+            <a:schemeClr val="lt2"/>
+          </a:solidFill>
+          <a:ln>
+            <a:noFill/>
+          </a:ln>
+        </p:spPr>
+      </p:sp>
+      <p:sp>
+        <p:nvSpPr>
+          <p:cNvPr id="55" name="Rectangle 55"/>
+          <p:cNvSpPr/>
+          <p:nvPr/>
+        </p:nvSpPr>
+        <p:spPr>
+          <a:xfrm>
+            <a:off x="6286500" y="2857500"/>
+            <a:ext cx="57150" cy="1095375"/>
           </a:xfrm>
           <a:prstGeom prst="rect">
             <a:avLst/>
@@ -13814,14 +15226,134 @@
       </p:sp>
       <p:sp>
         <p:nvSpPr>
-          <p:cNvPr id="5" name="Rectangle 5"/>
+          <p:cNvPr id="56" name="TextBox 56"/>
+          <p:cNvSpPr txBox="1"/>
+          <p:nvPr/>
+        </p:nvSpPr>
+        <p:spPr>
+          <a:xfrm>
+            <a:off x="6564630" y="2981325"/>
+            <a:ext cx="863346" cy="293370"/>
+          </a:xfrm>
+          <a:prstGeom prst="rect">
+            <a:avLst/>
+          </a:prstGeom>
+          <a:noFill/>
+          <a:ln>
+            <a:noFill/>
+          </a:ln>
+        </p:spPr>
+        <p:txBody>
+          <a:bodyPr wrap="none" lIns="0" tIns="0" rIns="0" bIns="0" anchor="t" anchorCtr="0">
+            <a:spAutoFit/>
+          </a:bodyPr>
+          <a:lstStyle/>
+          <a:p>
+            <a:pPr algn="l"/>
+            <a:r>
+              <a:rPr lang="zh-CN" sz="1500" b="1" dirty="0">
+                <a:solidFill>
+                  <a:schemeClr val="accent1"/>
+                </a:solidFill>
+                <a:latin typeface="Segoe UI"/>
+                <a:ea typeface="Microsoft YaHei"/>
+                <a:cs typeface="Segoe UI"/>
+              </a:rPr>
+              <a:t>内网适配</a:t>
+            </a:r>
+          </a:p>
+        </p:txBody>
+      </p:sp>
+      <p:sp>
+        <p:nvSpPr>
+          <p:cNvPr id="57" name="TextBox 57"/>
+          <p:cNvSpPr txBox="1"/>
+          <p:nvPr/>
+        </p:nvSpPr>
+        <p:spPr>
+          <a:xfrm>
+            <a:off x="6566154" y="3299460"/>
+            <a:ext cx="4212336" cy="234696"/>
+          </a:xfrm>
+          <a:prstGeom prst="rect">
+            <a:avLst/>
+          </a:prstGeom>
+          <a:noFill/>
+          <a:ln>
+            <a:noFill/>
+          </a:ln>
+        </p:spPr>
+        <p:txBody>
+          <a:bodyPr wrap="none" lIns="0" tIns="0" rIns="0" bIns="0" anchor="t" anchorCtr="0">
+            <a:spAutoFit/>
+          </a:bodyPr>
+          <a:lstStyle/>
+          <a:p>
+            <a:pPr algn="l"/>
+            <a:r>
+              <a:rPr lang="zh-CN" sz="1200" dirty="0">
+                <a:solidFill>
+                  <a:schemeClr val="dk1"/>
+                </a:solidFill>
+                <a:latin typeface="Segoe UI"/>
+                <a:ea typeface="Microsoft YaHei"/>
+                <a:cs typeface="Segoe UI"/>
+              </a:rPr>
+              <a:t>含公网依赖的任务改造为离线可运行，自定义业务相关任务</a:t>
+            </a:r>
+          </a:p>
+        </p:txBody>
+      </p:sp>
+      <p:sp>
+        <p:nvSpPr>
+          <p:cNvPr id="58" name="TextBox 58"/>
+          <p:cNvSpPr txBox="1"/>
+          <p:nvPr/>
+        </p:nvSpPr>
+        <p:spPr>
+          <a:xfrm>
+            <a:off x="6566154" y="3537585"/>
+            <a:ext cx="4686833" cy="234696"/>
+          </a:xfrm>
+          <a:prstGeom prst="rect">
+            <a:avLst/>
+          </a:prstGeom>
+          <a:noFill/>
+          <a:ln>
+            <a:noFill/>
+          </a:ln>
+        </p:spPr>
+        <p:txBody>
+          <a:bodyPr wrap="none" lIns="0" tIns="0" rIns="0" bIns="0" anchor="t" anchorCtr="0">
+            <a:spAutoFit/>
+          </a:bodyPr>
+          <a:lstStyle/>
+          <a:p>
+            <a:pPr algn="l"/>
+            <a:r>
+              <a:rPr lang="zh-CN" sz="1200" dirty="0">
+                <a:solidFill>
+                  <a:schemeClr val="accent5"/>
+                </a:solidFill>
+                <a:latin typeface="Segoe UI"/>
+                <a:ea typeface="Microsoft YaHei"/>
+                <a:cs typeface="Segoe UI"/>
+              </a:rPr>
+              <a:t>支持基于 OpenJudge 自定义 Task / Judge / Runner，灵活扩展</a:t>
+            </a:r>
+          </a:p>
+        </p:txBody>
+      </p:sp>
+      <p:sp>
+        <p:nvSpPr>
+          <p:cNvPr id="59" name="Rectangle 59"/>
           <p:cNvSpPr/>
           <p:nvPr/>
         </p:nvSpPr>
         <p:spPr>
           <a:xfrm>
-            <a:off x="571500" y="1238250"/>
-            <a:ext cx="3524250" cy="2952750"/>
+            <a:off x="6286500" y="4095750"/>
+            <a:ext cx="5334000" cy="1095375"/>
           </a:xfrm>
           <a:prstGeom prst="rect">
             <a:avLst/>
@@ -13836,14 +15368,409 @@
       </p:sp>
       <p:sp>
         <p:nvSpPr>
-          <p:cNvPr id="6" name="Rectangle 6"/>
+          <p:cNvPr id="60" name="Rectangle 60"/>
           <p:cNvSpPr/>
           <p:nvPr/>
         </p:nvSpPr>
         <p:spPr>
           <a:xfrm>
-            <a:off x="571500" y="1238250"/>
-            <a:ext cx="3524250" cy="38100"/>
+            <a:off x="6286500" y="4095750"/>
+            <a:ext cx="57150" cy="1095375"/>
+          </a:xfrm>
+          <a:prstGeom prst="rect">
+            <a:avLst/>
+          </a:prstGeom>
+          <a:solidFill>
+            <a:srgbClr val="10B981"/>
+          </a:solidFill>
+          <a:ln>
+            <a:noFill/>
+          </a:ln>
+        </p:spPr>
+      </p:sp>
+      <p:sp>
+        <p:nvSpPr>
+          <p:cNvPr id="61" name="TextBox 61"/>
+          <p:cNvSpPr txBox="1"/>
+          <p:nvPr/>
+        </p:nvSpPr>
+        <p:spPr>
+          <a:xfrm>
+            <a:off x="6564630" y="4219575"/>
+            <a:ext cx="863346" cy="293370"/>
+          </a:xfrm>
+          <a:prstGeom prst="rect">
+            <a:avLst/>
+          </a:prstGeom>
+          <a:noFill/>
+          <a:ln>
+            <a:noFill/>
+          </a:ln>
+        </p:spPr>
+        <p:txBody>
+          <a:bodyPr wrap="none" lIns="0" tIns="0" rIns="0" bIns="0" anchor="t" anchorCtr="0">
+            <a:spAutoFit/>
+          </a:bodyPr>
+          <a:lstStyle/>
+          <a:p>
+            <a:pPr algn="l"/>
+            <a:r>
+              <a:rPr lang="zh-CN" sz="1500" b="1" dirty="0">
+                <a:solidFill>
+                  <a:schemeClr val="accent1"/>
+                </a:solidFill>
+                <a:latin typeface="Segoe UI"/>
+                <a:ea typeface="Microsoft YaHei"/>
+                <a:cs typeface="Segoe UI"/>
+              </a:rPr>
+              <a:t>持续迭代</a:t>
+            </a:r>
+          </a:p>
+        </p:txBody>
+      </p:sp>
+      <p:sp>
+        <p:nvSpPr>
+          <p:cNvPr id="62" name="TextBox 62"/>
+          <p:cNvSpPr txBox="1"/>
+          <p:nvPr/>
+        </p:nvSpPr>
+        <p:spPr>
+          <a:xfrm>
+            <a:off x="6566154" y="4537710"/>
+            <a:ext cx="3336828" cy="234696"/>
+          </a:xfrm>
+          <a:prstGeom prst="rect">
+            <a:avLst/>
+          </a:prstGeom>
+          <a:noFill/>
+          <a:ln>
+            <a:noFill/>
+          </a:ln>
+        </p:spPr>
+        <p:txBody>
+          <a:bodyPr wrap="none" lIns="0" tIns="0" rIns="0" bIns="0" anchor="t" anchorCtr="0">
+            <a:spAutoFit/>
+          </a:bodyPr>
+          <a:lstStyle/>
+          <a:p>
+            <a:pPr algn="l"/>
+            <a:r>
+              <a:rPr lang="zh-CN" sz="1200" dirty="0">
+                <a:solidFill>
+                  <a:schemeClr val="dk1"/>
+                </a:solidFill>
+                <a:latin typeface="Segoe UI"/>
+                <a:ea typeface="Microsoft YaHei"/>
+                <a:cs typeface="Segoe UI"/>
+              </a:rPr>
+              <a:t>嵌入 Agent 开发迭代流程，每次发布自动评测</a:t>
+            </a:r>
+          </a:p>
+        </p:txBody>
+      </p:sp>
+      <p:sp>
+        <p:nvSpPr>
+          <p:cNvPr id="63" name="TextBox 63"/>
+          <p:cNvSpPr txBox="1"/>
+          <p:nvPr/>
+        </p:nvSpPr>
+        <p:spPr>
+          <a:xfrm>
+            <a:off x="6566154" y="4775835"/>
+            <a:ext cx="4212336" cy="234696"/>
+          </a:xfrm>
+          <a:prstGeom prst="rect">
+            <a:avLst/>
+          </a:prstGeom>
+          <a:noFill/>
+          <a:ln>
+            <a:noFill/>
+          </a:ln>
+        </p:spPr>
+        <p:txBody>
+          <a:bodyPr wrap="none" lIns="0" tIns="0" rIns="0" bIns="0" anchor="t" anchorCtr="0">
+            <a:spAutoFit/>
+          </a:bodyPr>
+          <a:lstStyle/>
+          <a:p>
+            <a:pPr algn="l"/>
+            <a:r>
+              <a:rPr lang="zh-CN" sz="1200" dirty="0">
+                <a:solidFill>
+                  <a:schemeClr val="accent5"/>
+                </a:solidFill>
+                <a:latin typeface="Segoe UI"/>
+                <a:ea typeface="Microsoft YaHei"/>
+                <a:cs typeface="Segoe UI"/>
+              </a:rPr>
+              <a:t>利用五维标签切片分析，精准定位能力变化，推动持续改进</a:t>
+            </a:r>
+          </a:p>
+        </p:txBody>
+      </p:sp>
+      <p:sp>
+        <p:nvSpPr>
+          <p:cNvPr id="64" name="Rectangle 64"/>
+          <p:cNvSpPr/>
+          <p:nvPr/>
+        </p:nvSpPr>
+        <p:spPr>
+          <a:xfrm>
+            <a:off x="6286500" y="5429250"/>
+            <a:ext cx="5334000" cy="762000"/>
+          </a:xfrm>
+          <a:prstGeom prst="rect">
+            <a:avLst/>
+          </a:prstGeom>
+          <a:solidFill>
+            <a:srgbClr val="F8FAFC"/>
+          </a:solidFill>
+          <a:ln>
+            <a:noFill/>
+          </a:ln>
+        </p:spPr>
+      </p:sp>
+      <p:sp>
+        <p:nvSpPr>
+          <p:cNvPr id="65" name="Rectangle 65"/>
+          <p:cNvSpPr/>
+          <p:nvPr/>
+        </p:nvSpPr>
+        <p:spPr>
+          <a:xfrm>
+            <a:off x="6286500" y="5429250"/>
+            <a:ext cx="5334000" cy="19050"/>
+          </a:xfrm>
+          <a:prstGeom prst="rect">
+            <a:avLst/>
+          </a:prstGeom>
+          <a:solidFill>
+            <a:schemeClr val="accent4"/>
+          </a:solidFill>
+          <a:ln>
+            <a:noFill/>
+          </a:ln>
+        </p:spPr>
+      </p:sp>
+      <p:sp>
+        <p:nvSpPr>
+          <p:cNvPr id="66" name="TextBox 66"/>
+          <p:cNvSpPr txBox="1"/>
+          <p:nvPr/>
+        </p:nvSpPr>
+        <p:spPr>
+          <a:xfrm>
+            <a:off x="6566535" y="5574506"/>
+            <a:ext cx="644682" cy="220028"/>
+          </a:xfrm>
+          <a:prstGeom prst="rect">
+            <a:avLst/>
+          </a:prstGeom>
+          <a:noFill/>
+          <a:ln>
+            <a:noFill/>
+          </a:ln>
+        </p:spPr>
+        <p:txBody>
+          <a:bodyPr wrap="none" lIns="0" tIns="0" rIns="0" bIns="0" anchor="t" anchorCtr="0">
+            <a:spAutoFit/>
+          </a:bodyPr>
+          <a:lstStyle/>
+          <a:p>
+            <a:pPr algn="l"/>
+            <a:r>
+              <a:rPr lang="zh-CN" sz="1120" b="1" dirty="0">
+                <a:solidFill>
+                  <a:schemeClr val="accent1"/>
+                </a:solidFill>
+                <a:latin typeface="Segoe UI"/>
+                <a:ea typeface="Microsoft YaHei"/>
+                <a:cs typeface="Segoe UI"/>
+              </a:rPr>
+              <a:t>技术特点</a:t>
+            </a:r>
+          </a:p>
+        </p:txBody>
+      </p:sp>
+      <p:sp>
+        <p:nvSpPr>
+          <p:cNvPr id="67" name="TextBox 67"/>
+          <p:cNvSpPr txBox="1"/>
+          <p:nvPr/>
+        </p:nvSpPr>
+        <p:spPr>
+          <a:xfrm>
+            <a:off x="6566916" y="5811202"/>
+            <a:ext cx="4617110" cy="205359"/>
+          </a:xfrm>
+          <a:prstGeom prst="rect">
+            <a:avLst/>
+          </a:prstGeom>
+          <a:noFill/>
+          <a:ln>
+            <a:noFill/>
+          </a:ln>
+        </p:spPr>
+        <p:txBody>
+          <a:bodyPr wrap="none" lIns="0" tIns="0" rIns="0" bIns="0" anchor="t" anchorCtr="0">
+            <a:spAutoFit/>
+          </a:bodyPr>
+          <a:lstStyle/>
+          <a:p>
+            <a:pPr algn="l"/>
+            <a:r>
+              <a:rPr lang="zh-CN" sz="1050" dirty="0">
+                <a:solidFill>
+                  <a:schemeClr val="accent5"/>
+                </a:solidFill>
+                <a:latin typeface="Segoe UI"/>
+                <a:ea typeface="Microsoft YaHei"/>
+                <a:cs typeface="Segoe UI"/>
+              </a:rPr>
+              <a:t>支持 OpenAI 兼容 API 和私有化模型接入，纯 Python 实现，无专有依赖</a:t>
+            </a:r>
+          </a:p>
+        </p:txBody>
+      </p:sp>
+      <p:sp>
+        <p:nvSpPr>
+          <p:cNvPr id="68" name="TextBox 68"/>
+          <p:cNvSpPr txBox="1"/>
+          <p:nvPr/>
+        </p:nvSpPr>
+        <p:spPr>
+          <a:xfrm>
+            <a:off x="6566916" y="6001702"/>
+            <a:ext cx="3848908" cy="205359"/>
+          </a:xfrm>
+          <a:prstGeom prst="rect">
+            <a:avLst/>
+          </a:prstGeom>
+          <a:noFill/>
+          <a:ln>
+            <a:noFill/>
+          </a:ln>
+        </p:spPr>
+        <p:txBody>
+          <a:bodyPr wrap="none" lIns="0" tIns="0" rIns="0" bIns="0" anchor="t" anchorCtr="0">
+            <a:spAutoFit/>
+          </a:bodyPr>
+          <a:lstStyle/>
+          <a:p>
+            <a:pPr algn="l"/>
+            <a:r>
+              <a:rPr lang="zh-CN" sz="1050" dirty="0">
+                <a:solidFill>
+                  <a:schemeClr val="accent5"/>
+                </a:solidFill>
+                <a:latin typeface="Segoe UI"/>
+                <a:ea typeface="Microsoft YaHei"/>
+                <a:cs typeface="Segoe UI"/>
+              </a:rPr>
+              <a:t>Task / Judge / Runner 解耦设计，各组件可独立定制和替换</a:t>
+            </a:r>
+          </a:p>
+        </p:txBody>
+      </p:sp>
+      <p:sp>
+        <p:nvSpPr>
+          <p:cNvPr id="69" name="Rectangle 69"/>
+          <p:cNvSpPr/>
+          <p:nvPr/>
+        </p:nvSpPr>
+        <p:spPr>
+          <a:xfrm>
+            <a:off x="571500" y="6667500"/>
+            <a:ext cx="11049000" cy="9525"/>
+          </a:xfrm>
+          <a:prstGeom prst="rect">
+            <a:avLst/>
+          </a:prstGeom>
+          <a:solidFill>
+            <a:schemeClr val="accent4"/>
+          </a:solidFill>
+          <a:ln>
+            <a:noFill/>
+          </a:ln>
+        </p:spPr>
+      </p:sp>
+      <p:sp>
+        <p:nvSpPr>
+          <p:cNvPr id="70" name="Rectangle 5"/>
+          <p:cNvSpPr/>
+          <p:nvPr/>
+        </p:nvSpPr>
+        <p:spPr>
+          <a:xfrm>
+            <a:off x="571500" y="914400"/>
+            <a:ext cx="762000" cy="28575"/>
+          </a:xfrm>
+          <a:prstGeom prst="rect">
+            <a:avLst/>
+          </a:prstGeom>
+          <a:solidFill>
+            <a:schemeClr val="accent2"/>
+          </a:solidFill>
+          <a:ln>
+            <a:noFill/>
+          </a:ln>
+        </p:spPr>
+      </p:sp>
+    </p:spTree>
+  </p:cSld>
+  <p:clrMapOvr>
+    <a:masterClrMapping/>
+  </p:clrMapOvr>
+  <mc:AlternateContent xmlns:mc="http://schemas.openxmlformats.org/markup-compatibility/2006" xmlns:p14="http://schemas.microsoft.com/office/powerpoint/2010/main">
+    <mc:Choice Requires="p14">
+      <p:transition p14:dur="400">
+        <p:fade/>
+      </p:transition>
+    </mc:Choice>
+    <mc:Fallback xmlns="">
+      <p:transition>
+        <p:fade/>
+      </p:transition>
+    </mc:Fallback>
+  </mc:AlternateContent>
+</p:sld>
+</file>
+
+<file path=ppt/slides/slide7.xml><?xml version="1.0" encoding="utf-8"?>
+<p:sld xmlns:a="http://schemas.openxmlformats.org/drawingml/2006/main" xmlns:r="http://schemas.openxmlformats.org/officeDocument/2006/relationships" xmlns:p="http://schemas.openxmlformats.org/presentationml/2006/main">
+  <p:cSld>
+    <p:bg>
+      <p:bgPr>
+        <a:solidFill>
+          <a:schemeClr val="lt1"/>
+        </a:solidFill>
+        <a:effectLst/>
+      </p:bgPr>
+    </p:bg>
+    <p:spTree>
+      <p:nvGrpSpPr>
+        <p:cNvPr id="1" name=""/>
+        <p:cNvGrpSpPr/>
+        <p:nvPr/>
+      </p:nvGrpSpPr>
+      <p:grpSpPr>
+        <a:xfrm>
+          <a:off x="0" y="0"/>
+          <a:ext cx="0" cy="0"/>
+          <a:chOff x="0" y="0"/>
+          <a:chExt cx="0" cy="0"/>
+        </a:xfrm>
+      </p:grpSpPr>
+      <p:sp>
+        <p:nvSpPr>
+          <p:cNvPr id="2" name="Rectangle 2"/>
+          <p:cNvSpPr/>
+          <p:nvPr/>
+        </p:nvSpPr>
+        <p:spPr>
+          <a:xfrm>
+            <a:off x="0" y="0"/>
+            <a:ext cx="12192000" cy="38100"/>
           </a:xfrm>
           <a:prstGeom prst="rect">
             <a:avLst/>
@@ -13855,6 +15782,140 @@
             <a:noFill/>
           </a:ln>
         </p:spPr>
+        <p:txBody>
+          <a:bodyPr/>
+          <a:lstStyle/>
+          <a:p>
+            <a:endParaRPr/>
+          </a:p>
+        </p:txBody>
+      </p:sp>
+      <p:sp>
+        <p:nvSpPr>
+          <p:cNvPr id="3" name="TextBox 3"/>
+          <p:cNvSpPr txBox="1"/>
+          <p:nvPr/>
+        </p:nvSpPr>
+        <p:spPr>
+          <a:xfrm>
+            <a:off x="556260" y="438150"/>
+            <a:ext cx="878586" cy="586740"/>
+          </a:xfrm>
+          <a:prstGeom prst="rect">
+            <a:avLst/>
+          </a:prstGeom>
+          <a:noFill/>
+          <a:ln>
+            <a:noFill/>
+          </a:ln>
+        </p:spPr>
+        <p:txBody>
+          <a:bodyPr wrap="none" lIns="0" tIns="0" rIns="0" bIns="0" anchor="t" anchorCtr="0">
+            <a:spAutoFit/>
+          </a:bodyPr>
+          <a:lstStyle/>
+          <a:p>
+            <a:pPr algn="l"/>
+            <a:r>
+              <a:rPr lang="zh-CN" sz="3000" b="1" dirty="0">
+                <a:solidFill>
+                  <a:schemeClr val="accent1"/>
+                </a:solidFill>
+                <a:latin typeface="Segoe UI"/>
+                <a:ea typeface="Microsoft YaHei"/>
+                <a:cs typeface="Segoe UI"/>
+              </a:rPr>
+              <a:t>总结</a:t>
+            </a:r>
+          </a:p>
+        </p:txBody>
+      </p:sp>
+      <p:sp>
+        <p:nvSpPr>
+          <p:cNvPr id="4" name="Rectangle 4"/>
+          <p:cNvSpPr/>
+          <p:nvPr/>
+        </p:nvSpPr>
+        <p:spPr>
+          <a:xfrm>
+            <a:off x="571500" y="914400"/>
+            <a:ext cx="762000" cy="28575"/>
+          </a:xfrm>
+          <a:prstGeom prst="rect">
+            <a:avLst/>
+          </a:prstGeom>
+          <a:solidFill>
+            <a:schemeClr val="accent2"/>
+          </a:solidFill>
+          <a:ln>
+            <a:noFill/>
+          </a:ln>
+        </p:spPr>
+        <p:txBody>
+          <a:bodyPr/>
+          <a:lstStyle/>
+          <a:p>
+            <a:endParaRPr/>
+          </a:p>
+        </p:txBody>
+      </p:sp>
+      <p:sp>
+        <p:nvSpPr>
+          <p:cNvPr id="5" name="Rectangle 5"/>
+          <p:cNvSpPr/>
+          <p:nvPr/>
+        </p:nvSpPr>
+        <p:spPr>
+          <a:xfrm>
+            <a:off x="571500" y="1238250"/>
+            <a:ext cx="3524250" cy="2952750"/>
+          </a:xfrm>
+          <a:prstGeom prst="rect">
+            <a:avLst/>
+          </a:prstGeom>
+          <a:solidFill>
+            <a:schemeClr val="lt2"/>
+          </a:solidFill>
+          <a:ln>
+            <a:noFill/>
+          </a:ln>
+        </p:spPr>
+        <p:txBody>
+          <a:bodyPr/>
+          <a:lstStyle/>
+          <a:p>
+            <a:endParaRPr/>
+          </a:p>
+        </p:txBody>
+      </p:sp>
+      <p:sp>
+        <p:nvSpPr>
+          <p:cNvPr id="6" name="Rectangle 6"/>
+          <p:cNvSpPr/>
+          <p:nvPr/>
+        </p:nvSpPr>
+        <p:spPr>
+          <a:xfrm>
+            <a:off x="571500" y="1238250"/>
+            <a:ext cx="3524250" cy="38100"/>
+          </a:xfrm>
+          <a:prstGeom prst="rect">
+            <a:avLst/>
+          </a:prstGeom>
+          <a:solidFill>
+            <a:schemeClr val="accent1"/>
+          </a:solidFill>
+          <a:ln>
+            <a:noFill/>
+          </a:ln>
+        </p:spPr>
+        <p:txBody>
+          <a:bodyPr/>
+          <a:lstStyle/>
+          <a:p>
+            <a:endParaRPr/>
+          </a:p>
+        </p:txBody>
       </p:sp>
       <p:sp>
         <p:nvSpPr>
@@ -13957,6 +16018,13 @@
             <a:noFill/>
           </a:ln>
         </p:spPr>
+        <p:txBody>
+          <a:bodyPr/>
+          <a:lstStyle/>
+          <a:p>
+            <a:endParaRPr/>
+          </a:p>
+        </p:txBody>
       </p:sp>
       <p:sp>
         <p:nvSpPr>
@@ -14219,6 +16287,13 @@
             <a:noFill/>
           </a:ln>
         </p:spPr>
+        <p:txBody>
+          <a:bodyPr/>
+          <a:lstStyle/>
+          <a:p>
+            <a:endParaRPr/>
+          </a:p>
+        </p:txBody>
       </p:sp>
       <p:sp>
         <p:nvSpPr>
@@ -14241,6 +16316,13 @@
             <a:noFill/>
           </a:ln>
         </p:spPr>
+        <p:txBody>
+          <a:bodyPr/>
+          <a:lstStyle/>
+          <a:p>
+            <a:endParaRPr/>
+          </a:p>
+        </p:txBody>
       </p:sp>
       <p:sp>
         <p:nvSpPr>
@@ -14343,6 +16425,13 @@
             <a:noFill/>
           </a:ln>
         </p:spPr>
+        <p:txBody>
+          <a:bodyPr/>
+          <a:lstStyle/>
+          <a:p>
+            <a:endParaRPr/>
+          </a:p>
+        </p:txBody>
       </p:sp>
       <p:sp>
         <p:nvSpPr>
@@ -14605,6 +16694,13 @@
             <a:noFill/>
           </a:ln>
         </p:spPr>
+        <p:txBody>
+          <a:bodyPr/>
+          <a:lstStyle/>
+          <a:p>
+            <a:endParaRPr/>
+          </a:p>
+        </p:txBody>
       </p:sp>
       <p:sp>
         <p:nvSpPr>
@@ -14627,6 +16723,13 @@
             <a:noFill/>
           </a:ln>
         </p:spPr>
+        <p:txBody>
+          <a:bodyPr/>
+          <a:lstStyle/>
+          <a:p>
+            <a:endParaRPr/>
+          </a:p>
+        </p:txBody>
       </p:sp>
       <p:sp>
         <p:nvSpPr>
@@ -14729,6 +16832,13 @@
             <a:noFill/>
           </a:ln>
         </p:spPr>
+        <p:txBody>
+          <a:bodyPr/>
+          <a:lstStyle/>
+          <a:p>
+            <a:endParaRPr/>
+          </a:p>
+        </p:txBody>
       </p:sp>
       <p:sp>
         <p:nvSpPr>
@@ -14991,6 +17101,13 @@
             <a:noFill/>
           </a:ln>
         </p:spPr>
+        <p:txBody>
+          <a:bodyPr/>
+          <a:lstStyle/>
+          <a:p>
+            <a:endParaRPr/>
+          </a:p>
+        </p:txBody>
       </p:sp>
       <p:sp>
         <p:nvSpPr>
@@ -15187,7 +17304,7 @@
                 <a:ea typeface="Segoe UI"/>
                 <a:cs typeface="Segoe UI"/>
               </a:rPr>
-              <a:t>07 / 07</a:t>
+              <a:t>08 / 08</a:t>
             </a:r>
           </a:p>
         </p:txBody>
